--- a/examples/dify-intro/deck.pptx
+++ b/examples/dify-intro/deck.pptx
@@ -3088,6 +3088,14 @@
 <file path=ppt/slides/slide1.xml><?xml version="1.0" encoding="utf-8"?>
 <p:sld xmlns:a="http://schemas.openxmlformats.org/drawingml/2006/main" xmlns:p="http://schemas.openxmlformats.org/presentationml/2006/main" xmlns:r="http://schemas.openxmlformats.org/officeDocument/2006/relationships">
   <p:cSld>
+    <p:bg>
+      <p:bgPr>
+        <a:solidFill>
+          <a:srgbClr val="0A0E27"/>
+        </a:solidFill>
+        <a:effectLst/>
+      </p:bgPr>
+    </p:bg>
     <p:spTree>
       <p:nvGrpSpPr>
         <p:cNvPr id="1" name=""/>
@@ -3095,36 +3103,635 @@
         <p:nvPr/>
       </p:nvGrpSpPr>
       <p:grpSpPr/>
-      <p:pic>
-        <p:nvPicPr>
-          <p:cNvPr id="2" name="Picture 1" descr="01-cover.png"/>
-          <p:cNvPicPr>
-            <a:picLocks noChangeAspect="1"/>
-          </p:cNvPicPr>
-          <p:nvPr/>
-        </p:nvPicPr>
-        <p:blipFill>
-          <a:blip r:embed="rId2">
-            <a:extLst>
-              <a:ext uri="{96DAC541-7B7A-43D3-8B79-37D633B846F1}">
-                <asvg:svgBlip xmlns:asvg="http://schemas.microsoft.com/office/drawing/2016/SVG/main" r:embed="rId3"/>
-              </a:ext>
-            </a:extLst>
-          </a:blip>
-          <a:stretch>
-            <a:fillRect/>
-          </a:stretch>
-        </p:blipFill>
-        <p:spPr>
-          <a:xfrm>
-            <a:off x="0" y="0"/>
-            <a:ext cx="12191695" cy="6858000"/>
-          </a:xfrm>
-          <a:prstGeom prst="rect">
-            <a:avLst/>
-          </a:prstGeom>
-        </p:spPr>
-      </p:pic>
+      <p:sp>
+        <p:nvSpPr>
+          <p:cNvPr id="2" name="Rounded Rectangle 1"/>
+          <p:cNvSpPr/>
+          <p:nvPr/>
+        </p:nvSpPr>
+        <p:spPr>
+          <a:xfrm>
+            <a:off x="533386" y="533400"/>
+            <a:ext cx="11124921" cy="5505450"/>
+          </a:xfrm>
+          <a:prstGeom prst="roundRect">
+            <a:avLst>
+              <a:gd name="adj" fmla="val 4844"/>
+            </a:avLst>
+          </a:prstGeom>
+          <a:solidFill>
+            <a:srgbClr val="FFFFFF"/>
+          </a:solidFill>
+          <a:ln w="12700">
+            <a:solidFill>
+              <a:srgbClr val="FFFFFF"/>
+            </a:solidFill>
+          </a:ln>
+        </p:spPr>
+        <p:style>
+          <a:lnRef idx="1">
+            <a:schemeClr val="accent1"/>
+          </a:lnRef>
+          <a:fillRef idx="3">
+            <a:schemeClr val="accent1"/>
+          </a:fillRef>
+          <a:effectRef idx="2">
+            <a:schemeClr val="accent1"/>
+          </a:effectRef>
+          <a:fontRef idx="minor">
+            <a:schemeClr val="lt1"/>
+          </a:fontRef>
+        </p:style>
+        <p:txBody>
+          <a:bodyPr rtlCol="0" anchor="ctr"/>
+          <a:lstStyle/>
+          <a:p>
+            <a:pPr algn="ctr"/>
+          </a:p>
+        </p:txBody>
+      </p:sp>
+      <p:sp>
+        <p:nvSpPr>
+          <p:cNvPr id="3" name="TextBox 2"/>
+          <p:cNvSpPr txBox="1"/>
+          <p:nvPr/>
+        </p:nvSpPr>
+        <p:spPr>
+          <a:xfrm>
+            <a:off x="914377" y="3990975"/>
+            <a:ext cx="10362940" cy="1743075"/>
+          </a:xfrm>
+          <a:prstGeom prst="rect">
+            <a:avLst/>
+          </a:prstGeom>
+          <a:noFill/>
+        </p:spPr>
+        <p:txBody>
+          <a:bodyPr wrap="square" lIns="0" rIns="0" tIns="0" bIns="0">
+            <a:spAutoFit/>
+          </a:bodyPr>
+          <a:lstStyle/>
+          <a:p>
+            <a:pPr algn="r"/>
+            <a:r>
+              <a:rPr sz="11925" b="1" i="0" spc="600">
+                <a:latin typeface="PingFang SC"/>
+                <a:solidFill>
+                  <a:srgbClr val="7c5cff">
+                    <a:alpha val="6999"/>
+                  </a:srgbClr>
+                </a:solidFill>
+              </a:rPr>
+              <a:t>2026 FUTURE</a:t>
+            </a:r>
+          </a:p>
+        </p:txBody>
+      </p:sp>
+      <p:sp>
+        <p:nvSpPr>
+          <p:cNvPr id="4" name="TextBox 3"/>
+          <p:cNvSpPr txBox="1"/>
+          <p:nvPr/>
+        </p:nvSpPr>
+        <p:spPr>
+          <a:xfrm>
+            <a:off x="914377" y="952500"/>
+            <a:ext cx="10362940" cy="209550"/>
+          </a:xfrm>
+          <a:prstGeom prst="rect">
+            <a:avLst/>
+          </a:prstGeom>
+          <a:noFill/>
+        </p:spPr>
+        <p:txBody>
+          <a:bodyPr wrap="square" lIns="0" rIns="0" tIns="0" bIns="0">
+            <a:spAutoFit/>
+          </a:bodyPr>
+          <a:lstStyle/>
+          <a:p>
+            <a:pPr algn="l"/>
+            <a:r>
+              <a:rPr sz="1200" b="1" i="0" spc="300">
+                <a:solidFill>
+                  <a:srgbClr val="00D4FF"/>
+                </a:solidFill>
+                <a:latin typeface="PingFang SC"/>
+              </a:rPr>
+              <a:t>PRODUCT INTRO · 2026 Q2</a:t>
+            </a:r>
+          </a:p>
+        </p:txBody>
+      </p:sp>
+      <p:sp>
+        <p:nvSpPr>
+          <p:cNvPr id="5" name="TextBox 4"/>
+          <p:cNvSpPr txBox="1"/>
+          <p:nvPr/>
+        </p:nvSpPr>
+        <p:spPr>
+          <a:xfrm>
+            <a:off x="914377" y="1276350"/>
+            <a:ext cx="10362940" cy="685800"/>
+          </a:xfrm>
+          <a:prstGeom prst="rect">
+            <a:avLst/>
+          </a:prstGeom>
+          <a:noFill/>
+        </p:spPr>
+        <p:txBody>
+          <a:bodyPr wrap="square" lIns="0" rIns="0" tIns="0" bIns="0">
+            <a:spAutoFit/>
+          </a:bodyPr>
+          <a:lstStyle/>
+          <a:p>
+            <a:pPr algn="l"/>
+            <a:r>
+              <a:rPr sz="4500" b="1" i="0">
+                <a:solidFill>
+                  <a:srgbClr val="FFFFFF"/>
+                </a:solidFill>
+                <a:latin typeface="PingFang SC"/>
+              </a:rPr>
+              <a:t>Dify 企业介绍</a:t>
+            </a:r>
+          </a:p>
+        </p:txBody>
+      </p:sp>
+      <p:sp>
+        <p:nvSpPr>
+          <p:cNvPr id="6" name="TextBox 5"/>
+          <p:cNvSpPr txBox="1"/>
+          <p:nvPr/>
+        </p:nvSpPr>
+        <p:spPr>
+          <a:xfrm>
+            <a:off x="914377" y="1962150"/>
+            <a:ext cx="10362940" cy="685800"/>
+          </a:xfrm>
+          <a:prstGeom prst="rect">
+            <a:avLst/>
+          </a:prstGeom>
+          <a:noFill/>
+        </p:spPr>
+        <p:txBody>
+          <a:bodyPr wrap="square" lIns="0" rIns="0" tIns="0" bIns="0">
+            <a:spAutoFit/>
+          </a:bodyPr>
+          <a:lstStyle/>
+          <a:p>
+            <a:pPr algn="l"/>
+            <a:r>
+              <a:rPr sz="4500" b="1" i="0">
+                <a:solidFill>
+                  <a:srgbClr val="FFFFFF"/>
+                </a:solidFill>
+                <a:latin typeface="PingFang SC"/>
+              </a:rPr>
+              <a:t>下一代 AI 应用开发平台</a:t>
+            </a:r>
+          </a:p>
+        </p:txBody>
+      </p:sp>
+      <p:sp>
+        <p:nvSpPr>
+          <p:cNvPr id="7" name="Rounded Rectangle 6"/>
+          <p:cNvSpPr/>
+          <p:nvPr/>
+        </p:nvSpPr>
+        <p:spPr>
+          <a:xfrm>
+            <a:off x="914377" y="2686050"/>
+            <a:ext cx="1238219" cy="209550"/>
+          </a:xfrm>
+          <a:prstGeom prst="roundRect">
+            <a:avLst>
+              <a:gd name="adj" fmla="val 50000"/>
+            </a:avLst>
+          </a:prstGeom>
+          <a:solidFill>
+            <a:srgbClr val="7C5CFF"/>
+          </a:solidFill>
+          <a:ln w="6350">
+            <a:solidFill>
+              <a:srgbClr val="7C5CFF"/>
+            </a:solidFill>
+          </a:ln>
+        </p:spPr>
+        <p:style>
+          <a:lnRef idx="1">
+            <a:schemeClr val="accent1"/>
+          </a:lnRef>
+          <a:fillRef idx="3">
+            <a:schemeClr val="accent1"/>
+          </a:fillRef>
+          <a:effectRef idx="2">
+            <a:schemeClr val="accent1"/>
+          </a:effectRef>
+          <a:fontRef idx="minor">
+            <a:schemeClr val="lt1"/>
+          </a:fontRef>
+        </p:style>
+        <p:txBody>
+          <a:bodyPr rtlCol="0" anchor="ctr"/>
+          <a:lstStyle/>
+          <a:p>
+            <a:pPr algn="ctr"/>
+          </a:p>
+        </p:txBody>
+      </p:sp>
+      <p:sp>
+        <p:nvSpPr>
+          <p:cNvPr id="8" name="TextBox 7"/>
+          <p:cNvSpPr txBox="1"/>
+          <p:nvPr/>
+        </p:nvSpPr>
+        <p:spPr>
+          <a:xfrm>
+            <a:off x="914377" y="2714625"/>
+            <a:ext cx="1238219" cy="171450"/>
+          </a:xfrm>
+          <a:prstGeom prst="rect">
+            <a:avLst/>
+          </a:prstGeom>
+          <a:noFill/>
+        </p:spPr>
+        <p:txBody>
+          <a:bodyPr wrap="square" lIns="0" rIns="0" tIns="0" bIns="0">
+            <a:spAutoFit/>
+          </a:bodyPr>
+          <a:lstStyle/>
+          <a:p>
+            <a:pPr algn="ctr"/>
+            <a:r>
+              <a:rPr sz="825" b="1" i="0" spc="50">
+                <a:solidFill>
+                  <a:srgbClr val="FFFFFF"/>
+                </a:solidFill>
+                <a:latin typeface="PingFang SC"/>
+              </a:rPr>
+              <a:t>PRODUCTION-READY</a:t>
+            </a:r>
+          </a:p>
+        </p:txBody>
+      </p:sp>
+      <p:sp>
+        <p:nvSpPr>
+          <p:cNvPr id="9" name="TextBox 8"/>
+          <p:cNvSpPr txBox="1"/>
+          <p:nvPr/>
+        </p:nvSpPr>
+        <p:spPr>
+          <a:xfrm>
+            <a:off x="914377" y="3162300"/>
+            <a:ext cx="10362940" cy="400050"/>
+          </a:xfrm>
+          <a:prstGeom prst="rect">
+            <a:avLst/>
+          </a:prstGeom>
+          <a:noFill/>
+        </p:spPr>
+        <p:txBody>
+          <a:bodyPr wrap="square" lIns="0" rIns="0" tIns="0" bIns="0">
+            <a:spAutoFit/>
+          </a:bodyPr>
+          <a:lstStyle/>
+          <a:p>
+            <a:pPr algn="l"/>
+            <a:r>
+              <a:rPr sz="2250" b="0" i="0">
+                <a:solidFill>
+                  <a:srgbClr val="BCC4D8"/>
+                </a:solidFill>
+                <a:latin typeface="PingFang SC"/>
+              </a:rPr>
+              <a:t>把生成式 AI 的不确定，变成产品落地的确定</a:t>
+            </a:r>
+          </a:p>
+        </p:txBody>
+      </p:sp>
+      <p:sp>
+        <p:nvSpPr>
+          <p:cNvPr id="10" name="Rectangle 9"/>
+          <p:cNvSpPr/>
+          <p:nvPr/>
+        </p:nvSpPr>
+        <p:spPr>
+          <a:xfrm>
+            <a:off x="914377" y="4895850"/>
+            <a:ext cx="1142971" cy="38100"/>
+          </a:xfrm>
+          <a:prstGeom prst="rect">
+            <a:avLst/>
+          </a:prstGeom>
+          <a:solidFill>
+            <a:srgbClr val="7C5CFF"/>
+          </a:solidFill>
+          <a:ln>
+            <a:noFill/>
+          </a:ln>
+        </p:spPr>
+        <p:style>
+          <a:lnRef idx="1">
+            <a:schemeClr val="accent1"/>
+          </a:lnRef>
+          <a:fillRef idx="3">
+            <a:schemeClr val="accent1"/>
+          </a:fillRef>
+          <a:effectRef idx="2">
+            <a:schemeClr val="accent1"/>
+          </a:effectRef>
+          <a:fontRef idx="minor">
+            <a:schemeClr val="lt1"/>
+          </a:fontRef>
+        </p:style>
+        <p:txBody>
+          <a:bodyPr rtlCol="0" anchor="ctr"/>
+          <a:lstStyle/>
+          <a:p>
+            <a:pPr algn="ctr"/>
+          </a:p>
+        </p:txBody>
+      </p:sp>
+      <p:sp>
+        <p:nvSpPr>
+          <p:cNvPr id="11" name="TextBox 10"/>
+          <p:cNvSpPr txBox="1"/>
+          <p:nvPr/>
+        </p:nvSpPr>
+        <p:spPr>
+          <a:xfrm>
+            <a:off x="914377" y="5181600"/>
+            <a:ext cx="3447963" cy="171450"/>
+          </a:xfrm>
+          <a:prstGeom prst="rect">
+            <a:avLst/>
+          </a:prstGeom>
+          <a:noFill/>
+        </p:spPr>
+        <p:txBody>
+          <a:bodyPr wrap="square" lIns="0" rIns="0" tIns="0" bIns="0">
+            <a:spAutoFit/>
+          </a:bodyPr>
+          <a:lstStyle/>
+          <a:p>
+            <a:pPr algn="l"/>
+            <a:r>
+              <a:rPr sz="900" b="0" i="0" spc="200">
+                <a:solidFill>
+                  <a:srgbClr val="6B7392"/>
+                </a:solidFill>
+                <a:latin typeface="PingFang SC"/>
+              </a:rPr>
+              <a:t>PRESENTED BY</a:t>
+            </a:r>
+          </a:p>
+        </p:txBody>
+      </p:sp>
+      <p:sp>
+        <p:nvSpPr>
+          <p:cNvPr id="12" name="TextBox 11"/>
+          <p:cNvSpPr txBox="1"/>
+          <p:nvPr/>
+        </p:nvSpPr>
+        <p:spPr>
+          <a:xfrm>
+            <a:off x="914377" y="5391150"/>
+            <a:ext cx="3447963" cy="209550"/>
+          </a:xfrm>
+          <a:prstGeom prst="rect">
+            <a:avLst/>
+          </a:prstGeom>
+          <a:noFill/>
+        </p:spPr>
+        <p:txBody>
+          <a:bodyPr wrap="square" lIns="0" rIns="0" tIns="0" bIns="0">
+            <a:spAutoFit/>
+          </a:bodyPr>
+          <a:lstStyle/>
+          <a:p>
+            <a:pPr algn="l"/>
+            <a:r>
+              <a:rPr sz="1350" b="1" i="0">
+                <a:solidFill>
+                  <a:srgbClr val="FFFFFF"/>
+                </a:solidFill>
+                <a:latin typeface="PingFang SC"/>
+              </a:rPr>
+              <a:t>Dify Team</a:t>
+            </a:r>
+          </a:p>
+        </p:txBody>
+      </p:sp>
+      <p:sp>
+        <p:nvSpPr>
+          <p:cNvPr id="13" name="TextBox 12"/>
+          <p:cNvSpPr txBox="1"/>
+          <p:nvPr/>
+        </p:nvSpPr>
+        <p:spPr>
+          <a:xfrm>
+            <a:off x="4362340" y="5181600"/>
+            <a:ext cx="3447963" cy="171450"/>
+          </a:xfrm>
+          <a:prstGeom prst="rect">
+            <a:avLst/>
+          </a:prstGeom>
+          <a:noFill/>
+        </p:spPr>
+        <p:txBody>
+          <a:bodyPr wrap="square" lIns="0" rIns="0" tIns="0" bIns="0">
+            <a:spAutoFit/>
+          </a:bodyPr>
+          <a:lstStyle/>
+          <a:p>
+            <a:pPr algn="l"/>
+            <a:r>
+              <a:rPr sz="900" b="0" i="0" spc="200">
+                <a:solidFill>
+                  <a:srgbClr val="6B7392"/>
+                </a:solidFill>
+                <a:latin typeface="PingFang SC"/>
+              </a:rPr>
+              <a:t>DATE</a:t>
+            </a:r>
+          </a:p>
+        </p:txBody>
+      </p:sp>
+      <p:sp>
+        <p:nvSpPr>
+          <p:cNvPr id="14" name="TextBox 13"/>
+          <p:cNvSpPr txBox="1"/>
+          <p:nvPr/>
+        </p:nvSpPr>
+        <p:spPr>
+          <a:xfrm>
+            <a:off x="4362340" y="5391150"/>
+            <a:ext cx="3447963" cy="209550"/>
+          </a:xfrm>
+          <a:prstGeom prst="rect">
+            <a:avLst/>
+          </a:prstGeom>
+          <a:noFill/>
+        </p:spPr>
+        <p:txBody>
+          <a:bodyPr wrap="square" lIns="0" rIns="0" tIns="0" bIns="0">
+            <a:spAutoFit/>
+          </a:bodyPr>
+          <a:lstStyle/>
+          <a:p>
+            <a:pPr algn="l"/>
+            <a:r>
+              <a:rPr sz="1350" b="1" i="0">
+                <a:solidFill>
+                  <a:srgbClr val="FFFFFF"/>
+                </a:solidFill>
+                <a:latin typeface="PingFang SC"/>
+              </a:rPr>
+              <a:t>2026 Q2</a:t>
+            </a:r>
+          </a:p>
+        </p:txBody>
+      </p:sp>
+      <p:sp>
+        <p:nvSpPr>
+          <p:cNvPr id="15" name="TextBox 14"/>
+          <p:cNvSpPr txBox="1"/>
+          <p:nvPr/>
+        </p:nvSpPr>
+        <p:spPr>
+          <a:xfrm>
+            <a:off x="7810304" y="5181600"/>
+            <a:ext cx="3447963" cy="171450"/>
+          </a:xfrm>
+          <a:prstGeom prst="rect">
+            <a:avLst/>
+          </a:prstGeom>
+          <a:noFill/>
+        </p:spPr>
+        <p:txBody>
+          <a:bodyPr wrap="square" lIns="0" rIns="0" tIns="0" bIns="0">
+            <a:spAutoFit/>
+          </a:bodyPr>
+          <a:lstStyle/>
+          <a:p>
+            <a:pPr algn="l"/>
+            <a:r>
+              <a:rPr sz="900" b="0" i="0" spc="200">
+                <a:solidFill>
+                  <a:srgbClr val="6B7392"/>
+                </a:solidFill>
+                <a:latin typeface="PingFang SC"/>
+              </a:rPr>
+              <a:t>AUDIENCE</a:t>
+            </a:r>
+          </a:p>
+        </p:txBody>
+      </p:sp>
+      <p:sp>
+        <p:nvSpPr>
+          <p:cNvPr id="16" name="TextBox 15"/>
+          <p:cNvSpPr txBox="1"/>
+          <p:nvPr/>
+        </p:nvSpPr>
+        <p:spPr>
+          <a:xfrm>
+            <a:off x="7810304" y="5391150"/>
+            <a:ext cx="3447963" cy="209550"/>
+          </a:xfrm>
+          <a:prstGeom prst="rect">
+            <a:avLst/>
+          </a:prstGeom>
+          <a:noFill/>
+        </p:spPr>
+        <p:txBody>
+          <a:bodyPr wrap="square" lIns="0" rIns="0" tIns="0" bIns="0">
+            <a:spAutoFit/>
+          </a:bodyPr>
+          <a:lstStyle/>
+          <a:p>
+            <a:pPr algn="l"/>
+            <a:r>
+              <a:rPr sz="1350" b="1" i="0">
+                <a:solidFill>
+                  <a:srgbClr val="FFFFFF"/>
+                </a:solidFill>
+                <a:latin typeface="PingFang SC"/>
+              </a:rPr>
+              <a:t>企业客户 / 投资人</a:t>
+            </a:r>
+          </a:p>
+        </p:txBody>
+      </p:sp>
+      <p:sp>
+        <p:nvSpPr>
+          <p:cNvPr id="17" name="TextBox 16"/>
+          <p:cNvSpPr txBox="1"/>
+          <p:nvPr/>
+        </p:nvSpPr>
+        <p:spPr>
+          <a:xfrm>
+            <a:off x="533386" y="6610350"/>
+            <a:ext cx="5714857" cy="190500"/>
+          </a:xfrm>
+          <a:prstGeom prst="rect">
+            <a:avLst/>
+          </a:prstGeom>
+          <a:noFill/>
+        </p:spPr>
+        <p:txBody>
+          <a:bodyPr wrap="square" lIns="0" rIns="0" tIns="0" bIns="0">
+            <a:spAutoFit/>
+          </a:bodyPr>
+          <a:lstStyle/>
+          <a:p>
+            <a:pPr algn="l"/>
+            <a:r>
+              <a:rPr sz="1050" b="0" i="0">
+                <a:solidFill>
+                  <a:srgbClr val="6B7392"/>
+                </a:solidFill>
+                <a:latin typeface="PingFang SC"/>
+              </a:rPr>
+              <a:t>Dify 企业介绍</a:t>
+            </a:r>
+          </a:p>
+        </p:txBody>
+      </p:sp>
+      <p:sp>
+        <p:nvSpPr>
+          <p:cNvPr id="18" name="TextBox 17"/>
+          <p:cNvSpPr txBox="1"/>
+          <p:nvPr/>
+        </p:nvSpPr>
+        <p:spPr>
+          <a:xfrm>
+            <a:off x="9753356" y="6610350"/>
+            <a:ext cx="1904952" cy="190500"/>
+          </a:xfrm>
+          <a:prstGeom prst="rect">
+            <a:avLst/>
+          </a:prstGeom>
+          <a:noFill/>
+        </p:spPr>
+        <p:txBody>
+          <a:bodyPr wrap="square" lIns="0" rIns="0" tIns="0" bIns="0">
+            <a:spAutoFit/>
+          </a:bodyPr>
+          <a:lstStyle/>
+          <a:p>
+            <a:pPr algn="r"/>
+            <a:r>
+              <a:rPr sz="1050" b="0" i="0">
+                <a:solidFill>
+                  <a:srgbClr val="6B7392"/>
+                </a:solidFill>
+                <a:latin typeface="SF Mono"/>
+              </a:rPr>
+              <a:t>01 / 08</a:t>
+            </a:r>
+          </a:p>
+        </p:txBody>
+      </p:sp>
     </p:spTree>
   </p:cSld>
   <p:clrMapOvr>
@@ -3136,6 +3743,14 @@
 <file path=ppt/slides/slide2.xml><?xml version="1.0" encoding="utf-8"?>
 <p:sld xmlns:a="http://schemas.openxmlformats.org/drawingml/2006/main" xmlns:p="http://schemas.openxmlformats.org/presentationml/2006/main" xmlns:r="http://schemas.openxmlformats.org/officeDocument/2006/relationships">
   <p:cSld>
+    <p:bg>
+      <p:bgPr>
+        <a:solidFill>
+          <a:srgbClr val="0A0E27"/>
+        </a:solidFill>
+        <a:effectLst/>
+      </p:bgPr>
+    </p:bg>
     <p:spTree>
       <p:nvGrpSpPr>
         <p:cNvPr id="1" name=""/>
@@ -3143,36 +3758,606 @@
         <p:nvPr/>
       </p:nvGrpSpPr>
       <p:grpSpPr/>
-      <p:pic>
-        <p:nvPicPr>
-          <p:cNvPr id="2" name="Picture 1" descr="02-two-col-symmetric-demo.png"/>
-          <p:cNvPicPr>
-            <a:picLocks noChangeAspect="1"/>
-          </p:cNvPicPr>
-          <p:nvPr/>
-        </p:nvPicPr>
-        <p:blipFill>
-          <a:blip r:embed="rId2">
-            <a:extLst>
-              <a:ext uri="{96DAC541-7B7A-43D3-8B79-37D633B846F1}">
-                <asvg:svgBlip xmlns:asvg="http://schemas.microsoft.com/office/drawing/2016/SVG/main" r:embed="rId3"/>
-              </a:ext>
-            </a:extLst>
-          </a:blip>
-          <a:stretch>
-            <a:fillRect/>
-          </a:stretch>
-        </p:blipFill>
-        <p:spPr>
-          <a:xfrm>
-            <a:off x="0" y="0"/>
-            <a:ext cx="12191695" cy="6858000"/>
-          </a:xfrm>
-          <a:prstGeom prst="rect">
-            <a:avLst/>
-          </a:prstGeom>
-        </p:spPr>
-      </p:pic>
+      <p:sp>
+        <p:nvSpPr>
+          <p:cNvPr id="2" name="Rounded Rectangle 1"/>
+          <p:cNvSpPr/>
+          <p:nvPr/>
+        </p:nvSpPr>
+        <p:spPr>
+          <a:xfrm>
+            <a:off x="533386" y="533400"/>
+            <a:ext cx="5467213" cy="5505450"/>
+          </a:xfrm>
+          <a:prstGeom prst="roundRect">
+            <a:avLst>
+              <a:gd name="adj" fmla="val 4878"/>
+            </a:avLst>
+          </a:prstGeom>
+          <a:solidFill>
+            <a:srgbClr val="FFFFFF"/>
+          </a:solidFill>
+          <a:ln w="12700">
+            <a:solidFill>
+              <a:srgbClr val="FFFFFF"/>
+            </a:solidFill>
+          </a:ln>
+        </p:spPr>
+        <p:style>
+          <a:lnRef idx="1">
+            <a:schemeClr val="accent1"/>
+          </a:lnRef>
+          <a:fillRef idx="3">
+            <a:schemeClr val="accent1"/>
+          </a:fillRef>
+          <a:effectRef idx="2">
+            <a:schemeClr val="accent1"/>
+          </a:effectRef>
+          <a:fontRef idx="minor">
+            <a:schemeClr val="lt1"/>
+          </a:fontRef>
+        </p:style>
+        <p:txBody>
+          <a:bodyPr rtlCol="0" anchor="ctr"/>
+          <a:lstStyle/>
+          <a:p>
+            <a:pPr algn="ctr"/>
+          </a:p>
+        </p:txBody>
+      </p:sp>
+      <p:sp>
+        <p:nvSpPr>
+          <p:cNvPr id="3" name="TextBox 2"/>
+          <p:cNvSpPr txBox="1"/>
+          <p:nvPr/>
+        </p:nvSpPr>
+        <p:spPr>
+          <a:xfrm>
+            <a:off x="914377" y="952500"/>
+            <a:ext cx="4705232" cy="209550"/>
+          </a:xfrm>
+          <a:prstGeom prst="rect">
+            <a:avLst/>
+          </a:prstGeom>
+          <a:noFill/>
+        </p:spPr>
+        <p:txBody>
+          <a:bodyPr wrap="square" lIns="0" rIns="0" tIns="0" bIns="0">
+            <a:spAutoFit/>
+          </a:bodyPr>
+          <a:lstStyle/>
+          <a:p>
+            <a:pPr algn="l"/>
+            <a:r>
+              <a:rPr sz="1200" b="1" i="0" spc="300">
+                <a:solidFill>
+                  <a:srgbClr val="00D4FF"/>
+                </a:solidFill>
+                <a:latin typeface="PingFang SC"/>
+              </a:rPr>
+              <a:t>全球开发者</a:t>
+            </a:r>
+          </a:p>
+        </p:txBody>
+      </p:sp>
+      <p:sp>
+        <p:nvSpPr>
+          <p:cNvPr id="4" name="TextBox 3"/>
+          <p:cNvSpPr txBox="1"/>
+          <p:nvPr/>
+        </p:nvSpPr>
+        <p:spPr>
+          <a:xfrm>
+            <a:off x="914377" y="1371600"/>
+            <a:ext cx="1828754" cy="1257300"/>
+          </a:xfrm>
+          <a:prstGeom prst="rect">
+            <a:avLst/>
+          </a:prstGeom>
+          <a:noFill/>
+        </p:spPr>
+        <p:txBody>
+          <a:bodyPr wrap="square" lIns="0" rIns="0" tIns="0" bIns="0">
+            <a:spAutoFit/>
+          </a:bodyPr>
+          <a:lstStyle/>
+          <a:p>
+            <a:pPr algn="l"/>
+            <a:r>
+              <a:rPr sz="8250" b="1" i="0">
+                <a:solidFill>
+                  <a:srgbClr val="FFFFFF"/>
+                </a:solidFill>
+                <a:latin typeface="PingFang SC"/>
+              </a:rPr>
+              <a:t>180</a:t>
+            </a:r>
+          </a:p>
+        </p:txBody>
+      </p:sp>
+      <p:sp>
+        <p:nvSpPr>
+          <p:cNvPr id="5" name="TextBox 4"/>
+          <p:cNvSpPr txBox="1"/>
+          <p:nvPr/>
+        </p:nvSpPr>
+        <p:spPr>
+          <a:xfrm>
+            <a:off x="2705032" y="2114550"/>
+            <a:ext cx="533386" cy="400050"/>
+          </a:xfrm>
+          <a:prstGeom prst="rect">
+            <a:avLst/>
+          </a:prstGeom>
+          <a:noFill/>
+        </p:spPr>
+        <p:txBody>
+          <a:bodyPr wrap="square" lIns="0" rIns="0" tIns="0" bIns="0">
+            <a:spAutoFit/>
+          </a:bodyPr>
+          <a:lstStyle/>
+          <a:p>
+            <a:pPr algn="l"/>
+            <a:r>
+              <a:rPr sz="2250" b="1" i="0">
+                <a:solidFill>
+                  <a:srgbClr val="BCC4D8"/>
+                </a:solidFill>
+                <a:latin typeface="PingFang SC"/>
+              </a:rPr>
+              <a:t>万+</a:t>
+            </a:r>
+          </a:p>
+        </p:txBody>
+      </p:sp>
+      <p:sp>
+        <p:nvSpPr>
+          <p:cNvPr id="6" name="TextBox 5"/>
+          <p:cNvSpPr txBox="1"/>
+          <p:nvPr/>
+        </p:nvSpPr>
+        <p:spPr>
+          <a:xfrm>
+            <a:off x="914377" y="2571750"/>
+            <a:ext cx="4705232" cy="285750"/>
+          </a:xfrm>
+          <a:prstGeom prst="rect">
+            <a:avLst/>
+          </a:prstGeom>
+          <a:noFill/>
+        </p:spPr>
+        <p:txBody>
+          <a:bodyPr wrap="square" lIns="0" rIns="0" tIns="0" bIns="0">
+            <a:spAutoFit/>
+          </a:bodyPr>
+          <a:lstStyle/>
+          <a:p>
+            <a:pPr algn="l"/>
+            <a:r>
+              <a:rPr sz="1650" b="1" i="0">
+                <a:solidFill>
+                  <a:srgbClr val="22D97F"/>
+                </a:solidFill>
+                <a:latin typeface="PingFang SC"/>
+              </a:rPr>
+              <a:t>↑ 180% YoY</a:t>
+            </a:r>
+          </a:p>
+        </p:txBody>
+      </p:sp>
+      <p:sp>
+        <p:nvSpPr>
+          <p:cNvPr id="7" name="Rectangle 6"/>
+          <p:cNvSpPr/>
+          <p:nvPr/>
+        </p:nvSpPr>
+        <p:spPr>
+          <a:xfrm>
+            <a:off x="914377" y="5048250"/>
+            <a:ext cx="571485" cy="28575"/>
+          </a:xfrm>
+          <a:prstGeom prst="rect">
+            <a:avLst/>
+          </a:prstGeom>
+          <a:solidFill>
+            <a:srgbClr val="7C5CFF"/>
+          </a:solidFill>
+          <a:ln>
+            <a:noFill/>
+          </a:ln>
+        </p:spPr>
+        <p:style>
+          <a:lnRef idx="1">
+            <a:schemeClr val="accent1"/>
+          </a:lnRef>
+          <a:fillRef idx="3">
+            <a:schemeClr val="accent1"/>
+          </a:fillRef>
+          <a:effectRef idx="2">
+            <a:schemeClr val="accent1"/>
+          </a:effectRef>
+          <a:fontRef idx="minor">
+            <a:schemeClr val="lt1"/>
+          </a:fontRef>
+        </p:style>
+        <p:txBody>
+          <a:bodyPr rtlCol="0" anchor="ctr"/>
+          <a:lstStyle/>
+          <a:p>
+            <a:pPr algn="ctr"/>
+          </a:p>
+        </p:txBody>
+      </p:sp>
+      <p:sp>
+        <p:nvSpPr>
+          <p:cNvPr id="8" name="TextBox 7"/>
+          <p:cNvSpPr txBox="1"/>
+          <p:nvPr/>
+        </p:nvSpPr>
+        <p:spPr>
+          <a:xfrm>
+            <a:off x="914377" y="5181600"/>
+            <a:ext cx="4705232" cy="190500"/>
+          </a:xfrm>
+          <a:prstGeom prst="rect">
+            <a:avLst/>
+          </a:prstGeom>
+          <a:noFill/>
+        </p:spPr>
+        <p:txBody>
+          <a:bodyPr wrap="square" lIns="0" rIns="0" tIns="0" bIns="0">
+            <a:spAutoFit/>
+          </a:bodyPr>
+          <a:lstStyle/>
+          <a:p>
+            <a:pPr algn="l"/>
+            <a:r>
+              <a:rPr sz="1050" b="0" i="0">
+                <a:solidFill>
+                  <a:srgbClr val="BCC4D8"/>
+                </a:solidFill>
+                <a:latin typeface="PingFang SC"/>
+              </a:rPr>
+              <a:t>覆盖 130+ 个国家与地区</a:t>
+            </a:r>
+          </a:p>
+        </p:txBody>
+      </p:sp>
+      <p:sp>
+        <p:nvSpPr>
+          <p:cNvPr id="9" name="Rounded Rectangle 8"/>
+          <p:cNvSpPr/>
+          <p:nvPr/>
+        </p:nvSpPr>
+        <p:spPr>
+          <a:xfrm>
+            <a:off x="6191095" y="533400"/>
+            <a:ext cx="5467213" cy="5505450"/>
+          </a:xfrm>
+          <a:prstGeom prst="roundRect">
+            <a:avLst>
+              <a:gd name="adj" fmla="val 4878"/>
+            </a:avLst>
+          </a:prstGeom>
+          <a:solidFill>
+            <a:srgbClr val="FFFFFF"/>
+          </a:solidFill>
+          <a:ln w="12700">
+            <a:solidFill>
+              <a:srgbClr val="FFFFFF"/>
+            </a:solidFill>
+          </a:ln>
+        </p:spPr>
+        <p:style>
+          <a:lnRef idx="1">
+            <a:schemeClr val="accent1"/>
+          </a:lnRef>
+          <a:fillRef idx="3">
+            <a:schemeClr val="accent1"/>
+          </a:fillRef>
+          <a:effectRef idx="2">
+            <a:schemeClr val="accent1"/>
+          </a:effectRef>
+          <a:fontRef idx="minor">
+            <a:schemeClr val="lt1"/>
+          </a:fontRef>
+        </p:style>
+        <p:txBody>
+          <a:bodyPr rtlCol="0" anchor="ctr"/>
+          <a:lstStyle/>
+          <a:p>
+            <a:pPr algn="ctr"/>
+          </a:p>
+        </p:txBody>
+      </p:sp>
+      <p:sp>
+        <p:nvSpPr>
+          <p:cNvPr id="10" name="TextBox 9"/>
+          <p:cNvSpPr txBox="1"/>
+          <p:nvPr/>
+        </p:nvSpPr>
+        <p:spPr>
+          <a:xfrm>
+            <a:off x="6572085" y="952500"/>
+            <a:ext cx="4705232" cy="209550"/>
+          </a:xfrm>
+          <a:prstGeom prst="rect">
+            <a:avLst/>
+          </a:prstGeom>
+          <a:noFill/>
+        </p:spPr>
+        <p:txBody>
+          <a:bodyPr wrap="square" lIns="0" rIns="0" tIns="0" bIns="0">
+            <a:spAutoFit/>
+          </a:bodyPr>
+          <a:lstStyle/>
+          <a:p>
+            <a:pPr algn="l"/>
+            <a:r>
+              <a:rPr sz="1200" b="1" i="0" spc="300">
+                <a:solidFill>
+                  <a:srgbClr val="00D4FF"/>
+                </a:solidFill>
+                <a:latin typeface="PingFang SC"/>
+              </a:rPr>
+              <a:t>企业客户</a:t>
+            </a:r>
+          </a:p>
+        </p:txBody>
+      </p:sp>
+      <p:sp>
+        <p:nvSpPr>
+          <p:cNvPr id="11" name="TextBox 10"/>
+          <p:cNvSpPr txBox="1"/>
+          <p:nvPr/>
+        </p:nvSpPr>
+        <p:spPr>
+          <a:xfrm>
+            <a:off x="6572085" y="1371600"/>
+            <a:ext cx="2971725" cy="1257300"/>
+          </a:xfrm>
+          <a:prstGeom prst="rect">
+            <a:avLst/>
+          </a:prstGeom>
+          <a:noFill/>
+        </p:spPr>
+        <p:txBody>
+          <a:bodyPr wrap="square" lIns="0" rIns="0" tIns="0" bIns="0">
+            <a:spAutoFit/>
+          </a:bodyPr>
+          <a:lstStyle/>
+          <a:p>
+            <a:pPr algn="l"/>
+            <a:r>
+              <a:rPr sz="8250" b="1" i="0">
+                <a:solidFill>
+                  <a:srgbClr val="FFFFFF"/>
+                </a:solidFill>
+                <a:latin typeface="PingFang SC"/>
+              </a:rPr>
+              <a:t>12000</a:t>
+            </a:r>
+          </a:p>
+        </p:txBody>
+      </p:sp>
+      <p:sp>
+        <p:nvSpPr>
+          <p:cNvPr id="12" name="TextBox 11"/>
+          <p:cNvSpPr txBox="1"/>
+          <p:nvPr/>
+        </p:nvSpPr>
+        <p:spPr>
+          <a:xfrm>
+            <a:off x="9505712" y="2114550"/>
+            <a:ext cx="361940" cy="400050"/>
+          </a:xfrm>
+          <a:prstGeom prst="rect">
+            <a:avLst/>
+          </a:prstGeom>
+          <a:noFill/>
+        </p:spPr>
+        <p:txBody>
+          <a:bodyPr wrap="square" lIns="0" rIns="0" tIns="0" bIns="0">
+            <a:spAutoFit/>
+          </a:bodyPr>
+          <a:lstStyle/>
+          <a:p>
+            <a:pPr algn="l"/>
+            <a:r>
+              <a:rPr sz="2250" b="1" i="0">
+                <a:solidFill>
+                  <a:srgbClr val="BCC4D8"/>
+                </a:solidFill>
+                <a:latin typeface="PingFang SC"/>
+              </a:rPr>
+              <a:t>+</a:t>
+            </a:r>
+          </a:p>
+        </p:txBody>
+      </p:sp>
+      <p:sp>
+        <p:nvSpPr>
+          <p:cNvPr id="13" name="TextBox 12"/>
+          <p:cNvSpPr txBox="1"/>
+          <p:nvPr/>
+        </p:nvSpPr>
+        <p:spPr>
+          <a:xfrm>
+            <a:off x="6572085" y="2571750"/>
+            <a:ext cx="4705232" cy="285750"/>
+          </a:xfrm>
+          <a:prstGeom prst="rect">
+            <a:avLst/>
+          </a:prstGeom>
+          <a:noFill/>
+        </p:spPr>
+        <p:txBody>
+          <a:bodyPr wrap="square" lIns="0" rIns="0" tIns="0" bIns="0">
+            <a:spAutoFit/>
+          </a:bodyPr>
+          <a:lstStyle/>
+          <a:p>
+            <a:pPr algn="l"/>
+            <a:r>
+              <a:rPr sz="1650" b="1" i="0">
+                <a:solidFill>
+                  <a:srgbClr val="22D97F"/>
+                </a:solidFill>
+                <a:latin typeface="PingFang SC"/>
+              </a:rPr>
+              <a:t>↑ Fortune 500 中的 23 家</a:t>
+            </a:r>
+          </a:p>
+        </p:txBody>
+      </p:sp>
+      <p:sp>
+        <p:nvSpPr>
+          <p:cNvPr id="14" name="Rectangle 13"/>
+          <p:cNvSpPr/>
+          <p:nvPr/>
+        </p:nvSpPr>
+        <p:spPr>
+          <a:xfrm>
+            <a:off x="6572085" y="5048250"/>
+            <a:ext cx="571485" cy="28575"/>
+          </a:xfrm>
+          <a:prstGeom prst="rect">
+            <a:avLst/>
+          </a:prstGeom>
+          <a:solidFill>
+            <a:srgbClr val="7C5CFF"/>
+          </a:solidFill>
+          <a:ln>
+            <a:noFill/>
+          </a:ln>
+        </p:spPr>
+        <p:style>
+          <a:lnRef idx="1">
+            <a:schemeClr val="accent1"/>
+          </a:lnRef>
+          <a:fillRef idx="3">
+            <a:schemeClr val="accent1"/>
+          </a:fillRef>
+          <a:effectRef idx="2">
+            <a:schemeClr val="accent1"/>
+          </a:effectRef>
+          <a:fontRef idx="minor">
+            <a:schemeClr val="lt1"/>
+          </a:fontRef>
+        </p:style>
+        <p:txBody>
+          <a:bodyPr rtlCol="0" anchor="ctr"/>
+          <a:lstStyle/>
+          <a:p>
+            <a:pPr algn="ctr"/>
+          </a:p>
+        </p:txBody>
+      </p:sp>
+      <p:sp>
+        <p:nvSpPr>
+          <p:cNvPr id="15" name="TextBox 14"/>
+          <p:cNvSpPr txBox="1"/>
+          <p:nvPr/>
+        </p:nvSpPr>
+        <p:spPr>
+          <a:xfrm>
+            <a:off x="6572085" y="5181600"/>
+            <a:ext cx="4705232" cy="190500"/>
+          </a:xfrm>
+          <a:prstGeom prst="rect">
+            <a:avLst/>
+          </a:prstGeom>
+          <a:noFill/>
+        </p:spPr>
+        <p:txBody>
+          <a:bodyPr wrap="square" lIns="0" rIns="0" tIns="0" bIns="0">
+            <a:spAutoFit/>
+          </a:bodyPr>
+          <a:lstStyle/>
+          <a:p>
+            <a:pPr algn="l"/>
+            <a:r>
+              <a:rPr sz="1050" b="0" i="0">
+                <a:solidFill>
+                  <a:srgbClr val="BCC4D8"/>
+                </a:solidFill>
+                <a:latin typeface="PingFang SC"/>
+              </a:rPr>
+              <a:t>金融、零售、教育、政务皆有落地</a:t>
+            </a:r>
+          </a:p>
+        </p:txBody>
+      </p:sp>
+      <p:sp>
+        <p:nvSpPr>
+          <p:cNvPr id="16" name="TextBox 15"/>
+          <p:cNvSpPr txBox="1"/>
+          <p:nvPr/>
+        </p:nvSpPr>
+        <p:spPr>
+          <a:xfrm>
+            <a:off x="533386" y="6610350"/>
+            <a:ext cx="5714857" cy="190500"/>
+          </a:xfrm>
+          <a:prstGeom prst="rect">
+            <a:avLst/>
+          </a:prstGeom>
+          <a:noFill/>
+        </p:spPr>
+        <p:txBody>
+          <a:bodyPr wrap="square" lIns="0" rIns="0" tIns="0" bIns="0">
+            <a:spAutoFit/>
+          </a:bodyPr>
+          <a:lstStyle/>
+          <a:p>
+            <a:pPr algn="l"/>
+            <a:r>
+              <a:rPr sz="1050" b="0" i="0">
+                <a:solidFill>
+                  <a:srgbClr val="6B7392"/>
+                </a:solidFill>
+                <a:latin typeface="PingFang SC"/>
+              </a:rPr>
+              <a:t>Dify 企业介绍</a:t>
+            </a:r>
+          </a:p>
+        </p:txBody>
+      </p:sp>
+      <p:sp>
+        <p:nvSpPr>
+          <p:cNvPr id="17" name="TextBox 16"/>
+          <p:cNvSpPr txBox="1"/>
+          <p:nvPr/>
+        </p:nvSpPr>
+        <p:spPr>
+          <a:xfrm>
+            <a:off x="9753356" y="6610350"/>
+            <a:ext cx="1904952" cy="190500"/>
+          </a:xfrm>
+          <a:prstGeom prst="rect">
+            <a:avLst/>
+          </a:prstGeom>
+          <a:noFill/>
+        </p:spPr>
+        <p:txBody>
+          <a:bodyPr wrap="square" lIns="0" rIns="0" tIns="0" bIns="0">
+            <a:spAutoFit/>
+          </a:bodyPr>
+          <a:lstStyle/>
+          <a:p>
+            <a:pPr algn="r"/>
+            <a:r>
+              <a:rPr sz="1050" b="0" i="0">
+                <a:solidFill>
+                  <a:srgbClr val="6B7392"/>
+                </a:solidFill>
+                <a:latin typeface="SF Mono"/>
+              </a:rPr>
+              <a:t>02 / 08</a:t>
+            </a:r>
+          </a:p>
+        </p:txBody>
+      </p:sp>
     </p:spTree>
   </p:cSld>
   <p:clrMapOvr>
@@ -3184,6 +4369,14 @@
 <file path=ppt/slides/slide3.xml><?xml version="1.0" encoding="utf-8"?>
 <p:sld xmlns:a="http://schemas.openxmlformats.org/drawingml/2006/main" xmlns:p="http://schemas.openxmlformats.org/presentationml/2006/main" xmlns:r="http://schemas.openxmlformats.org/officeDocument/2006/relationships">
   <p:cSld>
+    <p:bg>
+      <p:bgPr>
+        <a:solidFill>
+          <a:srgbClr val="0A0E27"/>
+        </a:solidFill>
+        <a:effectLst/>
+      </p:bgPr>
+    </p:bg>
     <p:spTree>
       <p:nvGrpSpPr>
         <p:cNvPr id="1" name=""/>
@@ -3191,36 +4384,930 @@
         <p:nvPr/>
       </p:nvGrpSpPr>
       <p:grpSpPr/>
-      <p:pic>
-        <p:nvPicPr>
-          <p:cNvPr id="2" name="Picture 1" descr="03-two-col-asymmetric-demo.png"/>
-          <p:cNvPicPr>
-            <a:picLocks noChangeAspect="1"/>
-          </p:cNvPicPr>
-          <p:nvPr/>
-        </p:nvPicPr>
-        <p:blipFill>
-          <a:blip r:embed="rId2">
-            <a:extLst>
-              <a:ext uri="{96DAC541-7B7A-43D3-8B79-37D633B846F1}">
-                <asvg:svgBlip xmlns:asvg="http://schemas.microsoft.com/office/drawing/2016/SVG/main" r:embed="rId3"/>
-              </a:ext>
-            </a:extLst>
-          </a:blip>
-          <a:stretch>
-            <a:fillRect/>
-          </a:stretch>
-        </p:blipFill>
-        <p:spPr>
-          <a:xfrm>
-            <a:off x="0" y="0"/>
-            <a:ext cx="12191695" cy="6858000"/>
-          </a:xfrm>
-          <a:prstGeom prst="rect">
-            <a:avLst/>
-          </a:prstGeom>
-        </p:spPr>
-      </p:pic>
+      <p:sp>
+        <p:nvSpPr>
+          <p:cNvPr id="2" name="Rounded Rectangle 1"/>
+          <p:cNvSpPr/>
+          <p:nvPr/>
+        </p:nvSpPr>
+        <p:spPr>
+          <a:xfrm>
+            <a:off x="533386" y="533400"/>
+            <a:ext cx="7391215" cy="5505450"/>
+          </a:xfrm>
+          <a:prstGeom prst="roundRect">
+            <a:avLst>
+              <a:gd name="adj" fmla="val 4844"/>
+            </a:avLst>
+          </a:prstGeom>
+          <a:solidFill>
+            <a:srgbClr val="FFFFFF"/>
+          </a:solidFill>
+          <a:ln w="12700">
+            <a:solidFill>
+              <a:srgbClr val="FFFFFF"/>
+            </a:solidFill>
+          </a:ln>
+        </p:spPr>
+        <p:style>
+          <a:lnRef idx="1">
+            <a:schemeClr val="accent1"/>
+          </a:lnRef>
+          <a:fillRef idx="3">
+            <a:schemeClr val="accent1"/>
+          </a:fillRef>
+          <a:effectRef idx="2">
+            <a:schemeClr val="accent1"/>
+          </a:effectRef>
+          <a:fontRef idx="minor">
+            <a:schemeClr val="lt1"/>
+          </a:fontRef>
+        </p:style>
+        <p:txBody>
+          <a:bodyPr rtlCol="0" anchor="ctr"/>
+          <a:lstStyle/>
+          <a:p>
+            <a:pPr algn="ctr"/>
+          </a:p>
+        </p:txBody>
+      </p:sp>
+      <p:sp>
+        <p:nvSpPr>
+          <p:cNvPr id="3" name="TextBox 2"/>
+          <p:cNvSpPr txBox="1"/>
+          <p:nvPr/>
+        </p:nvSpPr>
+        <p:spPr>
+          <a:xfrm>
+            <a:off x="914377" y="952500"/>
+            <a:ext cx="6629234" cy="209550"/>
+          </a:xfrm>
+          <a:prstGeom prst="rect">
+            <a:avLst/>
+          </a:prstGeom>
+          <a:noFill/>
+        </p:spPr>
+        <p:txBody>
+          <a:bodyPr wrap="square" lIns="0" rIns="0" tIns="0" bIns="0">
+            <a:spAutoFit/>
+          </a:bodyPr>
+          <a:lstStyle/>
+          <a:p>
+            <a:pPr algn="l"/>
+            <a:r>
+              <a:rPr sz="1200" b="1" i="0" spc="300">
+                <a:solidFill>
+                  <a:srgbClr val="00D4FF"/>
+                </a:solidFill>
+                <a:latin typeface="PingFang SC"/>
+              </a:rPr>
+              <a:t>为什么选择 Dify</a:t>
+            </a:r>
+          </a:p>
+        </p:txBody>
+      </p:sp>
+      <p:sp>
+        <p:nvSpPr>
+          <p:cNvPr id="4" name="TextBox 3"/>
+          <p:cNvSpPr txBox="1"/>
+          <p:nvPr/>
+        </p:nvSpPr>
+        <p:spPr>
+          <a:xfrm>
+            <a:off x="914377" y="1352550"/>
+            <a:ext cx="6629234" cy="400050"/>
+          </a:xfrm>
+          <a:prstGeom prst="rect">
+            <a:avLst/>
+          </a:prstGeom>
+          <a:noFill/>
+        </p:spPr>
+        <p:txBody>
+          <a:bodyPr wrap="square" lIns="0" rIns="0" tIns="0" bIns="0">
+            <a:spAutoFit/>
+          </a:bodyPr>
+          <a:lstStyle/>
+          <a:p>
+            <a:pPr algn="l"/>
+            <a:r>
+              <a:rPr sz="2250" b="1" i="0">
+                <a:solidFill>
+                  <a:srgbClr val="FFFFFF"/>
+                </a:solidFill>
+                <a:latin typeface="PingFang SC"/>
+              </a:rPr>
+              <a:t>把模型能力和业务流程缝起来</a:t>
+            </a:r>
+          </a:p>
+        </p:txBody>
+      </p:sp>
+      <p:sp>
+        <p:nvSpPr>
+          <p:cNvPr id="5" name="TextBox 4"/>
+          <p:cNvSpPr txBox="1"/>
+          <p:nvPr/>
+        </p:nvSpPr>
+        <p:spPr>
+          <a:xfrm>
+            <a:off x="914377" y="1790700"/>
+            <a:ext cx="6629234" cy="3790950"/>
+          </a:xfrm>
+          <a:prstGeom prst="rect">
+            <a:avLst/>
+          </a:prstGeom>
+          <a:noFill/>
+        </p:spPr>
+        <p:txBody>
+          <a:bodyPr wrap="square" lIns="0" rIns="0" tIns="0" bIns="0">
+            <a:spAutoFit/>
+          </a:bodyPr>
+          <a:lstStyle/>
+          <a:p>
+            <a:pPr>
+              <a:spcAft>
+                <a:spcPts val="800"/>
+              </a:spcAft>
+            </a:pPr>
+            <a:r>
+              <a:rPr sz="1350">
+                <a:solidFill>
+                  <a:srgbClr val="BCC4D8"/>
+                </a:solidFill>
+                <a:latin typeface="PingFang SC"/>
+              </a:rPr>
+              <a:t>Dify 不是又一个聊天机器人，而是把 LLM 能力变成稳定可交付的业务流程。从 prompt 编排到工具调用、从知识库到日志评测，全链路可观测、可回滚。</a:t>
+            </a:r>
+          </a:p>
+          <a:p>
+            <a:pPr>
+              <a:spcAft>
+                <a:spcPts val="800"/>
+              </a:spcAft>
+            </a:pPr>
+            <a:r>
+              <a:rPr sz="1350">
+                <a:solidFill>
+                  <a:srgbClr val="BCC4D8"/>
+                </a:solidFill>
+                <a:latin typeface="PingFang SC"/>
+              </a:rPr>
+              <a:t>工程团队不需要重复造轮子。市场团队不需要等着 IT 排期。运维团队不需要担心 token 失控。</a:t>
+            </a:r>
+          </a:p>
+        </p:txBody>
+      </p:sp>
+      <p:sp>
+        <p:nvSpPr>
+          <p:cNvPr id="6" name="Rounded Rectangle 5"/>
+          <p:cNvSpPr/>
+          <p:nvPr/>
+        </p:nvSpPr>
+        <p:spPr>
+          <a:xfrm>
+            <a:off x="8115096" y="533400"/>
+            <a:ext cx="3543211" cy="5505450"/>
+          </a:xfrm>
+          <a:prstGeom prst="roundRect">
+            <a:avLst>
+              <a:gd name="adj" fmla="val 7526"/>
+            </a:avLst>
+          </a:prstGeom>
+          <a:solidFill>
+            <a:srgbClr val="FFFFFF"/>
+          </a:solidFill>
+          <a:ln w="12700">
+            <a:solidFill>
+              <a:srgbClr val="FFFFFF"/>
+            </a:solidFill>
+          </a:ln>
+        </p:spPr>
+        <p:style>
+          <a:lnRef idx="1">
+            <a:schemeClr val="accent1"/>
+          </a:lnRef>
+          <a:fillRef idx="3">
+            <a:schemeClr val="accent1"/>
+          </a:fillRef>
+          <a:effectRef idx="2">
+            <a:schemeClr val="accent1"/>
+          </a:effectRef>
+          <a:fontRef idx="minor">
+            <a:schemeClr val="lt1"/>
+          </a:fontRef>
+        </p:style>
+        <p:txBody>
+          <a:bodyPr rtlCol="0" anchor="ctr"/>
+          <a:lstStyle/>
+          <a:p>
+            <a:pPr algn="ctr"/>
+          </a:p>
+        </p:txBody>
+      </p:sp>
+      <p:sp>
+        <p:nvSpPr>
+          <p:cNvPr id="7" name="TextBox 6"/>
+          <p:cNvSpPr txBox="1"/>
+          <p:nvPr/>
+        </p:nvSpPr>
+        <p:spPr>
+          <a:xfrm>
+            <a:off x="8496087" y="1085850"/>
+            <a:ext cx="2781230" cy="400050"/>
+          </a:xfrm>
+          <a:prstGeom prst="rect">
+            <a:avLst/>
+          </a:prstGeom>
+          <a:noFill/>
+        </p:spPr>
+        <p:txBody>
+          <a:bodyPr wrap="square" lIns="0" rIns="0" tIns="0" bIns="0">
+            <a:spAutoFit/>
+          </a:bodyPr>
+          <a:lstStyle/>
+          <a:p>
+            <a:pPr algn="l"/>
+            <a:r>
+              <a:rPr sz="2250" b="1" i="0">
+                <a:solidFill>
+                  <a:srgbClr val="FFFFFF"/>
+                </a:solidFill>
+                <a:latin typeface="PingFang SC"/>
+              </a:rPr>
+              <a:t>核心模块</a:t>
+            </a:r>
+          </a:p>
+        </p:txBody>
+      </p:sp>
+      <p:sp>
+        <p:nvSpPr>
+          <p:cNvPr id="8" name="Rounded Rectangle 7"/>
+          <p:cNvSpPr/>
+          <p:nvPr/>
+        </p:nvSpPr>
+        <p:spPr>
+          <a:xfrm>
+            <a:off x="8496087" y="1638300"/>
+            <a:ext cx="304792" cy="304800"/>
+          </a:xfrm>
+          <a:prstGeom prst="roundRect">
+            <a:avLst>
+              <a:gd name="adj" fmla="val 25000"/>
+            </a:avLst>
+          </a:prstGeom>
+          <a:solidFill>
+            <a:srgbClr val="7C5CFF"/>
+          </a:solidFill>
+          <a:ln>
+            <a:noFill/>
+          </a:ln>
+        </p:spPr>
+        <p:style>
+          <a:lnRef idx="1">
+            <a:schemeClr val="accent1"/>
+          </a:lnRef>
+          <a:fillRef idx="3">
+            <a:schemeClr val="accent1"/>
+          </a:fillRef>
+          <a:effectRef idx="2">
+            <a:schemeClr val="accent1"/>
+          </a:effectRef>
+          <a:fontRef idx="minor">
+            <a:schemeClr val="lt1"/>
+          </a:fontRef>
+        </p:style>
+        <p:txBody>
+          <a:bodyPr rtlCol="0" anchor="ctr"/>
+          <a:lstStyle/>
+          <a:p>
+            <a:pPr algn="ctr"/>
+          </a:p>
+        </p:txBody>
+      </p:sp>
+      <p:sp>
+        <p:nvSpPr>
+          <p:cNvPr id="9" name="TextBox 8"/>
+          <p:cNvSpPr txBox="1"/>
+          <p:nvPr/>
+        </p:nvSpPr>
+        <p:spPr>
+          <a:xfrm>
+            <a:off x="8496087" y="1695450"/>
+            <a:ext cx="304792" cy="209550"/>
+          </a:xfrm>
+          <a:prstGeom prst="rect">
+            <a:avLst/>
+          </a:prstGeom>
+          <a:noFill/>
+        </p:spPr>
+        <p:txBody>
+          <a:bodyPr wrap="square" lIns="0" rIns="0" tIns="0" bIns="0">
+            <a:spAutoFit/>
+          </a:bodyPr>
+          <a:lstStyle/>
+          <a:p>
+            <a:pPr algn="ctr"/>
+            <a:r>
+              <a:rPr sz="1125" b="1" i="0">
+                <a:solidFill>
+                  <a:srgbClr val="0A0E27"/>
+                </a:solidFill>
+                <a:latin typeface="PingFang SC"/>
+              </a:rPr>
+              <a:t>01</a:t>
+            </a:r>
+          </a:p>
+        </p:txBody>
+      </p:sp>
+      <p:sp>
+        <p:nvSpPr>
+          <p:cNvPr id="10" name="TextBox 9"/>
+          <p:cNvSpPr txBox="1"/>
+          <p:nvPr/>
+        </p:nvSpPr>
+        <p:spPr>
+          <a:xfrm>
+            <a:off x="8953276" y="1676400"/>
+            <a:ext cx="2324041" cy="228600"/>
+          </a:xfrm>
+          <a:prstGeom prst="rect">
+            <a:avLst/>
+          </a:prstGeom>
+          <a:noFill/>
+        </p:spPr>
+        <p:txBody>
+          <a:bodyPr wrap="square" lIns="0" rIns="0" tIns="0" bIns="0">
+            <a:spAutoFit/>
+          </a:bodyPr>
+          <a:lstStyle/>
+          <a:p>
+            <a:pPr algn="l"/>
+            <a:r>
+              <a:rPr sz="1350" b="1" i="0">
+                <a:solidFill>
+                  <a:srgbClr val="FFFFFF"/>
+                </a:solidFill>
+                <a:latin typeface="PingFang SC"/>
+              </a:rPr>
+              <a:t>Workflow</a:t>
+            </a:r>
+          </a:p>
+        </p:txBody>
+      </p:sp>
+      <p:sp>
+        <p:nvSpPr>
+          <p:cNvPr id="11" name="TextBox 10"/>
+          <p:cNvSpPr txBox="1"/>
+          <p:nvPr/>
+        </p:nvSpPr>
+        <p:spPr>
+          <a:xfrm>
+            <a:off x="8953276" y="1905000"/>
+            <a:ext cx="2324041" cy="209550"/>
+          </a:xfrm>
+          <a:prstGeom prst="rect">
+            <a:avLst/>
+          </a:prstGeom>
+          <a:noFill/>
+        </p:spPr>
+        <p:txBody>
+          <a:bodyPr wrap="square" lIns="0" rIns="0" tIns="0" bIns="0">
+            <a:spAutoFit/>
+          </a:bodyPr>
+          <a:lstStyle/>
+          <a:p>
+            <a:pPr algn="l"/>
+            <a:r>
+              <a:rPr sz="1050" b="0" i="0">
+                <a:solidFill>
+                  <a:srgbClr val="BCC4D8"/>
+                </a:solidFill>
+                <a:latin typeface="PingFang SC"/>
+              </a:rPr>
+              <a:t>可视化编排</a:t>
+            </a:r>
+          </a:p>
+        </p:txBody>
+      </p:sp>
+      <p:sp>
+        <p:nvSpPr>
+          <p:cNvPr id="12" name="Rounded Rectangle 11"/>
+          <p:cNvSpPr/>
+          <p:nvPr/>
+        </p:nvSpPr>
+        <p:spPr>
+          <a:xfrm>
+            <a:off x="8496087" y="2400300"/>
+            <a:ext cx="304792" cy="304800"/>
+          </a:xfrm>
+          <a:prstGeom prst="roundRect">
+            <a:avLst>
+              <a:gd name="adj" fmla="val 25000"/>
+            </a:avLst>
+          </a:prstGeom>
+          <a:solidFill>
+            <a:srgbClr val="7C5CFF"/>
+          </a:solidFill>
+          <a:ln>
+            <a:noFill/>
+          </a:ln>
+        </p:spPr>
+        <p:style>
+          <a:lnRef idx="1">
+            <a:schemeClr val="accent1"/>
+          </a:lnRef>
+          <a:fillRef idx="3">
+            <a:schemeClr val="accent1"/>
+          </a:fillRef>
+          <a:effectRef idx="2">
+            <a:schemeClr val="accent1"/>
+          </a:effectRef>
+          <a:fontRef idx="minor">
+            <a:schemeClr val="lt1"/>
+          </a:fontRef>
+        </p:style>
+        <p:txBody>
+          <a:bodyPr rtlCol="0" anchor="ctr"/>
+          <a:lstStyle/>
+          <a:p>
+            <a:pPr algn="ctr"/>
+          </a:p>
+        </p:txBody>
+      </p:sp>
+      <p:sp>
+        <p:nvSpPr>
+          <p:cNvPr id="13" name="TextBox 12"/>
+          <p:cNvSpPr txBox="1"/>
+          <p:nvPr/>
+        </p:nvSpPr>
+        <p:spPr>
+          <a:xfrm>
+            <a:off x="8496087" y="2457450"/>
+            <a:ext cx="304792" cy="209550"/>
+          </a:xfrm>
+          <a:prstGeom prst="rect">
+            <a:avLst/>
+          </a:prstGeom>
+          <a:noFill/>
+        </p:spPr>
+        <p:txBody>
+          <a:bodyPr wrap="square" lIns="0" rIns="0" tIns="0" bIns="0">
+            <a:spAutoFit/>
+          </a:bodyPr>
+          <a:lstStyle/>
+          <a:p>
+            <a:pPr algn="ctr"/>
+            <a:r>
+              <a:rPr sz="1125" b="1" i="0">
+                <a:solidFill>
+                  <a:srgbClr val="0A0E27"/>
+                </a:solidFill>
+                <a:latin typeface="PingFang SC"/>
+              </a:rPr>
+              <a:t>02</a:t>
+            </a:r>
+          </a:p>
+        </p:txBody>
+      </p:sp>
+      <p:sp>
+        <p:nvSpPr>
+          <p:cNvPr id="14" name="TextBox 13"/>
+          <p:cNvSpPr txBox="1"/>
+          <p:nvPr/>
+        </p:nvSpPr>
+        <p:spPr>
+          <a:xfrm>
+            <a:off x="8953276" y="2438400"/>
+            <a:ext cx="2324041" cy="228600"/>
+          </a:xfrm>
+          <a:prstGeom prst="rect">
+            <a:avLst/>
+          </a:prstGeom>
+          <a:noFill/>
+        </p:spPr>
+        <p:txBody>
+          <a:bodyPr wrap="square" lIns="0" rIns="0" tIns="0" bIns="0">
+            <a:spAutoFit/>
+          </a:bodyPr>
+          <a:lstStyle/>
+          <a:p>
+            <a:pPr algn="l"/>
+            <a:r>
+              <a:rPr sz="1350" b="1" i="0">
+                <a:solidFill>
+                  <a:srgbClr val="FFFFFF"/>
+                </a:solidFill>
+                <a:latin typeface="PingFang SC"/>
+              </a:rPr>
+              <a:t>Agent</a:t>
+            </a:r>
+          </a:p>
+        </p:txBody>
+      </p:sp>
+      <p:sp>
+        <p:nvSpPr>
+          <p:cNvPr id="15" name="TextBox 14"/>
+          <p:cNvSpPr txBox="1"/>
+          <p:nvPr/>
+        </p:nvSpPr>
+        <p:spPr>
+          <a:xfrm>
+            <a:off x="8953276" y="2667000"/>
+            <a:ext cx="2324041" cy="209550"/>
+          </a:xfrm>
+          <a:prstGeom prst="rect">
+            <a:avLst/>
+          </a:prstGeom>
+          <a:noFill/>
+        </p:spPr>
+        <p:txBody>
+          <a:bodyPr wrap="square" lIns="0" rIns="0" tIns="0" bIns="0">
+            <a:spAutoFit/>
+          </a:bodyPr>
+          <a:lstStyle/>
+          <a:p>
+            <a:pPr algn="l"/>
+            <a:r>
+              <a:rPr sz="1050" b="0" i="0">
+                <a:solidFill>
+                  <a:srgbClr val="BCC4D8"/>
+                </a:solidFill>
+                <a:latin typeface="PingFang SC"/>
+              </a:rPr>
+              <a:t>工具调用框架</a:t>
+            </a:r>
+          </a:p>
+        </p:txBody>
+      </p:sp>
+      <p:sp>
+        <p:nvSpPr>
+          <p:cNvPr id="16" name="Rounded Rectangle 15"/>
+          <p:cNvSpPr/>
+          <p:nvPr/>
+        </p:nvSpPr>
+        <p:spPr>
+          <a:xfrm>
+            <a:off x="8496087" y="3162300"/>
+            <a:ext cx="304792" cy="304800"/>
+          </a:xfrm>
+          <a:prstGeom prst="roundRect">
+            <a:avLst>
+              <a:gd name="adj" fmla="val 25000"/>
+            </a:avLst>
+          </a:prstGeom>
+          <a:solidFill>
+            <a:srgbClr val="7C5CFF"/>
+          </a:solidFill>
+          <a:ln>
+            <a:noFill/>
+          </a:ln>
+        </p:spPr>
+        <p:style>
+          <a:lnRef idx="1">
+            <a:schemeClr val="accent1"/>
+          </a:lnRef>
+          <a:fillRef idx="3">
+            <a:schemeClr val="accent1"/>
+          </a:fillRef>
+          <a:effectRef idx="2">
+            <a:schemeClr val="accent1"/>
+          </a:effectRef>
+          <a:fontRef idx="minor">
+            <a:schemeClr val="lt1"/>
+          </a:fontRef>
+        </p:style>
+        <p:txBody>
+          <a:bodyPr rtlCol="0" anchor="ctr"/>
+          <a:lstStyle/>
+          <a:p>
+            <a:pPr algn="ctr"/>
+          </a:p>
+        </p:txBody>
+      </p:sp>
+      <p:sp>
+        <p:nvSpPr>
+          <p:cNvPr id="17" name="TextBox 16"/>
+          <p:cNvSpPr txBox="1"/>
+          <p:nvPr/>
+        </p:nvSpPr>
+        <p:spPr>
+          <a:xfrm>
+            <a:off x="8496087" y="3219450"/>
+            <a:ext cx="304792" cy="209550"/>
+          </a:xfrm>
+          <a:prstGeom prst="rect">
+            <a:avLst/>
+          </a:prstGeom>
+          <a:noFill/>
+        </p:spPr>
+        <p:txBody>
+          <a:bodyPr wrap="square" lIns="0" rIns="0" tIns="0" bIns="0">
+            <a:spAutoFit/>
+          </a:bodyPr>
+          <a:lstStyle/>
+          <a:p>
+            <a:pPr algn="ctr"/>
+            <a:r>
+              <a:rPr sz="1125" b="1" i="0">
+                <a:solidFill>
+                  <a:srgbClr val="0A0E27"/>
+                </a:solidFill>
+                <a:latin typeface="PingFang SC"/>
+              </a:rPr>
+              <a:t>03</a:t>
+            </a:r>
+          </a:p>
+        </p:txBody>
+      </p:sp>
+      <p:sp>
+        <p:nvSpPr>
+          <p:cNvPr id="18" name="TextBox 17"/>
+          <p:cNvSpPr txBox="1"/>
+          <p:nvPr/>
+        </p:nvSpPr>
+        <p:spPr>
+          <a:xfrm>
+            <a:off x="8953276" y="3200400"/>
+            <a:ext cx="2324041" cy="228600"/>
+          </a:xfrm>
+          <a:prstGeom prst="rect">
+            <a:avLst/>
+          </a:prstGeom>
+          <a:noFill/>
+        </p:spPr>
+        <p:txBody>
+          <a:bodyPr wrap="square" lIns="0" rIns="0" tIns="0" bIns="0">
+            <a:spAutoFit/>
+          </a:bodyPr>
+          <a:lstStyle/>
+          <a:p>
+            <a:pPr algn="l"/>
+            <a:r>
+              <a:rPr sz="1350" b="1" i="0">
+                <a:solidFill>
+                  <a:srgbClr val="FFFFFF"/>
+                </a:solidFill>
+                <a:latin typeface="PingFang SC"/>
+              </a:rPr>
+              <a:t>Knowledge</a:t>
+            </a:r>
+          </a:p>
+        </p:txBody>
+      </p:sp>
+      <p:sp>
+        <p:nvSpPr>
+          <p:cNvPr id="19" name="TextBox 18"/>
+          <p:cNvSpPr txBox="1"/>
+          <p:nvPr/>
+        </p:nvSpPr>
+        <p:spPr>
+          <a:xfrm>
+            <a:off x="8953276" y="3429000"/>
+            <a:ext cx="2324041" cy="209550"/>
+          </a:xfrm>
+          <a:prstGeom prst="rect">
+            <a:avLst/>
+          </a:prstGeom>
+          <a:noFill/>
+        </p:spPr>
+        <p:txBody>
+          <a:bodyPr wrap="square" lIns="0" rIns="0" tIns="0" bIns="0">
+            <a:spAutoFit/>
+          </a:bodyPr>
+          <a:lstStyle/>
+          <a:p>
+            <a:pPr algn="l"/>
+            <a:r>
+              <a:rPr sz="1050" b="0" i="0">
+                <a:solidFill>
+                  <a:srgbClr val="BCC4D8"/>
+                </a:solidFill>
+                <a:latin typeface="PingFang SC"/>
+              </a:rPr>
+              <a:t>RAG 引擎</a:t>
+            </a:r>
+          </a:p>
+        </p:txBody>
+      </p:sp>
+      <p:sp>
+        <p:nvSpPr>
+          <p:cNvPr id="20" name="Rounded Rectangle 19"/>
+          <p:cNvSpPr/>
+          <p:nvPr/>
+        </p:nvSpPr>
+        <p:spPr>
+          <a:xfrm>
+            <a:off x="8496087" y="3924300"/>
+            <a:ext cx="304792" cy="304800"/>
+          </a:xfrm>
+          <a:prstGeom prst="roundRect">
+            <a:avLst>
+              <a:gd name="adj" fmla="val 25000"/>
+            </a:avLst>
+          </a:prstGeom>
+          <a:solidFill>
+            <a:srgbClr val="7C5CFF"/>
+          </a:solidFill>
+          <a:ln>
+            <a:noFill/>
+          </a:ln>
+        </p:spPr>
+        <p:style>
+          <a:lnRef idx="1">
+            <a:schemeClr val="accent1"/>
+          </a:lnRef>
+          <a:fillRef idx="3">
+            <a:schemeClr val="accent1"/>
+          </a:fillRef>
+          <a:effectRef idx="2">
+            <a:schemeClr val="accent1"/>
+          </a:effectRef>
+          <a:fontRef idx="minor">
+            <a:schemeClr val="lt1"/>
+          </a:fontRef>
+        </p:style>
+        <p:txBody>
+          <a:bodyPr rtlCol="0" anchor="ctr"/>
+          <a:lstStyle/>
+          <a:p>
+            <a:pPr algn="ctr"/>
+          </a:p>
+        </p:txBody>
+      </p:sp>
+      <p:sp>
+        <p:nvSpPr>
+          <p:cNvPr id="21" name="TextBox 20"/>
+          <p:cNvSpPr txBox="1"/>
+          <p:nvPr/>
+        </p:nvSpPr>
+        <p:spPr>
+          <a:xfrm>
+            <a:off x="8496087" y="3981450"/>
+            <a:ext cx="304792" cy="209550"/>
+          </a:xfrm>
+          <a:prstGeom prst="rect">
+            <a:avLst/>
+          </a:prstGeom>
+          <a:noFill/>
+        </p:spPr>
+        <p:txBody>
+          <a:bodyPr wrap="square" lIns="0" rIns="0" tIns="0" bIns="0">
+            <a:spAutoFit/>
+          </a:bodyPr>
+          <a:lstStyle/>
+          <a:p>
+            <a:pPr algn="ctr"/>
+            <a:r>
+              <a:rPr sz="1125" b="1" i="0">
+                <a:solidFill>
+                  <a:srgbClr val="0A0E27"/>
+                </a:solidFill>
+                <a:latin typeface="PingFang SC"/>
+              </a:rPr>
+              <a:t>04</a:t>
+            </a:r>
+          </a:p>
+        </p:txBody>
+      </p:sp>
+      <p:sp>
+        <p:nvSpPr>
+          <p:cNvPr id="22" name="TextBox 21"/>
+          <p:cNvSpPr txBox="1"/>
+          <p:nvPr/>
+        </p:nvSpPr>
+        <p:spPr>
+          <a:xfrm>
+            <a:off x="8953276" y="3962400"/>
+            <a:ext cx="2324041" cy="228600"/>
+          </a:xfrm>
+          <a:prstGeom prst="rect">
+            <a:avLst/>
+          </a:prstGeom>
+          <a:noFill/>
+        </p:spPr>
+        <p:txBody>
+          <a:bodyPr wrap="square" lIns="0" rIns="0" tIns="0" bIns="0">
+            <a:spAutoFit/>
+          </a:bodyPr>
+          <a:lstStyle/>
+          <a:p>
+            <a:pPr algn="l"/>
+            <a:r>
+              <a:rPr sz="1350" b="1" i="0">
+                <a:solidFill>
+                  <a:srgbClr val="FFFFFF"/>
+                </a:solidFill>
+                <a:latin typeface="PingFang SC"/>
+              </a:rPr>
+              <a:t>LLMOps</a:t>
+            </a:r>
+          </a:p>
+        </p:txBody>
+      </p:sp>
+      <p:sp>
+        <p:nvSpPr>
+          <p:cNvPr id="23" name="TextBox 22"/>
+          <p:cNvSpPr txBox="1"/>
+          <p:nvPr/>
+        </p:nvSpPr>
+        <p:spPr>
+          <a:xfrm>
+            <a:off x="8953276" y="4191000"/>
+            <a:ext cx="2324041" cy="209550"/>
+          </a:xfrm>
+          <a:prstGeom prst="rect">
+            <a:avLst/>
+          </a:prstGeom>
+          <a:noFill/>
+        </p:spPr>
+        <p:txBody>
+          <a:bodyPr wrap="square" lIns="0" rIns="0" tIns="0" bIns="0">
+            <a:spAutoFit/>
+          </a:bodyPr>
+          <a:lstStyle/>
+          <a:p>
+            <a:pPr algn="l"/>
+            <a:r>
+              <a:rPr sz="1050" b="0" i="0">
+                <a:solidFill>
+                  <a:srgbClr val="BCC4D8"/>
+                </a:solidFill>
+                <a:latin typeface="PingFang SC"/>
+              </a:rPr>
+              <a:t>评测与监控</a:t>
+            </a:r>
+          </a:p>
+        </p:txBody>
+      </p:sp>
+      <p:sp>
+        <p:nvSpPr>
+          <p:cNvPr id="24" name="TextBox 23"/>
+          <p:cNvSpPr txBox="1"/>
+          <p:nvPr/>
+        </p:nvSpPr>
+        <p:spPr>
+          <a:xfrm>
+            <a:off x="533386" y="6610350"/>
+            <a:ext cx="5714857" cy="190500"/>
+          </a:xfrm>
+          <a:prstGeom prst="rect">
+            <a:avLst/>
+          </a:prstGeom>
+          <a:noFill/>
+        </p:spPr>
+        <p:txBody>
+          <a:bodyPr wrap="square" lIns="0" rIns="0" tIns="0" bIns="0">
+            <a:spAutoFit/>
+          </a:bodyPr>
+          <a:lstStyle/>
+          <a:p>
+            <a:pPr algn="l"/>
+            <a:r>
+              <a:rPr sz="1050" b="0" i="0">
+                <a:solidFill>
+                  <a:srgbClr val="6B7392"/>
+                </a:solidFill>
+                <a:latin typeface="PingFang SC"/>
+              </a:rPr>
+              <a:t>Dify 企业介绍</a:t>
+            </a:r>
+          </a:p>
+        </p:txBody>
+      </p:sp>
+      <p:sp>
+        <p:nvSpPr>
+          <p:cNvPr id="25" name="TextBox 24"/>
+          <p:cNvSpPr txBox="1"/>
+          <p:nvPr/>
+        </p:nvSpPr>
+        <p:spPr>
+          <a:xfrm>
+            <a:off x="9753356" y="6610350"/>
+            <a:ext cx="1904952" cy="190500"/>
+          </a:xfrm>
+          <a:prstGeom prst="rect">
+            <a:avLst/>
+          </a:prstGeom>
+          <a:noFill/>
+        </p:spPr>
+        <p:txBody>
+          <a:bodyPr wrap="square" lIns="0" rIns="0" tIns="0" bIns="0">
+            <a:spAutoFit/>
+          </a:bodyPr>
+          <a:lstStyle/>
+          <a:p>
+            <a:pPr algn="r"/>
+            <a:r>
+              <a:rPr sz="1050" b="0" i="0">
+                <a:solidFill>
+                  <a:srgbClr val="6B7392"/>
+                </a:solidFill>
+                <a:latin typeface="SF Mono"/>
+              </a:rPr>
+              <a:t>03 / 08</a:t>
+            </a:r>
+          </a:p>
+        </p:txBody>
+      </p:sp>
     </p:spTree>
   </p:cSld>
   <p:clrMapOvr>
@@ -3232,6 +5319,14 @@
 <file path=ppt/slides/slide4.xml><?xml version="1.0" encoding="utf-8"?>
 <p:sld xmlns:a="http://schemas.openxmlformats.org/drawingml/2006/main" xmlns:p="http://schemas.openxmlformats.org/presentationml/2006/main" xmlns:r="http://schemas.openxmlformats.org/officeDocument/2006/relationships">
   <p:cSld>
+    <p:bg>
+      <p:bgPr>
+        <a:solidFill>
+          <a:srgbClr val="0A0E27"/>
+        </a:solidFill>
+        <a:effectLst/>
+      </p:bgPr>
+    </p:bg>
     <p:spTree>
       <p:nvGrpSpPr>
         <p:cNvPr id="1" name=""/>
@@ -3239,36 +5334,766 @@
         <p:nvPr/>
       </p:nvGrpSpPr>
       <p:grpSpPr/>
-      <p:pic>
-        <p:nvPicPr>
-          <p:cNvPr id="2" name="Picture 1" descr="04-three-col-demo.png"/>
-          <p:cNvPicPr>
-            <a:picLocks noChangeAspect="1"/>
-          </p:cNvPicPr>
-          <p:nvPr/>
-        </p:nvPicPr>
-        <p:blipFill>
-          <a:blip r:embed="rId2">
-            <a:extLst>
-              <a:ext uri="{96DAC541-7B7A-43D3-8B79-37D633B846F1}">
-                <asvg:svgBlip xmlns:asvg="http://schemas.microsoft.com/office/drawing/2016/SVG/main" r:embed="rId3"/>
-              </a:ext>
-            </a:extLst>
-          </a:blip>
-          <a:stretch>
-            <a:fillRect/>
-          </a:stretch>
-        </p:blipFill>
-        <p:spPr>
-          <a:xfrm>
-            <a:off x="0" y="0"/>
-            <a:ext cx="12191695" cy="6858000"/>
-          </a:xfrm>
-          <a:prstGeom prst="rect">
-            <a:avLst/>
-          </a:prstGeom>
-        </p:spPr>
-      </p:pic>
+      <p:sp>
+        <p:nvSpPr>
+          <p:cNvPr id="2" name="Rounded Rectangle 1"/>
+          <p:cNvSpPr/>
+          <p:nvPr/>
+        </p:nvSpPr>
+        <p:spPr>
+          <a:xfrm>
+            <a:off x="533386" y="533400"/>
+            <a:ext cx="3581310" cy="5505450"/>
+          </a:xfrm>
+          <a:prstGeom prst="roundRect">
+            <a:avLst>
+              <a:gd name="adj" fmla="val 7446"/>
+            </a:avLst>
+          </a:prstGeom>
+          <a:solidFill>
+            <a:srgbClr val="FFFFFF"/>
+          </a:solidFill>
+          <a:ln w="12700">
+            <a:solidFill>
+              <a:srgbClr val="FFFFFF"/>
+            </a:solidFill>
+          </a:ln>
+        </p:spPr>
+        <p:style>
+          <a:lnRef idx="1">
+            <a:schemeClr val="accent1"/>
+          </a:lnRef>
+          <a:fillRef idx="3">
+            <a:schemeClr val="accent1"/>
+          </a:fillRef>
+          <a:effectRef idx="2">
+            <a:schemeClr val="accent1"/>
+          </a:effectRef>
+          <a:fontRef idx="minor">
+            <a:schemeClr val="lt1"/>
+          </a:fontRef>
+        </p:style>
+        <p:txBody>
+          <a:bodyPr rtlCol="0" anchor="ctr"/>
+          <a:lstStyle/>
+          <a:p>
+            <a:pPr algn="ctr"/>
+          </a:p>
+        </p:txBody>
+      </p:sp>
+      <p:sp>
+        <p:nvSpPr>
+          <p:cNvPr id="3" name="TextBox 2"/>
+          <p:cNvSpPr txBox="1"/>
+          <p:nvPr/>
+        </p:nvSpPr>
+        <p:spPr>
+          <a:xfrm>
+            <a:off x="914377" y="952500"/>
+            <a:ext cx="2819329" cy="209550"/>
+          </a:xfrm>
+          <a:prstGeom prst="rect">
+            <a:avLst/>
+          </a:prstGeom>
+          <a:noFill/>
+        </p:spPr>
+        <p:txBody>
+          <a:bodyPr wrap="square" lIns="0" rIns="0" tIns="0" bIns="0">
+            <a:spAutoFit/>
+          </a:bodyPr>
+          <a:lstStyle/>
+          <a:p>
+            <a:pPr algn="l"/>
+            <a:r>
+              <a:rPr sz="1200" b="1" i="0" spc="300">
+                <a:solidFill>
+                  <a:srgbClr val="00D4FF"/>
+                </a:solidFill>
+                <a:latin typeface="PingFang SC"/>
+              </a:rPr>
+              <a:t>搭建一个 AI 应用</a:t>
+            </a:r>
+          </a:p>
+        </p:txBody>
+      </p:sp>
+      <p:sp>
+        <p:nvSpPr>
+          <p:cNvPr id="4" name="TextBox 3"/>
+          <p:cNvSpPr txBox="1"/>
+          <p:nvPr/>
+        </p:nvSpPr>
+        <p:spPr>
+          <a:xfrm>
+            <a:off x="914377" y="1371600"/>
+            <a:ext cx="571485" cy="1000125"/>
+          </a:xfrm>
+          <a:prstGeom prst="rect">
+            <a:avLst/>
+          </a:prstGeom>
+          <a:noFill/>
+        </p:spPr>
+        <p:txBody>
+          <a:bodyPr wrap="square" lIns="0" rIns="0" tIns="0" bIns="0">
+            <a:spAutoFit/>
+          </a:bodyPr>
+          <a:lstStyle/>
+          <a:p>
+            <a:pPr algn="l"/>
+            <a:r>
+              <a:rPr sz="6600" b="1" i="0">
+                <a:solidFill>
+                  <a:srgbClr val="FFFFFF"/>
+                </a:solidFill>
+                <a:latin typeface="PingFang SC"/>
+              </a:rPr>
+              <a:t>5</a:t>
+            </a:r>
+          </a:p>
+        </p:txBody>
+      </p:sp>
+      <p:sp>
+        <p:nvSpPr>
+          <p:cNvPr id="5" name="TextBox 4"/>
+          <p:cNvSpPr txBox="1"/>
+          <p:nvPr/>
+        </p:nvSpPr>
+        <p:spPr>
+          <a:xfrm>
+            <a:off x="1447763" y="1962150"/>
+            <a:ext cx="457188" cy="314325"/>
+          </a:xfrm>
+          <a:prstGeom prst="rect">
+            <a:avLst/>
+          </a:prstGeom>
+          <a:noFill/>
+        </p:spPr>
+        <p:txBody>
+          <a:bodyPr wrap="square" lIns="0" rIns="0" tIns="0" bIns="0">
+            <a:spAutoFit/>
+          </a:bodyPr>
+          <a:lstStyle/>
+          <a:p>
+            <a:pPr algn="l"/>
+            <a:r>
+              <a:rPr sz="1800" b="1" i="0">
+                <a:solidFill>
+                  <a:srgbClr val="BCC4D8"/>
+                </a:solidFill>
+                <a:latin typeface="PingFang SC"/>
+              </a:rPr>
+              <a:t>分钟</a:t>
+            </a:r>
+          </a:p>
+        </p:txBody>
+      </p:sp>
+      <p:sp>
+        <p:nvSpPr>
+          <p:cNvPr id="6" name="Rectangle 5"/>
+          <p:cNvSpPr/>
+          <p:nvPr/>
+        </p:nvSpPr>
+        <p:spPr>
+          <a:xfrm>
+            <a:off x="914377" y="5048250"/>
+            <a:ext cx="571485" cy="28575"/>
+          </a:xfrm>
+          <a:prstGeom prst="rect">
+            <a:avLst/>
+          </a:prstGeom>
+          <a:solidFill>
+            <a:srgbClr val="7C5CFF"/>
+          </a:solidFill>
+          <a:ln>
+            <a:noFill/>
+          </a:ln>
+        </p:spPr>
+        <p:style>
+          <a:lnRef idx="1">
+            <a:schemeClr val="accent1"/>
+          </a:lnRef>
+          <a:fillRef idx="3">
+            <a:schemeClr val="accent1"/>
+          </a:fillRef>
+          <a:effectRef idx="2">
+            <a:schemeClr val="accent1"/>
+          </a:effectRef>
+          <a:fontRef idx="minor">
+            <a:schemeClr val="lt1"/>
+          </a:fontRef>
+        </p:style>
+        <p:txBody>
+          <a:bodyPr rtlCol="0" anchor="ctr"/>
+          <a:lstStyle/>
+          <a:p>
+            <a:pPr algn="ctr"/>
+          </a:p>
+        </p:txBody>
+      </p:sp>
+      <p:sp>
+        <p:nvSpPr>
+          <p:cNvPr id="7" name="TextBox 6"/>
+          <p:cNvSpPr txBox="1"/>
+          <p:nvPr/>
+        </p:nvSpPr>
+        <p:spPr>
+          <a:xfrm>
+            <a:off x="914377" y="5181600"/>
+            <a:ext cx="2819329" cy="190500"/>
+          </a:xfrm>
+          <a:prstGeom prst="rect">
+            <a:avLst/>
+          </a:prstGeom>
+          <a:noFill/>
+        </p:spPr>
+        <p:txBody>
+          <a:bodyPr wrap="square" lIns="0" rIns="0" tIns="0" bIns="0">
+            <a:spAutoFit/>
+          </a:bodyPr>
+          <a:lstStyle/>
+          <a:p>
+            <a:pPr algn="l"/>
+            <a:r>
+              <a:rPr sz="1050" b="0" i="0">
+                <a:solidFill>
+                  <a:srgbClr val="BCC4D8"/>
+                </a:solidFill>
+                <a:latin typeface="PingFang SC"/>
+              </a:rPr>
+              <a:t>从模板到上线</a:t>
+            </a:r>
+          </a:p>
+        </p:txBody>
+      </p:sp>
+      <p:sp>
+        <p:nvSpPr>
+          <p:cNvPr id="8" name="Rounded Rectangle 7"/>
+          <p:cNvSpPr/>
+          <p:nvPr/>
+        </p:nvSpPr>
+        <p:spPr>
+          <a:xfrm>
+            <a:off x="4305192" y="533400"/>
+            <a:ext cx="3581310" cy="5505450"/>
+          </a:xfrm>
+          <a:prstGeom prst="roundRect">
+            <a:avLst>
+              <a:gd name="adj" fmla="val 7446"/>
+            </a:avLst>
+          </a:prstGeom>
+          <a:solidFill>
+            <a:srgbClr val="FFFFFF"/>
+          </a:solidFill>
+          <a:ln w="12700">
+            <a:solidFill>
+              <a:srgbClr val="FFFFFF"/>
+            </a:solidFill>
+          </a:ln>
+        </p:spPr>
+        <p:style>
+          <a:lnRef idx="1">
+            <a:schemeClr val="accent1"/>
+          </a:lnRef>
+          <a:fillRef idx="3">
+            <a:schemeClr val="accent1"/>
+          </a:fillRef>
+          <a:effectRef idx="2">
+            <a:schemeClr val="accent1"/>
+          </a:effectRef>
+          <a:fontRef idx="minor">
+            <a:schemeClr val="lt1"/>
+          </a:fontRef>
+        </p:style>
+        <p:txBody>
+          <a:bodyPr rtlCol="0" anchor="ctr"/>
+          <a:lstStyle/>
+          <a:p>
+            <a:pPr algn="ctr"/>
+          </a:p>
+        </p:txBody>
+      </p:sp>
+      <p:sp>
+        <p:nvSpPr>
+          <p:cNvPr id="9" name="TextBox 8"/>
+          <p:cNvSpPr txBox="1"/>
+          <p:nvPr/>
+        </p:nvSpPr>
+        <p:spPr>
+          <a:xfrm>
+            <a:off x="4686182" y="952500"/>
+            <a:ext cx="2819329" cy="209550"/>
+          </a:xfrm>
+          <a:prstGeom prst="rect">
+            <a:avLst/>
+          </a:prstGeom>
+          <a:noFill/>
+        </p:spPr>
+        <p:txBody>
+          <a:bodyPr wrap="square" lIns="0" rIns="0" tIns="0" bIns="0">
+            <a:spAutoFit/>
+          </a:bodyPr>
+          <a:lstStyle/>
+          <a:p>
+            <a:pPr algn="l"/>
+            <a:r>
+              <a:rPr sz="1200" b="1" i="0" spc="300">
+                <a:solidFill>
+                  <a:srgbClr val="00D4FF"/>
+                </a:solidFill>
+                <a:latin typeface="PingFang SC"/>
+              </a:rPr>
+              <a:t>支持模型数</a:t>
+            </a:r>
+          </a:p>
+        </p:txBody>
+      </p:sp>
+      <p:sp>
+        <p:nvSpPr>
+          <p:cNvPr id="10" name="TextBox 9"/>
+          <p:cNvSpPr txBox="1"/>
+          <p:nvPr/>
+        </p:nvSpPr>
+        <p:spPr>
+          <a:xfrm>
+            <a:off x="4686182" y="1371600"/>
+            <a:ext cx="1485862" cy="1000125"/>
+          </a:xfrm>
+          <a:prstGeom prst="rect">
+            <a:avLst/>
+          </a:prstGeom>
+          <a:noFill/>
+        </p:spPr>
+        <p:txBody>
+          <a:bodyPr wrap="square" lIns="0" rIns="0" tIns="0" bIns="0">
+            <a:spAutoFit/>
+          </a:bodyPr>
+          <a:lstStyle/>
+          <a:p>
+            <a:pPr algn="l"/>
+            <a:r>
+              <a:rPr sz="6600" b="1" i="0">
+                <a:solidFill>
+                  <a:srgbClr val="FFFFFF"/>
+                </a:solidFill>
+                <a:latin typeface="PingFang SC"/>
+              </a:rPr>
+              <a:t>200</a:t>
+            </a:r>
+          </a:p>
+        </p:txBody>
+      </p:sp>
+      <p:sp>
+        <p:nvSpPr>
+          <p:cNvPr id="11" name="TextBox 10"/>
+          <p:cNvSpPr txBox="1"/>
+          <p:nvPr/>
+        </p:nvSpPr>
+        <p:spPr>
+          <a:xfrm>
+            <a:off x="6133946" y="1962150"/>
+            <a:ext cx="323841" cy="314325"/>
+          </a:xfrm>
+          <a:prstGeom prst="rect">
+            <a:avLst/>
+          </a:prstGeom>
+          <a:noFill/>
+        </p:spPr>
+        <p:txBody>
+          <a:bodyPr wrap="square" lIns="0" rIns="0" tIns="0" bIns="0">
+            <a:spAutoFit/>
+          </a:bodyPr>
+          <a:lstStyle/>
+          <a:p>
+            <a:pPr algn="l"/>
+            <a:r>
+              <a:rPr sz="1800" b="1" i="0">
+                <a:solidFill>
+                  <a:srgbClr val="BCC4D8"/>
+                </a:solidFill>
+                <a:latin typeface="PingFang SC"/>
+              </a:rPr>
+              <a:t>+</a:t>
+            </a:r>
+          </a:p>
+        </p:txBody>
+      </p:sp>
+      <p:sp>
+        <p:nvSpPr>
+          <p:cNvPr id="12" name="Rectangle 11"/>
+          <p:cNvSpPr/>
+          <p:nvPr/>
+        </p:nvSpPr>
+        <p:spPr>
+          <a:xfrm>
+            <a:off x="4686182" y="5048250"/>
+            <a:ext cx="571485" cy="28575"/>
+          </a:xfrm>
+          <a:prstGeom prst="rect">
+            <a:avLst/>
+          </a:prstGeom>
+          <a:solidFill>
+            <a:srgbClr val="7C5CFF"/>
+          </a:solidFill>
+          <a:ln>
+            <a:noFill/>
+          </a:ln>
+        </p:spPr>
+        <p:style>
+          <a:lnRef idx="1">
+            <a:schemeClr val="accent1"/>
+          </a:lnRef>
+          <a:fillRef idx="3">
+            <a:schemeClr val="accent1"/>
+          </a:fillRef>
+          <a:effectRef idx="2">
+            <a:schemeClr val="accent1"/>
+          </a:effectRef>
+          <a:fontRef idx="minor">
+            <a:schemeClr val="lt1"/>
+          </a:fontRef>
+        </p:style>
+        <p:txBody>
+          <a:bodyPr rtlCol="0" anchor="ctr"/>
+          <a:lstStyle/>
+          <a:p>
+            <a:pPr algn="ctr"/>
+          </a:p>
+        </p:txBody>
+      </p:sp>
+      <p:sp>
+        <p:nvSpPr>
+          <p:cNvPr id="13" name="TextBox 12"/>
+          <p:cNvSpPr txBox="1"/>
+          <p:nvPr/>
+        </p:nvSpPr>
+        <p:spPr>
+          <a:xfrm>
+            <a:off x="4686182" y="5181600"/>
+            <a:ext cx="2819329" cy="190500"/>
+          </a:xfrm>
+          <a:prstGeom prst="rect">
+            <a:avLst/>
+          </a:prstGeom>
+          <a:noFill/>
+        </p:spPr>
+        <p:txBody>
+          <a:bodyPr wrap="square" lIns="0" rIns="0" tIns="0" bIns="0">
+            <a:spAutoFit/>
+          </a:bodyPr>
+          <a:lstStyle/>
+          <a:p>
+            <a:pPr algn="l"/>
+            <a:r>
+              <a:rPr sz="1050" b="0" i="0">
+                <a:solidFill>
+                  <a:srgbClr val="BCC4D8"/>
+                </a:solidFill>
+                <a:latin typeface="PingFang SC"/>
+              </a:rPr>
+              <a:t>OpenAI / Anthropic / 国产</a:t>
+            </a:r>
+          </a:p>
+        </p:txBody>
+      </p:sp>
+      <p:sp>
+        <p:nvSpPr>
+          <p:cNvPr id="14" name="Rounded Rectangle 13"/>
+          <p:cNvSpPr/>
+          <p:nvPr/>
+        </p:nvSpPr>
+        <p:spPr>
+          <a:xfrm>
+            <a:off x="8076997" y="533400"/>
+            <a:ext cx="3581310" cy="5505450"/>
+          </a:xfrm>
+          <a:prstGeom prst="roundRect">
+            <a:avLst>
+              <a:gd name="adj" fmla="val 7446"/>
+            </a:avLst>
+          </a:prstGeom>
+          <a:solidFill>
+            <a:srgbClr val="FFFFFF"/>
+          </a:solidFill>
+          <a:ln w="12700">
+            <a:solidFill>
+              <a:srgbClr val="FFFFFF"/>
+            </a:solidFill>
+          </a:ln>
+        </p:spPr>
+        <p:style>
+          <a:lnRef idx="1">
+            <a:schemeClr val="accent1"/>
+          </a:lnRef>
+          <a:fillRef idx="3">
+            <a:schemeClr val="accent1"/>
+          </a:fillRef>
+          <a:effectRef idx="2">
+            <a:schemeClr val="accent1"/>
+          </a:effectRef>
+          <a:fontRef idx="minor">
+            <a:schemeClr val="lt1"/>
+          </a:fontRef>
+        </p:style>
+        <p:txBody>
+          <a:bodyPr rtlCol="0" anchor="ctr"/>
+          <a:lstStyle/>
+          <a:p>
+            <a:pPr algn="ctr"/>
+          </a:p>
+        </p:txBody>
+      </p:sp>
+      <p:sp>
+        <p:nvSpPr>
+          <p:cNvPr id="15" name="TextBox 14"/>
+          <p:cNvSpPr txBox="1"/>
+          <p:nvPr/>
+        </p:nvSpPr>
+        <p:spPr>
+          <a:xfrm>
+            <a:off x="8457988" y="952500"/>
+            <a:ext cx="2819329" cy="209550"/>
+          </a:xfrm>
+          <a:prstGeom prst="rect">
+            <a:avLst/>
+          </a:prstGeom>
+          <a:noFill/>
+        </p:spPr>
+        <p:txBody>
+          <a:bodyPr wrap="square" lIns="0" rIns="0" tIns="0" bIns="0">
+            <a:spAutoFit/>
+          </a:bodyPr>
+          <a:lstStyle/>
+          <a:p>
+            <a:pPr algn="l"/>
+            <a:r>
+              <a:rPr sz="1200" b="1" i="0" spc="300">
+                <a:solidFill>
+                  <a:srgbClr val="00D4FF"/>
+                </a:solidFill>
+                <a:latin typeface="PingFang SC"/>
+              </a:rPr>
+              <a:t>可观测性</a:t>
+            </a:r>
+          </a:p>
+        </p:txBody>
+      </p:sp>
+      <p:sp>
+        <p:nvSpPr>
+          <p:cNvPr id="16" name="TextBox 15"/>
+          <p:cNvSpPr txBox="1"/>
+          <p:nvPr/>
+        </p:nvSpPr>
+        <p:spPr>
+          <a:xfrm>
+            <a:off x="8457988" y="1371600"/>
+            <a:ext cx="1485862" cy="1000125"/>
+          </a:xfrm>
+          <a:prstGeom prst="rect">
+            <a:avLst/>
+          </a:prstGeom>
+          <a:noFill/>
+        </p:spPr>
+        <p:txBody>
+          <a:bodyPr wrap="square" lIns="0" rIns="0" tIns="0" bIns="0">
+            <a:spAutoFit/>
+          </a:bodyPr>
+          <a:lstStyle/>
+          <a:p>
+            <a:pPr algn="l"/>
+            <a:r>
+              <a:rPr sz="6600" b="1" i="0">
+                <a:solidFill>
+                  <a:srgbClr val="FFFFFF"/>
+                </a:solidFill>
+                <a:latin typeface="PingFang SC"/>
+              </a:rPr>
+              <a:t>100</a:t>
+            </a:r>
+          </a:p>
+        </p:txBody>
+      </p:sp>
+      <p:sp>
+        <p:nvSpPr>
+          <p:cNvPr id="17" name="TextBox 16"/>
+          <p:cNvSpPr txBox="1"/>
+          <p:nvPr/>
+        </p:nvSpPr>
+        <p:spPr>
+          <a:xfrm>
+            <a:off x="9905752" y="1962150"/>
+            <a:ext cx="323841" cy="314325"/>
+          </a:xfrm>
+          <a:prstGeom prst="rect">
+            <a:avLst/>
+          </a:prstGeom>
+          <a:noFill/>
+        </p:spPr>
+        <p:txBody>
+          <a:bodyPr wrap="square" lIns="0" rIns="0" tIns="0" bIns="0">
+            <a:spAutoFit/>
+          </a:bodyPr>
+          <a:lstStyle/>
+          <a:p>
+            <a:pPr algn="l"/>
+            <a:r>
+              <a:rPr sz="1800" b="1" i="0">
+                <a:solidFill>
+                  <a:srgbClr val="BCC4D8"/>
+                </a:solidFill>
+                <a:latin typeface="PingFang SC"/>
+              </a:rPr>
+              <a:t>%</a:t>
+            </a:r>
+          </a:p>
+        </p:txBody>
+      </p:sp>
+      <p:sp>
+        <p:nvSpPr>
+          <p:cNvPr id="18" name="Rectangle 17"/>
+          <p:cNvSpPr/>
+          <p:nvPr/>
+        </p:nvSpPr>
+        <p:spPr>
+          <a:xfrm>
+            <a:off x="8457988" y="5048250"/>
+            <a:ext cx="571485" cy="28575"/>
+          </a:xfrm>
+          <a:prstGeom prst="rect">
+            <a:avLst/>
+          </a:prstGeom>
+          <a:solidFill>
+            <a:srgbClr val="7C5CFF"/>
+          </a:solidFill>
+          <a:ln>
+            <a:noFill/>
+          </a:ln>
+        </p:spPr>
+        <p:style>
+          <a:lnRef idx="1">
+            <a:schemeClr val="accent1"/>
+          </a:lnRef>
+          <a:fillRef idx="3">
+            <a:schemeClr val="accent1"/>
+          </a:fillRef>
+          <a:effectRef idx="2">
+            <a:schemeClr val="accent1"/>
+          </a:effectRef>
+          <a:fontRef idx="minor">
+            <a:schemeClr val="lt1"/>
+          </a:fontRef>
+        </p:style>
+        <p:txBody>
+          <a:bodyPr rtlCol="0" anchor="ctr"/>
+          <a:lstStyle/>
+          <a:p>
+            <a:pPr algn="ctr"/>
+          </a:p>
+        </p:txBody>
+      </p:sp>
+      <p:sp>
+        <p:nvSpPr>
+          <p:cNvPr id="19" name="TextBox 18"/>
+          <p:cNvSpPr txBox="1"/>
+          <p:nvPr/>
+        </p:nvSpPr>
+        <p:spPr>
+          <a:xfrm>
+            <a:off x="8457988" y="5181600"/>
+            <a:ext cx="2819329" cy="190500"/>
+          </a:xfrm>
+          <a:prstGeom prst="rect">
+            <a:avLst/>
+          </a:prstGeom>
+          <a:noFill/>
+        </p:spPr>
+        <p:txBody>
+          <a:bodyPr wrap="square" lIns="0" rIns="0" tIns="0" bIns="0">
+            <a:spAutoFit/>
+          </a:bodyPr>
+          <a:lstStyle/>
+          <a:p>
+            <a:pPr algn="l"/>
+            <a:r>
+              <a:rPr sz="1050" b="0" i="0">
+                <a:solidFill>
+                  <a:srgbClr val="BCC4D8"/>
+                </a:solidFill>
+                <a:latin typeface="PingFang SC"/>
+              </a:rPr>
+              <a:t>全链路日志与评测</a:t>
+            </a:r>
+          </a:p>
+        </p:txBody>
+      </p:sp>
+      <p:sp>
+        <p:nvSpPr>
+          <p:cNvPr id="20" name="TextBox 19"/>
+          <p:cNvSpPr txBox="1"/>
+          <p:nvPr/>
+        </p:nvSpPr>
+        <p:spPr>
+          <a:xfrm>
+            <a:off x="533386" y="6610350"/>
+            <a:ext cx="5714857" cy="190500"/>
+          </a:xfrm>
+          <a:prstGeom prst="rect">
+            <a:avLst/>
+          </a:prstGeom>
+          <a:noFill/>
+        </p:spPr>
+        <p:txBody>
+          <a:bodyPr wrap="square" lIns="0" rIns="0" tIns="0" bIns="0">
+            <a:spAutoFit/>
+          </a:bodyPr>
+          <a:lstStyle/>
+          <a:p>
+            <a:pPr algn="l"/>
+            <a:r>
+              <a:rPr sz="1050" b="0" i="0">
+                <a:solidFill>
+                  <a:srgbClr val="6B7392"/>
+                </a:solidFill>
+                <a:latin typeface="PingFang SC"/>
+              </a:rPr>
+              <a:t>Dify 企业介绍</a:t>
+            </a:r>
+          </a:p>
+        </p:txBody>
+      </p:sp>
+      <p:sp>
+        <p:nvSpPr>
+          <p:cNvPr id="21" name="TextBox 20"/>
+          <p:cNvSpPr txBox="1"/>
+          <p:nvPr/>
+        </p:nvSpPr>
+        <p:spPr>
+          <a:xfrm>
+            <a:off x="9753356" y="6610350"/>
+            <a:ext cx="1904952" cy="190500"/>
+          </a:xfrm>
+          <a:prstGeom prst="rect">
+            <a:avLst/>
+          </a:prstGeom>
+          <a:noFill/>
+        </p:spPr>
+        <p:txBody>
+          <a:bodyPr wrap="square" lIns="0" rIns="0" tIns="0" bIns="0">
+            <a:spAutoFit/>
+          </a:bodyPr>
+          <a:lstStyle/>
+          <a:p>
+            <a:pPr algn="r"/>
+            <a:r>
+              <a:rPr sz="1050" b="0" i="0">
+                <a:solidFill>
+                  <a:srgbClr val="6B7392"/>
+                </a:solidFill>
+                <a:latin typeface="SF Mono"/>
+              </a:rPr>
+              <a:t>04 / 08</a:t>
+            </a:r>
+          </a:p>
+        </p:txBody>
+      </p:sp>
     </p:spTree>
   </p:cSld>
   <p:clrMapOvr>
@@ -3280,6 +6105,14 @@
 <file path=ppt/slides/slide5.xml><?xml version="1.0" encoding="utf-8"?>
 <p:sld xmlns:a="http://schemas.openxmlformats.org/drawingml/2006/main" xmlns:p="http://schemas.openxmlformats.org/presentationml/2006/main" xmlns:r="http://schemas.openxmlformats.org/officeDocument/2006/relationships">
   <p:cSld>
+    <p:bg>
+      <p:bgPr>
+        <a:solidFill>
+          <a:srgbClr val="0A0E27"/>
+        </a:solidFill>
+        <a:effectLst/>
+      </p:bgPr>
+    </p:bg>
     <p:spTree>
       <p:nvGrpSpPr>
         <p:cNvPr id="1" name=""/>
@@ -3287,36 +6120,1096 @@
         <p:nvPr/>
       </p:nvGrpSpPr>
       <p:grpSpPr/>
-      <p:pic>
-        <p:nvPicPr>
-          <p:cNvPr id="2" name="Picture 1" descr="05-major-minor-demo.png"/>
-          <p:cNvPicPr>
-            <a:picLocks noChangeAspect="1"/>
-          </p:cNvPicPr>
-          <p:nvPr/>
-        </p:nvPicPr>
-        <p:blipFill>
-          <a:blip r:embed="rId2">
-            <a:extLst>
-              <a:ext uri="{96DAC541-7B7A-43D3-8B79-37D633B846F1}">
-                <asvg:svgBlip xmlns:asvg="http://schemas.microsoft.com/office/drawing/2016/SVG/main" r:embed="rId3"/>
-              </a:ext>
-            </a:extLst>
-          </a:blip>
-          <a:stretch>
-            <a:fillRect/>
-          </a:stretch>
-        </p:blipFill>
-        <p:spPr>
-          <a:xfrm>
-            <a:off x="0" y="0"/>
-            <a:ext cx="12191695" cy="6858000"/>
-          </a:xfrm>
-          <a:prstGeom prst="rect">
-            <a:avLst/>
-          </a:prstGeom>
-        </p:spPr>
-      </p:pic>
+      <p:sp>
+        <p:nvSpPr>
+          <p:cNvPr id="2" name="Rounded Rectangle 1"/>
+          <p:cNvSpPr/>
+          <p:nvPr/>
+        </p:nvSpPr>
+        <p:spPr>
+          <a:xfrm>
+            <a:off x="2933626" y="533400"/>
+            <a:ext cx="6324441" cy="5505450"/>
+          </a:xfrm>
+          <a:prstGeom prst="roundRect">
+            <a:avLst>
+              <a:gd name="adj" fmla="val 4844"/>
+            </a:avLst>
+          </a:prstGeom>
+          <a:solidFill>
+            <a:srgbClr val="FFFFFF"/>
+          </a:solidFill>
+          <a:ln w="12700">
+            <a:solidFill>
+              <a:srgbClr val="FFFFFF"/>
+            </a:solidFill>
+          </a:ln>
+        </p:spPr>
+        <p:style>
+          <a:lnRef idx="1">
+            <a:schemeClr val="accent1"/>
+          </a:lnRef>
+          <a:fillRef idx="3">
+            <a:schemeClr val="accent1"/>
+          </a:fillRef>
+          <a:effectRef idx="2">
+            <a:schemeClr val="accent1"/>
+          </a:effectRef>
+          <a:fontRef idx="minor">
+            <a:schemeClr val="lt1"/>
+          </a:fontRef>
+        </p:style>
+        <p:txBody>
+          <a:bodyPr rtlCol="0" anchor="ctr"/>
+          <a:lstStyle/>
+          <a:p>
+            <a:pPr algn="ctr"/>
+          </a:p>
+        </p:txBody>
+      </p:sp>
+      <p:sp>
+        <p:nvSpPr>
+          <p:cNvPr id="3" name="Rounded Rectangle 2"/>
+          <p:cNvSpPr/>
+          <p:nvPr/>
+        </p:nvSpPr>
+        <p:spPr>
+          <a:xfrm>
+            <a:off x="3314617" y="914400"/>
+            <a:ext cx="57148" cy="3695700"/>
+          </a:xfrm>
+          <a:prstGeom prst="roundRect">
+            <a:avLst>
+              <a:gd name="adj" fmla="val 50000"/>
+            </a:avLst>
+          </a:prstGeom>
+          <a:solidFill>
+            <a:srgbClr val="7C5CFF"/>
+          </a:solidFill>
+          <a:ln>
+            <a:noFill/>
+          </a:ln>
+        </p:spPr>
+        <p:style>
+          <a:lnRef idx="1">
+            <a:schemeClr val="accent1"/>
+          </a:lnRef>
+          <a:fillRef idx="3">
+            <a:schemeClr val="accent1"/>
+          </a:fillRef>
+          <a:effectRef idx="2">
+            <a:schemeClr val="accent1"/>
+          </a:effectRef>
+          <a:fontRef idx="minor">
+            <a:schemeClr val="lt1"/>
+          </a:fontRef>
+        </p:style>
+        <p:txBody>
+          <a:bodyPr rtlCol="0" anchor="ctr"/>
+          <a:lstStyle/>
+          <a:p>
+            <a:pPr algn="ctr"/>
+          </a:p>
+        </p:txBody>
+      </p:sp>
+      <p:sp>
+        <p:nvSpPr>
+          <p:cNvPr id="4" name="TextBox 3"/>
+          <p:cNvSpPr txBox="1"/>
+          <p:nvPr/>
+        </p:nvSpPr>
+        <p:spPr>
+          <a:xfrm>
+            <a:off x="3619409" y="1295400"/>
+            <a:ext cx="4952876" cy="3314700"/>
+          </a:xfrm>
+          <a:prstGeom prst="rect">
+            <a:avLst/>
+          </a:prstGeom>
+          <a:noFill/>
+        </p:spPr>
+        <p:txBody>
+          <a:bodyPr wrap="square" lIns="0" rIns="0" tIns="0" bIns="0">
+            <a:spAutoFit/>
+          </a:bodyPr>
+          <a:lstStyle/>
+          <a:p>
+            <a:pPr algn="l"/>
+            <a:r>
+              <a:rPr sz="3300" b="0" i="1">
+                <a:solidFill>
+                  <a:srgbClr val="FFFFFF"/>
+                </a:solidFill>
+                <a:latin typeface="PingFang SC"/>
+              </a:rPr>
+              <a:t>AI 应用的瓶颈不是模型，而是工程化。</a:t>
+            </a:r>
+          </a:p>
+        </p:txBody>
+      </p:sp>
+      <p:sp>
+        <p:nvSpPr>
+          <p:cNvPr id="5" name="Rectangle 4"/>
+          <p:cNvSpPr/>
+          <p:nvPr/>
+        </p:nvSpPr>
+        <p:spPr>
+          <a:xfrm>
+            <a:off x="3619409" y="4800600"/>
+            <a:ext cx="457188" cy="28575"/>
+          </a:xfrm>
+          <a:prstGeom prst="rect">
+            <a:avLst/>
+          </a:prstGeom>
+          <a:solidFill>
+            <a:srgbClr val="7C5CFF"/>
+          </a:solidFill>
+          <a:ln>
+            <a:noFill/>
+          </a:ln>
+        </p:spPr>
+        <p:style>
+          <a:lnRef idx="1">
+            <a:schemeClr val="accent1"/>
+          </a:lnRef>
+          <a:fillRef idx="3">
+            <a:schemeClr val="accent1"/>
+          </a:fillRef>
+          <a:effectRef idx="2">
+            <a:schemeClr val="accent1"/>
+          </a:effectRef>
+          <a:fontRef idx="minor">
+            <a:schemeClr val="lt1"/>
+          </a:fontRef>
+        </p:style>
+        <p:txBody>
+          <a:bodyPr rtlCol="0" anchor="ctr"/>
+          <a:lstStyle/>
+          <a:p>
+            <a:pPr algn="ctr"/>
+          </a:p>
+        </p:txBody>
+      </p:sp>
+      <p:sp>
+        <p:nvSpPr>
+          <p:cNvPr id="6" name="TextBox 5"/>
+          <p:cNvSpPr txBox="1"/>
+          <p:nvPr/>
+        </p:nvSpPr>
+        <p:spPr>
+          <a:xfrm>
+            <a:off x="3619409" y="4991100"/>
+            <a:ext cx="4952876" cy="266700"/>
+          </a:xfrm>
+          <a:prstGeom prst="rect">
+            <a:avLst/>
+          </a:prstGeom>
+          <a:noFill/>
+        </p:spPr>
+        <p:txBody>
+          <a:bodyPr wrap="square" lIns="0" rIns="0" tIns="0" bIns="0">
+            <a:spAutoFit/>
+          </a:bodyPr>
+          <a:lstStyle/>
+          <a:p>
+            <a:pPr algn="l"/>
+            <a:r>
+              <a:rPr sz="1650" b="1" i="0">
+                <a:solidFill>
+                  <a:srgbClr val="FFFFFF"/>
+                </a:solidFill>
+                <a:latin typeface="PingFang SC"/>
+              </a:rPr>
+              <a:t>Dify 创始团队</a:t>
+            </a:r>
+          </a:p>
+        </p:txBody>
+      </p:sp>
+      <p:sp>
+        <p:nvSpPr>
+          <p:cNvPr id="7" name="TextBox 6"/>
+          <p:cNvSpPr txBox="1"/>
+          <p:nvPr/>
+        </p:nvSpPr>
+        <p:spPr>
+          <a:xfrm>
+            <a:off x="3619409" y="5295900"/>
+            <a:ext cx="4952876" cy="209550"/>
+          </a:xfrm>
+          <a:prstGeom prst="rect">
+            <a:avLst/>
+          </a:prstGeom>
+          <a:noFill/>
+        </p:spPr>
+        <p:txBody>
+          <a:bodyPr wrap="square" lIns="0" rIns="0" tIns="0" bIns="0">
+            <a:spAutoFit/>
+          </a:bodyPr>
+          <a:lstStyle/>
+          <a:p>
+            <a:pPr algn="l"/>
+            <a:r>
+              <a:rPr sz="1350" b="0" i="0">
+                <a:solidFill>
+                  <a:srgbClr val="6B7392"/>
+                </a:solidFill>
+                <a:latin typeface="PingFang SC"/>
+              </a:rPr>
+              <a:t>2024 年技术分享会</a:t>
+            </a:r>
+          </a:p>
+        </p:txBody>
+      </p:sp>
+      <p:sp>
+        <p:nvSpPr>
+          <p:cNvPr id="8" name="Rounded Rectangle 7"/>
+          <p:cNvSpPr/>
+          <p:nvPr/>
+        </p:nvSpPr>
+        <p:spPr>
+          <a:xfrm>
+            <a:off x="533386" y="533400"/>
+            <a:ext cx="2209744" cy="2667000"/>
+          </a:xfrm>
+          <a:prstGeom prst="roundRect">
+            <a:avLst>
+              <a:gd name="adj" fmla="val 12068"/>
+            </a:avLst>
+          </a:prstGeom>
+          <a:solidFill>
+            <a:srgbClr val="FFFFFF"/>
+          </a:solidFill>
+          <a:ln w="12700">
+            <a:solidFill>
+              <a:srgbClr val="FFFFFF"/>
+            </a:solidFill>
+          </a:ln>
+        </p:spPr>
+        <p:style>
+          <a:lnRef idx="1">
+            <a:schemeClr val="accent1"/>
+          </a:lnRef>
+          <a:fillRef idx="3">
+            <a:schemeClr val="accent1"/>
+          </a:fillRef>
+          <a:effectRef idx="2">
+            <a:schemeClr val="accent1"/>
+          </a:effectRef>
+          <a:fontRef idx="minor">
+            <a:schemeClr val="lt1"/>
+          </a:fontRef>
+        </p:style>
+        <p:txBody>
+          <a:bodyPr rtlCol="0" anchor="ctr"/>
+          <a:lstStyle/>
+          <a:p>
+            <a:pPr algn="ctr"/>
+          </a:p>
+        </p:txBody>
+      </p:sp>
+      <p:sp>
+        <p:nvSpPr>
+          <p:cNvPr id="9" name="TextBox 8"/>
+          <p:cNvSpPr txBox="1"/>
+          <p:nvPr/>
+        </p:nvSpPr>
+        <p:spPr>
+          <a:xfrm>
+            <a:off x="914377" y="952500"/>
+            <a:ext cx="1447763" cy="209550"/>
+          </a:xfrm>
+          <a:prstGeom prst="rect">
+            <a:avLst/>
+          </a:prstGeom>
+          <a:noFill/>
+        </p:spPr>
+        <p:txBody>
+          <a:bodyPr wrap="square" lIns="0" rIns="0" tIns="0" bIns="0">
+            <a:spAutoFit/>
+          </a:bodyPr>
+          <a:lstStyle/>
+          <a:p>
+            <a:pPr algn="l"/>
+            <a:r>
+              <a:rPr sz="1200" b="1" i="0" spc="300">
+                <a:solidFill>
+                  <a:srgbClr val="00D4FF"/>
+                </a:solidFill>
+                <a:latin typeface="PingFang SC"/>
+              </a:rPr>
+              <a:t>模型延迟</a:t>
+            </a:r>
+          </a:p>
+        </p:txBody>
+      </p:sp>
+      <p:sp>
+        <p:nvSpPr>
+          <p:cNvPr id="10" name="TextBox 9"/>
+          <p:cNvSpPr txBox="1"/>
+          <p:nvPr/>
+        </p:nvSpPr>
+        <p:spPr>
+          <a:xfrm>
+            <a:off x="914377" y="1371600"/>
+            <a:ext cx="1447763" cy="723900"/>
+          </a:xfrm>
+          <a:prstGeom prst="rect">
+            <a:avLst/>
+          </a:prstGeom>
+          <a:noFill/>
+        </p:spPr>
+        <p:txBody>
+          <a:bodyPr wrap="square" lIns="0" rIns="0" tIns="0" bIns="0">
+            <a:spAutoFit/>
+          </a:bodyPr>
+          <a:lstStyle/>
+          <a:p>
+            <a:pPr algn="l"/>
+            <a:r>
+              <a:rPr sz="4800" b="1" i="0">
+                <a:solidFill>
+                  <a:srgbClr val="FFFFFF"/>
+                </a:solidFill>
+                <a:latin typeface="PingFang SC"/>
+              </a:rPr>
+              <a:t>&lt;200</a:t>
+            </a:r>
+          </a:p>
+        </p:txBody>
+      </p:sp>
+      <p:sp>
+        <p:nvSpPr>
+          <p:cNvPr id="11" name="TextBox 10"/>
+          <p:cNvSpPr txBox="1"/>
+          <p:nvPr/>
+        </p:nvSpPr>
+        <p:spPr>
+          <a:xfrm>
+            <a:off x="914377" y="2019300"/>
+            <a:ext cx="1447763" cy="219075"/>
+          </a:xfrm>
+          <a:prstGeom prst="rect">
+            <a:avLst/>
+          </a:prstGeom>
+          <a:noFill/>
+        </p:spPr>
+        <p:txBody>
+          <a:bodyPr wrap="square" lIns="0" rIns="0" tIns="0" bIns="0">
+            <a:spAutoFit/>
+          </a:bodyPr>
+          <a:lstStyle/>
+          <a:p>
+            <a:pPr algn="l"/>
+            <a:r>
+              <a:rPr sz="1275" b="1" i="0">
+                <a:solidFill>
+                  <a:srgbClr val="BCC4D8"/>
+                </a:solidFill>
+                <a:latin typeface="PingFang SC"/>
+              </a:rPr>
+              <a:t>ms</a:t>
+            </a:r>
+          </a:p>
+        </p:txBody>
+      </p:sp>
+      <p:sp>
+        <p:nvSpPr>
+          <p:cNvPr id="12" name="Rectangle 11"/>
+          <p:cNvSpPr/>
+          <p:nvPr/>
+        </p:nvSpPr>
+        <p:spPr>
+          <a:xfrm>
+            <a:off x="914377" y="2409825"/>
+            <a:ext cx="571485" cy="28575"/>
+          </a:xfrm>
+          <a:prstGeom prst="rect">
+            <a:avLst/>
+          </a:prstGeom>
+          <a:solidFill>
+            <a:srgbClr val="7C5CFF"/>
+          </a:solidFill>
+          <a:ln>
+            <a:noFill/>
+          </a:ln>
+        </p:spPr>
+        <p:style>
+          <a:lnRef idx="1">
+            <a:schemeClr val="accent1"/>
+          </a:lnRef>
+          <a:fillRef idx="3">
+            <a:schemeClr val="accent1"/>
+          </a:fillRef>
+          <a:effectRef idx="2">
+            <a:schemeClr val="accent1"/>
+          </a:effectRef>
+          <a:fontRef idx="minor">
+            <a:schemeClr val="lt1"/>
+          </a:fontRef>
+        </p:style>
+        <p:txBody>
+          <a:bodyPr rtlCol="0" anchor="ctr"/>
+          <a:lstStyle/>
+          <a:p>
+            <a:pPr algn="ctr"/>
+          </a:p>
+        </p:txBody>
+      </p:sp>
+      <p:sp>
+        <p:nvSpPr>
+          <p:cNvPr id="13" name="Rounded Rectangle 12"/>
+          <p:cNvSpPr/>
+          <p:nvPr/>
+        </p:nvSpPr>
+        <p:spPr>
+          <a:xfrm>
+            <a:off x="533386" y="3371850"/>
+            <a:ext cx="2209744" cy="2667000"/>
+          </a:xfrm>
+          <a:prstGeom prst="roundRect">
+            <a:avLst>
+              <a:gd name="adj" fmla="val 12068"/>
+            </a:avLst>
+          </a:prstGeom>
+          <a:solidFill>
+            <a:srgbClr val="FFFFFF"/>
+          </a:solidFill>
+          <a:ln w="12700">
+            <a:solidFill>
+              <a:srgbClr val="FFFFFF"/>
+            </a:solidFill>
+          </a:ln>
+        </p:spPr>
+        <p:style>
+          <a:lnRef idx="1">
+            <a:schemeClr val="accent1"/>
+          </a:lnRef>
+          <a:fillRef idx="3">
+            <a:schemeClr val="accent1"/>
+          </a:fillRef>
+          <a:effectRef idx="2">
+            <a:schemeClr val="accent1"/>
+          </a:effectRef>
+          <a:fontRef idx="minor">
+            <a:schemeClr val="lt1"/>
+          </a:fontRef>
+        </p:style>
+        <p:txBody>
+          <a:bodyPr rtlCol="0" anchor="ctr"/>
+          <a:lstStyle/>
+          <a:p>
+            <a:pPr algn="ctr"/>
+          </a:p>
+        </p:txBody>
+      </p:sp>
+      <p:sp>
+        <p:nvSpPr>
+          <p:cNvPr id="14" name="TextBox 13"/>
+          <p:cNvSpPr txBox="1"/>
+          <p:nvPr/>
+        </p:nvSpPr>
+        <p:spPr>
+          <a:xfrm>
+            <a:off x="914377" y="3790950"/>
+            <a:ext cx="1447763" cy="209550"/>
+          </a:xfrm>
+          <a:prstGeom prst="rect">
+            <a:avLst/>
+          </a:prstGeom>
+          <a:noFill/>
+        </p:spPr>
+        <p:txBody>
+          <a:bodyPr wrap="square" lIns="0" rIns="0" tIns="0" bIns="0">
+            <a:spAutoFit/>
+          </a:bodyPr>
+          <a:lstStyle/>
+          <a:p>
+            <a:pPr algn="l"/>
+            <a:r>
+              <a:rPr sz="1200" b="1" i="0" spc="300">
+                <a:solidFill>
+                  <a:srgbClr val="00D4FF"/>
+                </a:solidFill>
+                <a:latin typeface="PingFang SC"/>
+              </a:rPr>
+              <a:t>成本下降</a:t>
+            </a:r>
+          </a:p>
+        </p:txBody>
+      </p:sp>
+      <p:sp>
+        <p:nvSpPr>
+          <p:cNvPr id="15" name="TextBox 14"/>
+          <p:cNvSpPr txBox="1"/>
+          <p:nvPr/>
+        </p:nvSpPr>
+        <p:spPr>
+          <a:xfrm>
+            <a:off x="914377" y="4210050"/>
+            <a:ext cx="781030" cy="723900"/>
+          </a:xfrm>
+          <a:prstGeom prst="rect">
+            <a:avLst/>
+          </a:prstGeom>
+          <a:noFill/>
+        </p:spPr>
+        <p:txBody>
+          <a:bodyPr wrap="square" lIns="0" rIns="0" tIns="0" bIns="0">
+            <a:spAutoFit/>
+          </a:bodyPr>
+          <a:lstStyle/>
+          <a:p>
+            <a:pPr algn="l"/>
+            <a:r>
+              <a:rPr sz="4800" b="1" i="0">
+                <a:solidFill>
+                  <a:srgbClr val="FFFFFF"/>
+                </a:solidFill>
+                <a:latin typeface="PingFang SC"/>
+              </a:rPr>
+              <a:t>60</a:t>
+            </a:r>
+          </a:p>
+        </p:txBody>
+      </p:sp>
+      <p:sp>
+        <p:nvSpPr>
+          <p:cNvPr id="16" name="TextBox 15"/>
+          <p:cNvSpPr txBox="1"/>
+          <p:nvPr/>
+        </p:nvSpPr>
+        <p:spPr>
+          <a:xfrm>
+            <a:off x="1657308" y="4638675"/>
+            <a:ext cx="285742" cy="219075"/>
+          </a:xfrm>
+          <a:prstGeom prst="rect">
+            <a:avLst/>
+          </a:prstGeom>
+          <a:noFill/>
+        </p:spPr>
+        <p:txBody>
+          <a:bodyPr wrap="square" lIns="0" rIns="0" tIns="0" bIns="0">
+            <a:spAutoFit/>
+          </a:bodyPr>
+          <a:lstStyle/>
+          <a:p>
+            <a:pPr algn="l"/>
+            <a:r>
+              <a:rPr sz="1275" b="1" i="0">
+                <a:solidFill>
+                  <a:srgbClr val="BCC4D8"/>
+                </a:solidFill>
+                <a:latin typeface="PingFang SC"/>
+              </a:rPr>
+              <a:t>%</a:t>
+            </a:r>
+          </a:p>
+        </p:txBody>
+      </p:sp>
+      <p:sp>
+        <p:nvSpPr>
+          <p:cNvPr id="17" name="Rectangle 16"/>
+          <p:cNvSpPr/>
+          <p:nvPr/>
+        </p:nvSpPr>
+        <p:spPr>
+          <a:xfrm>
+            <a:off x="914377" y="5048250"/>
+            <a:ext cx="571485" cy="28575"/>
+          </a:xfrm>
+          <a:prstGeom prst="rect">
+            <a:avLst/>
+          </a:prstGeom>
+          <a:solidFill>
+            <a:srgbClr val="7C5CFF"/>
+          </a:solidFill>
+          <a:ln>
+            <a:noFill/>
+          </a:ln>
+        </p:spPr>
+        <p:style>
+          <a:lnRef idx="1">
+            <a:schemeClr val="accent1"/>
+          </a:lnRef>
+          <a:fillRef idx="3">
+            <a:schemeClr val="accent1"/>
+          </a:fillRef>
+          <a:effectRef idx="2">
+            <a:schemeClr val="accent1"/>
+          </a:effectRef>
+          <a:fontRef idx="minor">
+            <a:schemeClr val="lt1"/>
+          </a:fontRef>
+        </p:style>
+        <p:txBody>
+          <a:bodyPr rtlCol="0" anchor="ctr"/>
+          <a:lstStyle/>
+          <a:p>
+            <a:pPr algn="ctr"/>
+          </a:p>
+        </p:txBody>
+      </p:sp>
+      <p:sp>
+        <p:nvSpPr>
+          <p:cNvPr id="18" name="Rounded Rectangle 17"/>
+          <p:cNvSpPr/>
+          <p:nvPr/>
+        </p:nvSpPr>
+        <p:spPr>
+          <a:xfrm>
+            <a:off x="9448563" y="533400"/>
+            <a:ext cx="2209744" cy="2667000"/>
+          </a:xfrm>
+          <a:prstGeom prst="roundRect">
+            <a:avLst>
+              <a:gd name="adj" fmla="val 12068"/>
+            </a:avLst>
+          </a:prstGeom>
+          <a:solidFill>
+            <a:srgbClr val="FFFFFF"/>
+          </a:solidFill>
+          <a:ln w="12700">
+            <a:solidFill>
+              <a:srgbClr val="FFFFFF"/>
+            </a:solidFill>
+          </a:ln>
+        </p:spPr>
+        <p:style>
+          <a:lnRef idx="1">
+            <a:schemeClr val="accent1"/>
+          </a:lnRef>
+          <a:fillRef idx="3">
+            <a:schemeClr val="accent1"/>
+          </a:fillRef>
+          <a:effectRef idx="2">
+            <a:schemeClr val="accent1"/>
+          </a:effectRef>
+          <a:fontRef idx="minor">
+            <a:schemeClr val="lt1"/>
+          </a:fontRef>
+        </p:style>
+        <p:txBody>
+          <a:bodyPr rtlCol="0" anchor="ctr"/>
+          <a:lstStyle/>
+          <a:p>
+            <a:pPr algn="ctr"/>
+          </a:p>
+        </p:txBody>
+      </p:sp>
+      <p:sp>
+        <p:nvSpPr>
+          <p:cNvPr id="19" name="TextBox 18"/>
+          <p:cNvSpPr txBox="1"/>
+          <p:nvPr/>
+        </p:nvSpPr>
+        <p:spPr>
+          <a:xfrm>
+            <a:off x="9829554" y="952500"/>
+            <a:ext cx="1447763" cy="209550"/>
+          </a:xfrm>
+          <a:prstGeom prst="rect">
+            <a:avLst/>
+          </a:prstGeom>
+          <a:noFill/>
+        </p:spPr>
+        <p:txBody>
+          <a:bodyPr wrap="square" lIns="0" rIns="0" tIns="0" bIns="0">
+            <a:spAutoFit/>
+          </a:bodyPr>
+          <a:lstStyle/>
+          <a:p>
+            <a:pPr algn="l"/>
+            <a:r>
+              <a:rPr sz="1200" b="1" i="0" spc="300">
+                <a:solidFill>
+                  <a:srgbClr val="00D4FF"/>
+                </a:solidFill>
+                <a:latin typeface="PingFang SC"/>
+              </a:rPr>
+              <a:t>上线周期</a:t>
+            </a:r>
+          </a:p>
+        </p:txBody>
+      </p:sp>
+      <p:sp>
+        <p:nvSpPr>
+          <p:cNvPr id="20" name="TextBox 19"/>
+          <p:cNvSpPr txBox="1"/>
+          <p:nvPr/>
+        </p:nvSpPr>
+        <p:spPr>
+          <a:xfrm>
+            <a:off x="9829554" y="1371600"/>
+            <a:ext cx="1447763" cy="723900"/>
+          </a:xfrm>
+          <a:prstGeom prst="rect">
+            <a:avLst/>
+          </a:prstGeom>
+          <a:noFill/>
+        </p:spPr>
+        <p:txBody>
+          <a:bodyPr wrap="square" lIns="0" rIns="0" tIns="0" bIns="0">
+            <a:spAutoFit/>
+          </a:bodyPr>
+          <a:lstStyle/>
+          <a:p>
+            <a:pPr algn="l"/>
+            <a:r>
+              <a:rPr sz="4800" b="1" i="0">
+                <a:solidFill>
+                  <a:srgbClr val="FFFFFF"/>
+                </a:solidFill>
+                <a:latin typeface="PingFang SC"/>
+              </a:rPr>
+              <a:t>1/10</a:t>
+            </a:r>
+          </a:p>
+        </p:txBody>
+      </p:sp>
+      <p:sp>
+        <p:nvSpPr>
+          <p:cNvPr id="21" name="Rectangle 20"/>
+          <p:cNvSpPr/>
+          <p:nvPr/>
+        </p:nvSpPr>
+        <p:spPr>
+          <a:xfrm>
+            <a:off x="9829554" y="2209800"/>
+            <a:ext cx="571485" cy="28575"/>
+          </a:xfrm>
+          <a:prstGeom prst="rect">
+            <a:avLst/>
+          </a:prstGeom>
+          <a:solidFill>
+            <a:srgbClr val="7C5CFF"/>
+          </a:solidFill>
+          <a:ln>
+            <a:noFill/>
+          </a:ln>
+        </p:spPr>
+        <p:style>
+          <a:lnRef idx="1">
+            <a:schemeClr val="accent1"/>
+          </a:lnRef>
+          <a:fillRef idx="3">
+            <a:schemeClr val="accent1"/>
+          </a:fillRef>
+          <a:effectRef idx="2">
+            <a:schemeClr val="accent1"/>
+          </a:effectRef>
+          <a:fontRef idx="minor">
+            <a:schemeClr val="lt1"/>
+          </a:fontRef>
+        </p:style>
+        <p:txBody>
+          <a:bodyPr rtlCol="0" anchor="ctr"/>
+          <a:lstStyle/>
+          <a:p>
+            <a:pPr algn="ctr"/>
+          </a:p>
+        </p:txBody>
+      </p:sp>
+      <p:sp>
+        <p:nvSpPr>
+          <p:cNvPr id="22" name="TextBox 21"/>
+          <p:cNvSpPr txBox="1"/>
+          <p:nvPr/>
+        </p:nvSpPr>
+        <p:spPr>
+          <a:xfrm>
+            <a:off x="9829554" y="2343150"/>
+            <a:ext cx="1447763" cy="190500"/>
+          </a:xfrm>
+          <a:prstGeom prst="rect">
+            <a:avLst/>
+          </a:prstGeom>
+          <a:noFill/>
+        </p:spPr>
+        <p:txBody>
+          <a:bodyPr wrap="square" lIns="0" rIns="0" tIns="0" bIns="0">
+            <a:spAutoFit/>
+          </a:bodyPr>
+          <a:lstStyle/>
+          <a:p>
+            <a:pPr algn="l"/>
+            <a:r>
+              <a:rPr sz="1050" b="0" i="0">
+                <a:solidFill>
+                  <a:srgbClr val="BCC4D8"/>
+                </a:solidFill>
+                <a:latin typeface="PingFang SC"/>
+              </a:rPr>
+              <a:t>对比传统开发</a:t>
+            </a:r>
+          </a:p>
+        </p:txBody>
+      </p:sp>
+      <p:sp>
+        <p:nvSpPr>
+          <p:cNvPr id="23" name="Rounded Rectangle 22"/>
+          <p:cNvSpPr/>
+          <p:nvPr/>
+        </p:nvSpPr>
+        <p:spPr>
+          <a:xfrm>
+            <a:off x="9448563" y="3371850"/>
+            <a:ext cx="2209744" cy="2667000"/>
+          </a:xfrm>
+          <a:prstGeom prst="roundRect">
+            <a:avLst>
+              <a:gd name="adj" fmla="val 12068"/>
+            </a:avLst>
+          </a:prstGeom>
+          <a:solidFill>
+            <a:srgbClr val="FFFFFF"/>
+          </a:solidFill>
+          <a:ln w="12700">
+            <a:solidFill>
+              <a:srgbClr val="FFFFFF"/>
+            </a:solidFill>
+          </a:ln>
+        </p:spPr>
+        <p:style>
+          <a:lnRef idx="1">
+            <a:schemeClr val="accent1"/>
+          </a:lnRef>
+          <a:fillRef idx="3">
+            <a:schemeClr val="accent1"/>
+          </a:fillRef>
+          <a:effectRef idx="2">
+            <a:schemeClr val="accent1"/>
+          </a:effectRef>
+          <a:fontRef idx="minor">
+            <a:schemeClr val="lt1"/>
+          </a:fontRef>
+        </p:style>
+        <p:txBody>
+          <a:bodyPr rtlCol="0" anchor="ctr"/>
+          <a:lstStyle/>
+          <a:p>
+            <a:pPr algn="ctr"/>
+          </a:p>
+        </p:txBody>
+      </p:sp>
+      <p:sp>
+        <p:nvSpPr>
+          <p:cNvPr id="24" name="TextBox 23"/>
+          <p:cNvSpPr txBox="1"/>
+          <p:nvPr/>
+        </p:nvSpPr>
+        <p:spPr>
+          <a:xfrm>
+            <a:off x="9829554" y="3790950"/>
+            <a:ext cx="1447763" cy="209550"/>
+          </a:xfrm>
+          <a:prstGeom prst="rect">
+            <a:avLst/>
+          </a:prstGeom>
+          <a:noFill/>
+        </p:spPr>
+        <p:txBody>
+          <a:bodyPr wrap="square" lIns="0" rIns="0" tIns="0" bIns="0">
+            <a:spAutoFit/>
+          </a:bodyPr>
+          <a:lstStyle/>
+          <a:p>
+            <a:pPr algn="l"/>
+            <a:r>
+              <a:rPr sz="1200" b="1" i="0" spc="300">
+                <a:solidFill>
+                  <a:srgbClr val="00D4FF"/>
+                </a:solidFill>
+                <a:latin typeface="PingFang SC"/>
+              </a:rPr>
+              <a:t>客户留存</a:t>
+            </a:r>
+          </a:p>
+        </p:txBody>
+      </p:sp>
+      <p:sp>
+        <p:nvSpPr>
+          <p:cNvPr id="25" name="TextBox 24"/>
+          <p:cNvSpPr txBox="1"/>
+          <p:nvPr/>
+        </p:nvSpPr>
+        <p:spPr>
+          <a:xfrm>
+            <a:off x="9829554" y="4210050"/>
+            <a:ext cx="781030" cy="723900"/>
+          </a:xfrm>
+          <a:prstGeom prst="rect">
+            <a:avLst/>
+          </a:prstGeom>
+          <a:noFill/>
+        </p:spPr>
+        <p:txBody>
+          <a:bodyPr wrap="square" lIns="0" rIns="0" tIns="0" bIns="0">
+            <a:spAutoFit/>
+          </a:bodyPr>
+          <a:lstStyle/>
+          <a:p>
+            <a:pPr algn="l"/>
+            <a:r>
+              <a:rPr sz="4800" b="1" i="0">
+                <a:solidFill>
+                  <a:srgbClr val="FFFFFF"/>
+                </a:solidFill>
+                <a:latin typeface="PingFang SC"/>
+              </a:rPr>
+              <a:t>94</a:t>
+            </a:r>
+          </a:p>
+        </p:txBody>
+      </p:sp>
+      <p:sp>
+        <p:nvSpPr>
+          <p:cNvPr id="26" name="TextBox 25"/>
+          <p:cNvSpPr txBox="1"/>
+          <p:nvPr/>
+        </p:nvSpPr>
+        <p:spPr>
+          <a:xfrm>
+            <a:off x="10572485" y="4638675"/>
+            <a:ext cx="285742" cy="219075"/>
+          </a:xfrm>
+          <a:prstGeom prst="rect">
+            <a:avLst/>
+          </a:prstGeom>
+          <a:noFill/>
+        </p:spPr>
+        <p:txBody>
+          <a:bodyPr wrap="square" lIns="0" rIns="0" tIns="0" bIns="0">
+            <a:spAutoFit/>
+          </a:bodyPr>
+          <a:lstStyle/>
+          <a:p>
+            <a:pPr algn="l"/>
+            <a:r>
+              <a:rPr sz="1275" b="1" i="0">
+                <a:solidFill>
+                  <a:srgbClr val="BCC4D8"/>
+                </a:solidFill>
+                <a:latin typeface="PingFang SC"/>
+              </a:rPr>
+              <a:t>%</a:t>
+            </a:r>
+          </a:p>
+        </p:txBody>
+      </p:sp>
+      <p:sp>
+        <p:nvSpPr>
+          <p:cNvPr id="27" name="Rectangle 26"/>
+          <p:cNvSpPr/>
+          <p:nvPr/>
+        </p:nvSpPr>
+        <p:spPr>
+          <a:xfrm>
+            <a:off x="9829554" y="5048250"/>
+            <a:ext cx="571485" cy="28575"/>
+          </a:xfrm>
+          <a:prstGeom prst="rect">
+            <a:avLst/>
+          </a:prstGeom>
+          <a:solidFill>
+            <a:srgbClr val="7C5CFF"/>
+          </a:solidFill>
+          <a:ln>
+            <a:noFill/>
+          </a:ln>
+        </p:spPr>
+        <p:style>
+          <a:lnRef idx="1">
+            <a:schemeClr val="accent1"/>
+          </a:lnRef>
+          <a:fillRef idx="3">
+            <a:schemeClr val="accent1"/>
+          </a:fillRef>
+          <a:effectRef idx="2">
+            <a:schemeClr val="accent1"/>
+          </a:effectRef>
+          <a:fontRef idx="minor">
+            <a:schemeClr val="lt1"/>
+          </a:fontRef>
+        </p:style>
+        <p:txBody>
+          <a:bodyPr rtlCol="0" anchor="ctr"/>
+          <a:lstStyle/>
+          <a:p>
+            <a:pPr algn="ctr"/>
+          </a:p>
+        </p:txBody>
+      </p:sp>
+      <p:sp>
+        <p:nvSpPr>
+          <p:cNvPr id="28" name="TextBox 27"/>
+          <p:cNvSpPr txBox="1"/>
+          <p:nvPr/>
+        </p:nvSpPr>
+        <p:spPr>
+          <a:xfrm>
+            <a:off x="533386" y="6610350"/>
+            <a:ext cx="5714857" cy="190500"/>
+          </a:xfrm>
+          <a:prstGeom prst="rect">
+            <a:avLst/>
+          </a:prstGeom>
+          <a:noFill/>
+        </p:spPr>
+        <p:txBody>
+          <a:bodyPr wrap="square" lIns="0" rIns="0" tIns="0" bIns="0">
+            <a:spAutoFit/>
+          </a:bodyPr>
+          <a:lstStyle/>
+          <a:p>
+            <a:pPr algn="l"/>
+            <a:r>
+              <a:rPr sz="1050" b="0" i="0">
+                <a:solidFill>
+                  <a:srgbClr val="6B7392"/>
+                </a:solidFill>
+                <a:latin typeface="PingFang SC"/>
+              </a:rPr>
+              <a:t>Dify 企业介绍</a:t>
+            </a:r>
+          </a:p>
+        </p:txBody>
+      </p:sp>
+      <p:sp>
+        <p:nvSpPr>
+          <p:cNvPr id="29" name="TextBox 28"/>
+          <p:cNvSpPr txBox="1"/>
+          <p:nvPr/>
+        </p:nvSpPr>
+        <p:spPr>
+          <a:xfrm>
+            <a:off x="9753356" y="6610350"/>
+            <a:ext cx="1904952" cy="190500"/>
+          </a:xfrm>
+          <a:prstGeom prst="rect">
+            <a:avLst/>
+          </a:prstGeom>
+          <a:noFill/>
+        </p:spPr>
+        <p:txBody>
+          <a:bodyPr wrap="square" lIns="0" rIns="0" tIns="0" bIns="0">
+            <a:spAutoFit/>
+          </a:bodyPr>
+          <a:lstStyle/>
+          <a:p>
+            <a:pPr algn="r"/>
+            <a:r>
+              <a:rPr sz="1050" b="0" i="0">
+                <a:solidFill>
+                  <a:srgbClr val="6B7392"/>
+                </a:solidFill>
+                <a:latin typeface="SF Mono"/>
+              </a:rPr>
+              <a:t>05 / 08</a:t>
+            </a:r>
+          </a:p>
+        </p:txBody>
+      </p:sp>
     </p:spTree>
   </p:cSld>
   <p:clrMapOvr>
@@ -3328,6 +7221,14 @@
 <file path=ppt/slides/slide6.xml><?xml version="1.0" encoding="utf-8"?>
 <p:sld xmlns:a="http://schemas.openxmlformats.org/drawingml/2006/main" xmlns:p="http://schemas.openxmlformats.org/presentationml/2006/main" xmlns:r="http://schemas.openxmlformats.org/officeDocument/2006/relationships">
   <p:cSld>
+    <p:bg>
+      <p:bgPr>
+        <a:solidFill>
+          <a:srgbClr val="0A0E27"/>
+        </a:solidFill>
+        <a:effectLst/>
+      </p:bgPr>
+    </p:bg>
     <p:spTree>
       <p:nvGrpSpPr>
         <p:cNvPr id="1" name=""/>
@@ -3335,36 +7236,1638 @@
         <p:nvPr/>
       </p:nvGrpSpPr>
       <p:grpSpPr/>
-      <p:pic>
-        <p:nvPicPr>
-          <p:cNvPr id="2" name="Picture 1" descr="06-hero-top-demo.png"/>
-          <p:cNvPicPr>
-            <a:picLocks noChangeAspect="1"/>
-          </p:cNvPicPr>
-          <p:nvPr/>
-        </p:nvPicPr>
-        <p:blipFill>
-          <a:blip r:embed="rId2">
-            <a:extLst>
-              <a:ext uri="{96DAC541-7B7A-43D3-8B79-37D633B846F1}">
-                <asvg:svgBlip xmlns:asvg="http://schemas.microsoft.com/office/drawing/2016/SVG/main" r:embed="rId3"/>
-              </a:ext>
-            </a:extLst>
-          </a:blip>
-          <a:stretch>
-            <a:fillRect/>
-          </a:stretch>
-        </p:blipFill>
-        <p:spPr>
-          <a:xfrm>
-            <a:off x="0" y="0"/>
-            <a:ext cx="12191695" cy="6858000"/>
-          </a:xfrm>
-          <a:prstGeom prst="rect">
-            <a:avLst/>
-          </a:prstGeom>
-        </p:spPr>
-      </p:pic>
+      <p:sp>
+        <p:nvSpPr>
+          <p:cNvPr id="2" name="Rounded Rectangle 1"/>
+          <p:cNvSpPr/>
+          <p:nvPr/>
+        </p:nvSpPr>
+        <p:spPr>
+          <a:xfrm>
+            <a:off x="533386" y="533400"/>
+            <a:ext cx="11124921" cy="2286000"/>
+          </a:xfrm>
+          <a:prstGeom prst="roundRect">
+            <a:avLst>
+              <a:gd name="adj" fmla="val 11666"/>
+            </a:avLst>
+          </a:prstGeom>
+          <a:solidFill>
+            <a:srgbClr val="FFFFFF"/>
+          </a:solidFill>
+          <a:ln w="12700">
+            <a:solidFill>
+              <a:srgbClr val="FFFFFF"/>
+            </a:solidFill>
+          </a:ln>
+        </p:spPr>
+        <p:style>
+          <a:lnRef idx="1">
+            <a:schemeClr val="accent1"/>
+          </a:lnRef>
+          <a:fillRef idx="3">
+            <a:schemeClr val="accent1"/>
+          </a:fillRef>
+          <a:effectRef idx="2">
+            <a:schemeClr val="accent1"/>
+          </a:effectRef>
+          <a:fontRef idx="minor">
+            <a:schemeClr val="lt1"/>
+          </a:fontRef>
+        </p:style>
+        <p:txBody>
+          <a:bodyPr rtlCol="0" anchor="ctr"/>
+          <a:lstStyle/>
+          <a:p>
+            <a:pPr algn="ctr"/>
+          </a:p>
+        </p:txBody>
+      </p:sp>
+      <p:sp>
+        <p:nvSpPr>
+          <p:cNvPr id="3" name="TextBox 2"/>
+          <p:cNvSpPr txBox="1"/>
+          <p:nvPr/>
+        </p:nvSpPr>
+        <p:spPr>
+          <a:xfrm>
+            <a:off x="914377" y="952500"/>
+            <a:ext cx="10362940" cy="209550"/>
+          </a:xfrm>
+          <a:prstGeom prst="rect">
+            <a:avLst/>
+          </a:prstGeom>
+          <a:noFill/>
+        </p:spPr>
+        <p:txBody>
+          <a:bodyPr wrap="square" lIns="0" rIns="0" tIns="0" bIns="0">
+            <a:spAutoFit/>
+          </a:bodyPr>
+          <a:lstStyle/>
+          <a:p>
+            <a:pPr algn="l"/>
+            <a:r>
+              <a:rPr sz="1200" b="1" i="0" spc="300">
+                <a:solidFill>
+                  <a:srgbClr val="00D4FF"/>
+                </a:solidFill>
+                <a:latin typeface="PingFang SC"/>
+              </a:rPr>
+              <a:t>ARCHITECTURE</a:t>
+            </a:r>
+          </a:p>
+        </p:txBody>
+      </p:sp>
+      <p:sp>
+        <p:nvSpPr>
+          <p:cNvPr id="4" name="TextBox 3"/>
+          <p:cNvSpPr txBox="1"/>
+          <p:nvPr/>
+        </p:nvSpPr>
+        <p:spPr>
+          <a:xfrm>
+            <a:off x="914377" y="1276350"/>
+            <a:ext cx="10362940" cy="495300"/>
+          </a:xfrm>
+          <a:prstGeom prst="rect">
+            <a:avLst/>
+          </a:prstGeom>
+          <a:noFill/>
+        </p:spPr>
+        <p:txBody>
+          <a:bodyPr wrap="square" lIns="0" rIns="0" tIns="0" bIns="0">
+            <a:spAutoFit/>
+          </a:bodyPr>
+          <a:lstStyle/>
+          <a:p>
+            <a:pPr algn="l"/>
+            <a:r>
+              <a:rPr sz="3300" b="1" i="0">
+                <a:solidFill>
+                  <a:srgbClr val="FFFFFF"/>
+                </a:solidFill>
+                <a:latin typeface="PingFang SC"/>
+              </a:rPr>
+              <a:t>分层架构：从数据层到编排层</a:t>
+            </a:r>
+          </a:p>
+        </p:txBody>
+      </p:sp>
+      <p:sp>
+        <p:nvSpPr>
+          <p:cNvPr id="5" name="TextBox 4"/>
+          <p:cNvSpPr txBox="1"/>
+          <p:nvPr/>
+        </p:nvSpPr>
+        <p:spPr>
+          <a:xfrm>
+            <a:off x="914377" y="1943100"/>
+            <a:ext cx="10362940" cy="285750"/>
+          </a:xfrm>
+          <a:prstGeom prst="rect">
+            <a:avLst/>
+          </a:prstGeom>
+          <a:noFill/>
+        </p:spPr>
+        <p:txBody>
+          <a:bodyPr wrap="square" lIns="0" rIns="0" tIns="0" bIns="0">
+            <a:spAutoFit/>
+          </a:bodyPr>
+          <a:lstStyle/>
+          <a:p>
+            <a:pPr algn="l"/>
+            <a:r>
+              <a:rPr sz="1650" b="0" i="0">
+                <a:solidFill>
+                  <a:srgbClr val="BCC4D8"/>
+                </a:solidFill>
+                <a:latin typeface="PingFang SC"/>
+              </a:rPr>
+              <a:t>每一层都可独立替换，整体可观测</a:t>
+            </a:r>
+          </a:p>
+        </p:txBody>
+      </p:sp>
+      <p:sp>
+        <p:nvSpPr>
+          <p:cNvPr id="6" name="Rounded Rectangle 5"/>
+          <p:cNvSpPr/>
+          <p:nvPr/>
+        </p:nvSpPr>
+        <p:spPr>
+          <a:xfrm>
+            <a:off x="533386" y="3009900"/>
+            <a:ext cx="3581310" cy="3028950"/>
+          </a:xfrm>
+          <a:prstGeom prst="roundRect">
+            <a:avLst>
+              <a:gd name="adj" fmla="val 8805"/>
+            </a:avLst>
+          </a:prstGeom>
+          <a:solidFill>
+            <a:srgbClr val="FFFFFF"/>
+          </a:solidFill>
+          <a:ln w="12700">
+            <a:solidFill>
+              <a:srgbClr val="FFFFFF"/>
+            </a:solidFill>
+          </a:ln>
+        </p:spPr>
+        <p:style>
+          <a:lnRef idx="1">
+            <a:schemeClr val="accent1"/>
+          </a:lnRef>
+          <a:fillRef idx="3">
+            <a:schemeClr val="accent1"/>
+          </a:fillRef>
+          <a:effectRef idx="2">
+            <a:schemeClr val="accent1"/>
+          </a:effectRef>
+          <a:fontRef idx="minor">
+            <a:schemeClr val="lt1"/>
+          </a:fontRef>
+        </p:style>
+        <p:txBody>
+          <a:bodyPr rtlCol="0" anchor="ctr"/>
+          <a:lstStyle/>
+          <a:p>
+            <a:pPr algn="ctr"/>
+          </a:p>
+        </p:txBody>
+      </p:sp>
+      <p:sp>
+        <p:nvSpPr>
+          <p:cNvPr id="7" name="TextBox 6"/>
+          <p:cNvSpPr txBox="1"/>
+          <p:nvPr/>
+        </p:nvSpPr>
+        <p:spPr>
+          <a:xfrm>
+            <a:off x="914377" y="3562350"/>
+            <a:ext cx="2819329" cy="400050"/>
+          </a:xfrm>
+          <a:prstGeom prst="rect">
+            <a:avLst/>
+          </a:prstGeom>
+          <a:noFill/>
+        </p:spPr>
+        <p:txBody>
+          <a:bodyPr wrap="square" lIns="0" rIns="0" tIns="0" bIns="0">
+            <a:spAutoFit/>
+          </a:bodyPr>
+          <a:lstStyle/>
+          <a:p>
+            <a:pPr algn="l"/>
+            <a:r>
+              <a:rPr sz="2250" b="1" i="0">
+                <a:solidFill>
+                  <a:srgbClr val="FFFFFF"/>
+                </a:solidFill>
+                <a:latin typeface="PingFang SC"/>
+              </a:rPr>
+              <a:t>数据层</a:t>
+            </a:r>
+          </a:p>
+        </p:txBody>
+      </p:sp>
+      <p:sp>
+        <p:nvSpPr>
+          <p:cNvPr id="8" name="Rectangle 7"/>
+          <p:cNvSpPr/>
+          <p:nvPr/>
+        </p:nvSpPr>
+        <p:spPr>
+          <a:xfrm>
+            <a:off x="800079" y="4076700"/>
+            <a:ext cx="38099" cy="381000"/>
+          </a:xfrm>
+          <a:prstGeom prst="rect">
+            <a:avLst/>
+          </a:prstGeom>
+          <a:solidFill>
+            <a:srgbClr val="7C5CFF"/>
+          </a:solidFill>
+          <a:ln>
+            <a:noFill/>
+          </a:ln>
+        </p:spPr>
+        <p:style>
+          <a:lnRef idx="1">
+            <a:schemeClr val="accent1"/>
+          </a:lnRef>
+          <a:fillRef idx="3">
+            <a:schemeClr val="accent1"/>
+          </a:fillRef>
+          <a:effectRef idx="2">
+            <a:schemeClr val="accent1"/>
+          </a:effectRef>
+          <a:fontRef idx="minor">
+            <a:schemeClr val="lt1"/>
+          </a:fontRef>
+        </p:style>
+        <p:txBody>
+          <a:bodyPr rtlCol="0" anchor="ctr"/>
+          <a:lstStyle/>
+          <a:p>
+            <a:pPr algn="ctr"/>
+          </a:p>
+        </p:txBody>
+      </p:sp>
+      <p:sp>
+        <p:nvSpPr>
+          <p:cNvPr id="9" name="Rounded Rectangle 8"/>
+          <p:cNvSpPr/>
+          <p:nvPr/>
+        </p:nvSpPr>
+        <p:spPr>
+          <a:xfrm>
+            <a:off x="914377" y="4114800"/>
+            <a:ext cx="304792" cy="304800"/>
+          </a:xfrm>
+          <a:prstGeom prst="roundRect">
+            <a:avLst>
+              <a:gd name="adj" fmla="val 25000"/>
+            </a:avLst>
+          </a:prstGeom>
+          <a:solidFill>
+            <a:srgbClr val="7C5CFF"/>
+          </a:solidFill>
+          <a:ln>
+            <a:noFill/>
+          </a:ln>
+        </p:spPr>
+        <p:style>
+          <a:lnRef idx="1">
+            <a:schemeClr val="accent1"/>
+          </a:lnRef>
+          <a:fillRef idx="3">
+            <a:schemeClr val="accent1"/>
+          </a:fillRef>
+          <a:effectRef idx="2">
+            <a:schemeClr val="accent1"/>
+          </a:effectRef>
+          <a:fontRef idx="minor">
+            <a:schemeClr val="lt1"/>
+          </a:fontRef>
+        </p:style>
+        <p:txBody>
+          <a:bodyPr rtlCol="0" anchor="ctr"/>
+          <a:lstStyle/>
+          <a:p>
+            <a:pPr algn="ctr"/>
+          </a:p>
+        </p:txBody>
+      </p:sp>
+      <p:sp>
+        <p:nvSpPr>
+          <p:cNvPr id="10" name="TextBox 9"/>
+          <p:cNvSpPr txBox="1"/>
+          <p:nvPr/>
+        </p:nvSpPr>
+        <p:spPr>
+          <a:xfrm>
+            <a:off x="914377" y="4171950"/>
+            <a:ext cx="304792" cy="209550"/>
+          </a:xfrm>
+          <a:prstGeom prst="rect">
+            <a:avLst/>
+          </a:prstGeom>
+          <a:noFill/>
+        </p:spPr>
+        <p:txBody>
+          <a:bodyPr wrap="square" lIns="0" rIns="0" tIns="0" bIns="0">
+            <a:spAutoFit/>
+          </a:bodyPr>
+          <a:lstStyle/>
+          <a:p>
+            <a:pPr algn="ctr"/>
+            <a:r>
+              <a:rPr sz="1125" b="1" i="0">
+                <a:solidFill>
+                  <a:srgbClr val="0A0E27"/>
+                </a:solidFill>
+                <a:latin typeface="PingFang SC"/>
+              </a:rPr>
+              <a:t>01</a:t>
+            </a:r>
+          </a:p>
+        </p:txBody>
+      </p:sp>
+      <p:sp>
+        <p:nvSpPr>
+          <p:cNvPr id="11" name="TextBox 10"/>
+          <p:cNvSpPr txBox="1"/>
+          <p:nvPr/>
+        </p:nvSpPr>
+        <p:spPr>
+          <a:xfrm>
+            <a:off x="1371565" y="4152900"/>
+            <a:ext cx="2362140" cy="228600"/>
+          </a:xfrm>
+          <a:prstGeom prst="rect">
+            <a:avLst/>
+          </a:prstGeom>
+          <a:noFill/>
+        </p:spPr>
+        <p:txBody>
+          <a:bodyPr wrap="square" lIns="0" rIns="0" tIns="0" bIns="0">
+            <a:spAutoFit/>
+          </a:bodyPr>
+          <a:lstStyle/>
+          <a:p>
+            <a:pPr algn="l"/>
+            <a:r>
+              <a:rPr sz="1350" b="1" i="0">
+                <a:solidFill>
+                  <a:srgbClr val="FFFFFF"/>
+                </a:solidFill>
+                <a:latin typeface="PingFang SC"/>
+              </a:rPr>
+              <a:t>向量库</a:t>
+            </a:r>
+          </a:p>
+        </p:txBody>
+      </p:sp>
+      <p:sp>
+        <p:nvSpPr>
+          <p:cNvPr id="12" name="Rounded Rectangle 11"/>
+          <p:cNvSpPr/>
+          <p:nvPr/>
+        </p:nvSpPr>
+        <p:spPr>
+          <a:xfrm>
+            <a:off x="914377" y="4572000"/>
+            <a:ext cx="304792" cy="304800"/>
+          </a:xfrm>
+          <a:prstGeom prst="roundRect">
+            <a:avLst>
+              <a:gd name="adj" fmla="val 25000"/>
+            </a:avLst>
+          </a:prstGeom>
+          <a:solidFill>
+            <a:srgbClr val="7C5CFF"/>
+          </a:solidFill>
+          <a:ln>
+            <a:noFill/>
+          </a:ln>
+        </p:spPr>
+        <p:style>
+          <a:lnRef idx="1">
+            <a:schemeClr val="accent1"/>
+          </a:lnRef>
+          <a:fillRef idx="3">
+            <a:schemeClr val="accent1"/>
+          </a:fillRef>
+          <a:effectRef idx="2">
+            <a:schemeClr val="accent1"/>
+          </a:effectRef>
+          <a:fontRef idx="minor">
+            <a:schemeClr val="lt1"/>
+          </a:fontRef>
+        </p:style>
+        <p:txBody>
+          <a:bodyPr rtlCol="0" anchor="ctr"/>
+          <a:lstStyle/>
+          <a:p>
+            <a:pPr algn="ctr"/>
+          </a:p>
+        </p:txBody>
+      </p:sp>
+      <p:sp>
+        <p:nvSpPr>
+          <p:cNvPr id="13" name="TextBox 12"/>
+          <p:cNvSpPr txBox="1"/>
+          <p:nvPr/>
+        </p:nvSpPr>
+        <p:spPr>
+          <a:xfrm>
+            <a:off x="914377" y="4629150"/>
+            <a:ext cx="304792" cy="209550"/>
+          </a:xfrm>
+          <a:prstGeom prst="rect">
+            <a:avLst/>
+          </a:prstGeom>
+          <a:noFill/>
+        </p:spPr>
+        <p:txBody>
+          <a:bodyPr wrap="square" lIns="0" rIns="0" tIns="0" bIns="0">
+            <a:spAutoFit/>
+          </a:bodyPr>
+          <a:lstStyle/>
+          <a:p>
+            <a:pPr algn="ctr"/>
+            <a:r>
+              <a:rPr sz="1125" b="1" i="0">
+                <a:solidFill>
+                  <a:srgbClr val="0A0E27"/>
+                </a:solidFill>
+                <a:latin typeface="PingFang SC"/>
+              </a:rPr>
+              <a:t>02</a:t>
+            </a:r>
+          </a:p>
+        </p:txBody>
+      </p:sp>
+      <p:sp>
+        <p:nvSpPr>
+          <p:cNvPr id="14" name="TextBox 13"/>
+          <p:cNvSpPr txBox="1"/>
+          <p:nvPr/>
+        </p:nvSpPr>
+        <p:spPr>
+          <a:xfrm>
+            <a:off x="1371565" y="4610100"/>
+            <a:ext cx="2362140" cy="228600"/>
+          </a:xfrm>
+          <a:prstGeom prst="rect">
+            <a:avLst/>
+          </a:prstGeom>
+          <a:noFill/>
+        </p:spPr>
+        <p:txBody>
+          <a:bodyPr wrap="square" lIns="0" rIns="0" tIns="0" bIns="0">
+            <a:spAutoFit/>
+          </a:bodyPr>
+          <a:lstStyle/>
+          <a:p>
+            <a:pPr algn="l"/>
+            <a:r>
+              <a:rPr sz="1350" b="1" i="0">
+                <a:solidFill>
+                  <a:srgbClr val="BCC4D8"/>
+                </a:solidFill>
+                <a:latin typeface="PingFang SC"/>
+              </a:rPr>
+              <a:t>对象存储</a:t>
+            </a:r>
+          </a:p>
+        </p:txBody>
+      </p:sp>
+      <p:sp>
+        <p:nvSpPr>
+          <p:cNvPr id="15" name="Rounded Rectangle 14"/>
+          <p:cNvSpPr/>
+          <p:nvPr/>
+        </p:nvSpPr>
+        <p:spPr>
+          <a:xfrm>
+            <a:off x="914377" y="5029200"/>
+            <a:ext cx="304792" cy="304800"/>
+          </a:xfrm>
+          <a:prstGeom prst="roundRect">
+            <a:avLst>
+              <a:gd name="adj" fmla="val 25000"/>
+            </a:avLst>
+          </a:prstGeom>
+          <a:solidFill>
+            <a:srgbClr val="7C5CFF"/>
+          </a:solidFill>
+          <a:ln>
+            <a:noFill/>
+          </a:ln>
+        </p:spPr>
+        <p:style>
+          <a:lnRef idx="1">
+            <a:schemeClr val="accent1"/>
+          </a:lnRef>
+          <a:fillRef idx="3">
+            <a:schemeClr val="accent1"/>
+          </a:fillRef>
+          <a:effectRef idx="2">
+            <a:schemeClr val="accent1"/>
+          </a:effectRef>
+          <a:fontRef idx="minor">
+            <a:schemeClr val="lt1"/>
+          </a:fontRef>
+        </p:style>
+        <p:txBody>
+          <a:bodyPr rtlCol="0" anchor="ctr"/>
+          <a:lstStyle/>
+          <a:p>
+            <a:pPr algn="ctr"/>
+          </a:p>
+        </p:txBody>
+      </p:sp>
+      <p:sp>
+        <p:nvSpPr>
+          <p:cNvPr id="16" name="TextBox 15"/>
+          <p:cNvSpPr txBox="1"/>
+          <p:nvPr/>
+        </p:nvSpPr>
+        <p:spPr>
+          <a:xfrm>
+            <a:off x="914377" y="5086350"/>
+            <a:ext cx="304792" cy="209550"/>
+          </a:xfrm>
+          <a:prstGeom prst="rect">
+            <a:avLst/>
+          </a:prstGeom>
+          <a:noFill/>
+        </p:spPr>
+        <p:txBody>
+          <a:bodyPr wrap="square" lIns="0" rIns="0" tIns="0" bIns="0">
+            <a:spAutoFit/>
+          </a:bodyPr>
+          <a:lstStyle/>
+          <a:p>
+            <a:pPr algn="ctr"/>
+            <a:r>
+              <a:rPr sz="1125" b="1" i="0">
+                <a:solidFill>
+                  <a:srgbClr val="0A0E27"/>
+                </a:solidFill>
+                <a:latin typeface="PingFang SC"/>
+              </a:rPr>
+              <a:t>03</a:t>
+            </a:r>
+          </a:p>
+        </p:txBody>
+      </p:sp>
+      <p:sp>
+        <p:nvSpPr>
+          <p:cNvPr id="17" name="TextBox 16"/>
+          <p:cNvSpPr txBox="1"/>
+          <p:nvPr/>
+        </p:nvSpPr>
+        <p:spPr>
+          <a:xfrm>
+            <a:off x="1371565" y="5067300"/>
+            <a:ext cx="2362140" cy="228600"/>
+          </a:xfrm>
+          <a:prstGeom prst="rect">
+            <a:avLst/>
+          </a:prstGeom>
+          <a:noFill/>
+        </p:spPr>
+        <p:txBody>
+          <a:bodyPr wrap="square" lIns="0" rIns="0" tIns="0" bIns="0">
+            <a:spAutoFit/>
+          </a:bodyPr>
+          <a:lstStyle/>
+          <a:p>
+            <a:pPr algn="l"/>
+            <a:r>
+              <a:rPr sz="1350" b="1" i="0">
+                <a:solidFill>
+                  <a:srgbClr val="BCC4D8"/>
+                </a:solidFill>
+                <a:latin typeface="PingFang SC"/>
+              </a:rPr>
+              <a:t>审计日志</a:t>
+            </a:r>
+          </a:p>
+        </p:txBody>
+      </p:sp>
+      <p:sp>
+        <p:nvSpPr>
+          <p:cNvPr id="18" name="Rounded Rectangle 17"/>
+          <p:cNvSpPr/>
+          <p:nvPr/>
+        </p:nvSpPr>
+        <p:spPr>
+          <a:xfrm>
+            <a:off x="4305192" y="3009900"/>
+            <a:ext cx="3581310" cy="3028950"/>
+          </a:xfrm>
+          <a:prstGeom prst="roundRect">
+            <a:avLst>
+              <a:gd name="adj" fmla="val 8805"/>
+            </a:avLst>
+          </a:prstGeom>
+          <a:solidFill>
+            <a:srgbClr val="FFFFFF"/>
+          </a:solidFill>
+          <a:ln w="12700">
+            <a:solidFill>
+              <a:srgbClr val="FFFFFF"/>
+            </a:solidFill>
+          </a:ln>
+        </p:spPr>
+        <p:style>
+          <a:lnRef idx="1">
+            <a:schemeClr val="accent1"/>
+          </a:lnRef>
+          <a:fillRef idx="3">
+            <a:schemeClr val="accent1"/>
+          </a:fillRef>
+          <a:effectRef idx="2">
+            <a:schemeClr val="accent1"/>
+          </a:effectRef>
+          <a:fontRef idx="minor">
+            <a:schemeClr val="lt1"/>
+          </a:fontRef>
+        </p:style>
+        <p:txBody>
+          <a:bodyPr rtlCol="0" anchor="ctr"/>
+          <a:lstStyle/>
+          <a:p>
+            <a:pPr algn="ctr"/>
+          </a:p>
+        </p:txBody>
+      </p:sp>
+      <p:sp>
+        <p:nvSpPr>
+          <p:cNvPr id="19" name="TextBox 18"/>
+          <p:cNvSpPr txBox="1"/>
+          <p:nvPr/>
+        </p:nvSpPr>
+        <p:spPr>
+          <a:xfrm>
+            <a:off x="4686182" y="3562350"/>
+            <a:ext cx="2819329" cy="400050"/>
+          </a:xfrm>
+          <a:prstGeom prst="rect">
+            <a:avLst/>
+          </a:prstGeom>
+          <a:noFill/>
+        </p:spPr>
+        <p:txBody>
+          <a:bodyPr wrap="square" lIns="0" rIns="0" tIns="0" bIns="0">
+            <a:spAutoFit/>
+          </a:bodyPr>
+          <a:lstStyle/>
+          <a:p>
+            <a:pPr algn="l"/>
+            <a:r>
+              <a:rPr sz="2250" b="1" i="0">
+                <a:solidFill>
+                  <a:srgbClr val="FFFFFF"/>
+                </a:solidFill>
+                <a:latin typeface="PingFang SC"/>
+              </a:rPr>
+              <a:t>能力层</a:t>
+            </a:r>
+          </a:p>
+        </p:txBody>
+      </p:sp>
+      <p:sp>
+        <p:nvSpPr>
+          <p:cNvPr id="20" name="Rectangle 19"/>
+          <p:cNvSpPr/>
+          <p:nvPr/>
+        </p:nvSpPr>
+        <p:spPr>
+          <a:xfrm>
+            <a:off x="4571885" y="4076700"/>
+            <a:ext cx="38099" cy="381000"/>
+          </a:xfrm>
+          <a:prstGeom prst="rect">
+            <a:avLst/>
+          </a:prstGeom>
+          <a:solidFill>
+            <a:srgbClr val="7C5CFF"/>
+          </a:solidFill>
+          <a:ln>
+            <a:noFill/>
+          </a:ln>
+        </p:spPr>
+        <p:style>
+          <a:lnRef idx="1">
+            <a:schemeClr val="accent1"/>
+          </a:lnRef>
+          <a:fillRef idx="3">
+            <a:schemeClr val="accent1"/>
+          </a:fillRef>
+          <a:effectRef idx="2">
+            <a:schemeClr val="accent1"/>
+          </a:effectRef>
+          <a:fontRef idx="minor">
+            <a:schemeClr val="lt1"/>
+          </a:fontRef>
+        </p:style>
+        <p:txBody>
+          <a:bodyPr rtlCol="0" anchor="ctr"/>
+          <a:lstStyle/>
+          <a:p>
+            <a:pPr algn="ctr"/>
+          </a:p>
+        </p:txBody>
+      </p:sp>
+      <p:sp>
+        <p:nvSpPr>
+          <p:cNvPr id="21" name="Rounded Rectangle 20"/>
+          <p:cNvSpPr/>
+          <p:nvPr/>
+        </p:nvSpPr>
+        <p:spPr>
+          <a:xfrm>
+            <a:off x="4686182" y="4114800"/>
+            <a:ext cx="304792" cy="304800"/>
+          </a:xfrm>
+          <a:prstGeom prst="roundRect">
+            <a:avLst>
+              <a:gd name="adj" fmla="val 25000"/>
+            </a:avLst>
+          </a:prstGeom>
+          <a:solidFill>
+            <a:srgbClr val="7C5CFF"/>
+          </a:solidFill>
+          <a:ln>
+            <a:noFill/>
+          </a:ln>
+        </p:spPr>
+        <p:style>
+          <a:lnRef idx="1">
+            <a:schemeClr val="accent1"/>
+          </a:lnRef>
+          <a:fillRef idx="3">
+            <a:schemeClr val="accent1"/>
+          </a:fillRef>
+          <a:effectRef idx="2">
+            <a:schemeClr val="accent1"/>
+          </a:effectRef>
+          <a:fontRef idx="minor">
+            <a:schemeClr val="lt1"/>
+          </a:fontRef>
+        </p:style>
+        <p:txBody>
+          <a:bodyPr rtlCol="0" anchor="ctr"/>
+          <a:lstStyle/>
+          <a:p>
+            <a:pPr algn="ctr"/>
+          </a:p>
+        </p:txBody>
+      </p:sp>
+      <p:sp>
+        <p:nvSpPr>
+          <p:cNvPr id="22" name="TextBox 21"/>
+          <p:cNvSpPr txBox="1"/>
+          <p:nvPr/>
+        </p:nvSpPr>
+        <p:spPr>
+          <a:xfrm>
+            <a:off x="4686182" y="4171950"/>
+            <a:ext cx="304792" cy="209550"/>
+          </a:xfrm>
+          <a:prstGeom prst="rect">
+            <a:avLst/>
+          </a:prstGeom>
+          <a:noFill/>
+        </p:spPr>
+        <p:txBody>
+          <a:bodyPr wrap="square" lIns="0" rIns="0" tIns="0" bIns="0">
+            <a:spAutoFit/>
+          </a:bodyPr>
+          <a:lstStyle/>
+          <a:p>
+            <a:pPr algn="ctr"/>
+            <a:r>
+              <a:rPr sz="1125" b="1" i="0">
+                <a:solidFill>
+                  <a:srgbClr val="0A0E27"/>
+                </a:solidFill>
+                <a:latin typeface="PingFang SC"/>
+              </a:rPr>
+              <a:t>01</a:t>
+            </a:r>
+          </a:p>
+        </p:txBody>
+      </p:sp>
+      <p:sp>
+        <p:nvSpPr>
+          <p:cNvPr id="23" name="TextBox 22"/>
+          <p:cNvSpPr txBox="1"/>
+          <p:nvPr/>
+        </p:nvSpPr>
+        <p:spPr>
+          <a:xfrm>
+            <a:off x="5143371" y="4152900"/>
+            <a:ext cx="2362140" cy="228600"/>
+          </a:xfrm>
+          <a:prstGeom prst="rect">
+            <a:avLst/>
+          </a:prstGeom>
+          <a:noFill/>
+        </p:spPr>
+        <p:txBody>
+          <a:bodyPr wrap="square" lIns="0" rIns="0" tIns="0" bIns="0">
+            <a:spAutoFit/>
+          </a:bodyPr>
+          <a:lstStyle/>
+          <a:p>
+            <a:pPr algn="l"/>
+            <a:r>
+              <a:rPr sz="1350" b="1" i="0">
+                <a:solidFill>
+                  <a:srgbClr val="FFFFFF"/>
+                </a:solidFill>
+                <a:latin typeface="PingFang SC"/>
+              </a:rPr>
+              <a:t>模型路由</a:t>
+            </a:r>
+          </a:p>
+        </p:txBody>
+      </p:sp>
+      <p:sp>
+        <p:nvSpPr>
+          <p:cNvPr id="24" name="Rounded Rectangle 23"/>
+          <p:cNvSpPr/>
+          <p:nvPr/>
+        </p:nvSpPr>
+        <p:spPr>
+          <a:xfrm>
+            <a:off x="4686182" y="4572000"/>
+            <a:ext cx="304792" cy="304800"/>
+          </a:xfrm>
+          <a:prstGeom prst="roundRect">
+            <a:avLst>
+              <a:gd name="adj" fmla="val 25000"/>
+            </a:avLst>
+          </a:prstGeom>
+          <a:solidFill>
+            <a:srgbClr val="7C5CFF"/>
+          </a:solidFill>
+          <a:ln>
+            <a:noFill/>
+          </a:ln>
+        </p:spPr>
+        <p:style>
+          <a:lnRef idx="1">
+            <a:schemeClr val="accent1"/>
+          </a:lnRef>
+          <a:fillRef idx="3">
+            <a:schemeClr val="accent1"/>
+          </a:fillRef>
+          <a:effectRef idx="2">
+            <a:schemeClr val="accent1"/>
+          </a:effectRef>
+          <a:fontRef idx="minor">
+            <a:schemeClr val="lt1"/>
+          </a:fontRef>
+        </p:style>
+        <p:txBody>
+          <a:bodyPr rtlCol="0" anchor="ctr"/>
+          <a:lstStyle/>
+          <a:p>
+            <a:pPr algn="ctr"/>
+          </a:p>
+        </p:txBody>
+      </p:sp>
+      <p:sp>
+        <p:nvSpPr>
+          <p:cNvPr id="25" name="TextBox 24"/>
+          <p:cNvSpPr txBox="1"/>
+          <p:nvPr/>
+        </p:nvSpPr>
+        <p:spPr>
+          <a:xfrm>
+            <a:off x="4686182" y="4629150"/>
+            <a:ext cx="304792" cy="209550"/>
+          </a:xfrm>
+          <a:prstGeom prst="rect">
+            <a:avLst/>
+          </a:prstGeom>
+          <a:noFill/>
+        </p:spPr>
+        <p:txBody>
+          <a:bodyPr wrap="square" lIns="0" rIns="0" tIns="0" bIns="0">
+            <a:spAutoFit/>
+          </a:bodyPr>
+          <a:lstStyle/>
+          <a:p>
+            <a:pPr algn="ctr"/>
+            <a:r>
+              <a:rPr sz="1125" b="1" i="0">
+                <a:solidFill>
+                  <a:srgbClr val="0A0E27"/>
+                </a:solidFill>
+                <a:latin typeface="PingFang SC"/>
+              </a:rPr>
+              <a:t>02</a:t>
+            </a:r>
+          </a:p>
+        </p:txBody>
+      </p:sp>
+      <p:sp>
+        <p:nvSpPr>
+          <p:cNvPr id="26" name="TextBox 25"/>
+          <p:cNvSpPr txBox="1"/>
+          <p:nvPr/>
+        </p:nvSpPr>
+        <p:spPr>
+          <a:xfrm>
+            <a:off x="5143371" y="4610100"/>
+            <a:ext cx="2362140" cy="228600"/>
+          </a:xfrm>
+          <a:prstGeom prst="rect">
+            <a:avLst/>
+          </a:prstGeom>
+          <a:noFill/>
+        </p:spPr>
+        <p:txBody>
+          <a:bodyPr wrap="square" lIns="0" rIns="0" tIns="0" bIns="0">
+            <a:spAutoFit/>
+          </a:bodyPr>
+          <a:lstStyle/>
+          <a:p>
+            <a:pPr algn="l"/>
+            <a:r>
+              <a:rPr sz="1350" b="1" i="0">
+                <a:solidFill>
+                  <a:srgbClr val="BCC4D8"/>
+                </a:solidFill>
+                <a:latin typeface="PingFang SC"/>
+              </a:rPr>
+              <a:t>工具调用</a:t>
+            </a:r>
+          </a:p>
+        </p:txBody>
+      </p:sp>
+      <p:sp>
+        <p:nvSpPr>
+          <p:cNvPr id="27" name="Rounded Rectangle 26"/>
+          <p:cNvSpPr/>
+          <p:nvPr/>
+        </p:nvSpPr>
+        <p:spPr>
+          <a:xfrm>
+            <a:off x="4686182" y="5029200"/>
+            <a:ext cx="304792" cy="304800"/>
+          </a:xfrm>
+          <a:prstGeom prst="roundRect">
+            <a:avLst>
+              <a:gd name="adj" fmla="val 25000"/>
+            </a:avLst>
+          </a:prstGeom>
+          <a:solidFill>
+            <a:srgbClr val="7C5CFF"/>
+          </a:solidFill>
+          <a:ln>
+            <a:noFill/>
+          </a:ln>
+        </p:spPr>
+        <p:style>
+          <a:lnRef idx="1">
+            <a:schemeClr val="accent1"/>
+          </a:lnRef>
+          <a:fillRef idx="3">
+            <a:schemeClr val="accent1"/>
+          </a:fillRef>
+          <a:effectRef idx="2">
+            <a:schemeClr val="accent1"/>
+          </a:effectRef>
+          <a:fontRef idx="minor">
+            <a:schemeClr val="lt1"/>
+          </a:fontRef>
+        </p:style>
+        <p:txBody>
+          <a:bodyPr rtlCol="0" anchor="ctr"/>
+          <a:lstStyle/>
+          <a:p>
+            <a:pPr algn="ctr"/>
+          </a:p>
+        </p:txBody>
+      </p:sp>
+      <p:sp>
+        <p:nvSpPr>
+          <p:cNvPr id="28" name="TextBox 27"/>
+          <p:cNvSpPr txBox="1"/>
+          <p:nvPr/>
+        </p:nvSpPr>
+        <p:spPr>
+          <a:xfrm>
+            <a:off x="4686182" y="5086350"/>
+            <a:ext cx="304792" cy="209550"/>
+          </a:xfrm>
+          <a:prstGeom prst="rect">
+            <a:avLst/>
+          </a:prstGeom>
+          <a:noFill/>
+        </p:spPr>
+        <p:txBody>
+          <a:bodyPr wrap="square" lIns="0" rIns="0" tIns="0" bIns="0">
+            <a:spAutoFit/>
+          </a:bodyPr>
+          <a:lstStyle/>
+          <a:p>
+            <a:pPr algn="ctr"/>
+            <a:r>
+              <a:rPr sz="1125" b="1" i="0">
+                <a:solidFill>
+                  <a:srgbClr val="0A0E27"/>
+                </a:solidFill>
+                <a:latin typeface="PingFang SC"/>
+              </a:rPr>
+              <a:t>03</a:t>
+            </a:r>
+          </a:p>
+        </p:txBody>
+      </p:sp>
+      <p:sp>
+        <p:nvSpPr>
+          <p:cNvPr id="29" name="TextBox 28"/>
+          <p:cNvSpPr txBox="1"/>
+          <p:nvPr/>
+        </p:nvSpPr>
+        <p:spPr>
+          <a:xfrm>
+            <a:off x="5143371" y="5067300"/>
+            <a:ext cx="2362140" cy="228600"/>
+          </a:xfrm>
+          <a:prstGeom prst="rect">
+            <a:avLst/>
+          </a:prstGeom>
+          <a:noFill/>
+        </p:spPr>
+        <p:txBody>
+          <a:bodyPr wrap="square" lIns="0" rIns="0" tIns="0" bIns="0">
+            <a:spAutoFit/>
+          </a:bodyPr>
+          <a:lstStyle/>
+          <a:p>
+            <a:pPr algn="l"/>
+            <a:r>
+              <a:rPr sz="1350" b="1" i="0">
+                <a:solidFill>
+                  <a:srgbClr val="BCC4D8"/>
+                </a:solidFill>
+                <a:latin typeface="PingFang SC"/>
+              </a:rPr>
+              <a:t>知识检索</a:t>
+            </a:r>
+          </a:p>
+        </p:txBody>
+      </p:sp>
+      <p:sp>
+        <p:nvSpPr>
+          <p:cNvPr id="30" name="Rounded Rectangle 29"/>
+          <p:cNvSpPr/>
+          <p:nvPr/>
+        </p:nvSpPr>
+        <p:spPr>
+          <a:xfrm>
+            <a:off x="8076997" y="3009900"/>
+            <a:ext cx="3581310" cy="3028950"/>
+          </a:xfrm>
+          <a:prstGeom prst="roundRect">
+            <a:avLst>
+              <a:gd name="adj" fmla="val 8805"/>
+            </a:avLst>
+          </a:prstGeom>
+          <a:solidFill>
+            <a:srgbClr val="FFFFFF"/>
+          </a:solidFill>
+          <a:ln w="12700">
+            <a:solidFill>
+              <a:srgbClr val="FFFFFF"/>
+            </a:solidFill>
+          </a:ln>
+        </p:spPr>
+        <p:style>
+          <a:lnRef idx="1">
+            <a:schemeClr val="accent1"/>
+          </a:lnRef>
+          <a:fillRef idx="3">
+            <a:schemeClr val="accent1"/>
+          </a:fillRef>
+          <a:effectRef idx="2">
+            <a:schemeClr val="accent1"/>
+          </a:effectRef>
+          <a:fontRef idx="minor">
+            <a:schemeClr val="lt1"/>
+          </a:fontRef>
+        </p:style>
+        <p:txBody>
+          <a:bodyPr rtlCol="0" anchor="ctr"/>
+          <a:lstStyle/>
+          <a:p>
+            <a:pPr algn="ctr"/>
+          </a:p>
+        </p:txBody>
+      </p:sp>
+      <p:sp>
+        <p:nvSpPr>
+          <p:cNvPr id="31" name="TextBox 30"/>
+          <p:cNvSpPr txBox="1"/>
+          <p:nvPr/>
+        </p:nvSpPr>
+        <p:spPr>
+          <a:xfrm>
+            <a:off x="8457988" y="3562350"/>
+            <a:ext cx="2819329" cy="400050"/>
+          </a:xfrm>
+          <a:prstGeom prst="rect">
+            <a:avLst/>
+          </a:prstGeom>
+          <a:noFill/>
+        </p:spPr>
+        <p:txBody>
+          <a:bodyPr wrap="square" lIns="0" rIns="0" tIns="0" bIns="0">
+            <a:spAutoFit/>
+          </a:bodyPr>
+          <a:lstStyle/>
+          <a:p>
+            <a:pPr algn="l"/>
+            <a:r>
+              <a:rPr sz="2250" b="1" i="0">
+                <a:solidFill>
+                  <a:srgbClr val="FFFFFF"/>
+                </a:solidFill>
+                <a:latin typeface="PingFang SC"/>
+              </a:rPr>
+              <a:t>编排层</a:t>
+            </a:r>
+          </a:p>
+        </p:txBody>
+      </p:sp>
+      <p:sp>
+        <p:nvSpPr>
+          <p:cNvPr id="32" name="Rectangle 31"/>
+          <p:cNvSpPr/>
+          <p:nvPr/>
+        </p:nvSpPr>
+        <p:spPr>
+          <a:xfrm>
+            <a:off x="8343691" y="4076700"/>
+            <a:ext cx="38099" cy="381000"/>
+          </a:xfrm>
+          <a:prstGeom prst="rect">
+            <a:avLst/>
+          </a:prstGeom>
+          <a:solidFill>
+            <a:srgbClr val="7C5CFF"/>
+          </a:solidFill>
+          <a:ln>
+            <a:noFill/>
+          </a:ln>
+        </p:spPr>
+        <p:style>
+          <a:lnRef idx="1">
+            <a:schemeClr val="accent1"/>
+          </a:lnRef>
+          <a:fillRef idx="3">
+            <a:schemeClr val="accent1"/>
+          </a:fillRef>
+          <a:effectRef idx="2">
+            <a:schemeClr val="accent1"/>
+          </a:effectRef>
+          <a:fontRef idx="minor">
+            <a:schemeClr val="lt1"/>
+          </a:fontRef>
+        </p:style>
+        <p:txBody>
+          <a:bodyPr rtlCol="0" anchor="ctr"/>
+          <a:lstStyle/>
+          <a:p>
+            <a:pPr algn="ctr"/>
+          </a:p>
+        </p:txBody>
+      </p:sp>
+      <p:sp>
+        <p:nvSpPr>
+          <p:cNvPr id="33" name="Rounded Rectangle 32"/>
+          <p:cNvSpPr/>
+          <p:nvPr/>
+        </p:nvSpPr>
+        <p:spPr>
+          <a:xfrm>
+            <a:off x="8457988" y="4114800"/>
+            <a:ext cx="304792" cy="304800"/>
+          </a:xfrm>
+          <a:prstGeom prst="roundRect">
+            <a:avLst>
+              <a:gd name="adj" fmla="val 25000"/>
+            </a:avLst>
+          </a:prstGeom>
+          <a:solidFill>
+            <a:srgbClr val="7C5CFF"/>
+          </a:solidFill>
+          <a:ln>
+            <a:noFill/>
+          </a:ln>
+        </p:spPr>
+        <p:style>
+          <a:lnRef idx="1">
+            <a:schemeClr val="accent1"/>
+          </a:lnRef>
+          <a:fillRef idx="3">
+            <a:schemeClr val="accent1"/>
+          </a:fillRef>
+          <a:effectRef idx="2">
+            <a:schemeClr val="accent1"/>
+          </a:effectRef>
+          <a:fontRef idx="minor">
+            <a:schemeClr val="lt1"/>
+          </a:fontRef>
+        </p:style>
+        <p:txBody>
+          <a:bodyPr rtlCol="0" anchor="ctr"/>
+          <a:lstStyle/>
+          <a:p>
+            <a:pPr algn="ctr"/>
+          </a:p>
+        </p:txBody>
+      </p:sp>
+      <p:sp>
+        <p:nvSpPr>
+          <p:cNvPr id="34" name="TextBox 33"/>
+          <p:cNvSpPr txBox="1"/>
+          <p:nvPr/>
+        </p:nvSpPr>
+        <p:spPr>
+          <a:xfrm>
+            <a:off x="8457988" y="4171950"/>
+            <a:ext cx="304792" cy="209550"/>
+          </a:xfrm>
+          <a:prstGeom prst="rect">
+            <a:avLst/>
+          </a:prstGeom>
+          <a:noFill/>
+        </p:spPr>
+        <p:txBody>
+          <a:bodyPr wrap="square" lIns="0" rIns="0" tIns="0" bIns="0">
+            <a:spAutoFit/>
+          </a:bodyPr>
+          <a:lstStyle/>
+          <a:p>
+            <a:pPr algn="ctr"/>
+            <a:r>
+              <a:rPr sz="1125" b="1" i="0">
+                <a:solidFill>
+                  <a:srgbClr val="0A0E27"/>
+                </a:solidFill>
+                <a:latin typeface="PingFang SC"/>
+              </a:rPr>
+              <a:t>01</a:t>
+            </a:r>
+          </a:p>
+        </p:txBody>
+      </p:sp>
+      <p:sp>
+        <p:nvSpPr>
+          <p:cNvPr id="35" name="TextBox 34"/>
+          <p:cNvSpPr txBox="1"/>
+          <p:nvPr/>
+        </p:nvSpPr>
+        <p:spPr>
+          <a:xfrm>
+            <a:off x="8915176" y="4152900"/>
+            <a:ext cx="2362140" cy="228600"/>
+          </a:xfrm>
+          <a:prstGeom prst="rect">
+            <a:avLst/>
+          </a:prstGeom>
+          <a:noFill/>
+        </p:spPr>
+        <p:txBody>
+          <a:bodyPr wrap="square" lIns="0" rIns="0" tIns="0" bIns="0">
+            <a:spAutoFit/>
+          </a:bodyPr>
+          <a:lstStyle/>
+          <a:p>
+            <a:pPr algn="l"/>
+            <a:r>
+              <a:rPr sz="1350" b="1" i="0">
+                <a:solidFill>
+                  <a:srgbClr val="FFFFFF"/>
+                </a:solidFill>
+                <a:latin typeface="PingFang SC"/>
+              </a:rPr>
+              <a:t>Workflow</a:t>
+            </a:r>
+          </a:p>
+        </p:txBody>
+      </p:sp>
+      <p:sp>
+        <p:nvSpPr>
+          <p:cNvPr id="36" name="Rounded Rectangle 35"/>
+          <p:cNvSpPr/>
+          <p:nvPr/>
+        </p:nvSpPr>
+        <p:spPr>
+          <a:xfrm>
+            <a:off x="8457988" y="4572000"/>
+            <a:ext cx="304792" cy="304800"/>
+          </a:xfrm>
+          <a:prstGeom prst="roundRect">
+            <a:avLst>
+              <a:gd name="adj" fmla="val 25000"/>
+            </a:avLst>
+          </a:prstGeom>
+          <a:solidFill>
+            <a:srgbClr val="7C5CFF"/>
+          </a:solidFill>
+          <a:ln>
+            <a:noFill/>
+          </a:ln>
+        </p:spPr>
+        <p:style>
+          <a:lnRef idx="1">
+            <a:schemeClr val="accent1"/>
+          </a:lnRef>
+          <a:fillRef idx="3">
+            <a:schemeClr val="accent1"/>
+          </a:fillRef>
+          <a:effectRef idx="2">
+            <a:schemeClr val="accent1"/>
+          </a:effectRef>
+          <a:fontRef idx="minor">
+            <a:schemeClr val="lt1"/>
+          </a:fontRef>
+        </p:style>
+        <p:txBody>
+          <a:bodyPr rtlCol="0" anchor="ctr"/>
+          <a:lstStyle/>
+          <a:p>
+            <a:pPr algn="ctr"/>
+          </a:p>
+        </p:txBody>
+      </p:sp>
+      <p:sp>
+        <p:nvSpPr>
+          <p:cNvPr id="37" name="TextBox 36"/>
+          <p:cNvSpPr txBox="1"/>
+          <p:nvPr/>
+        </p:nvSpPr>
+        <p:spPr>
+          <a:xfrm>
+            <a:off x="8457988" y="4629150"/>
+            <a:ext cx="304792" cy="209550"/>
+          </a:xfrm>
+          <a:prstGeom prst="rect">
+            <a:avLst/>
+          </a:prstGeom>
+          <a:noFill/>
+        </p:spPr>
+        <p:txBody>
+          <a:bodyPr wrap="square" lIns="0" rIns="0" tIns="0" bIns="0">
+            <a:spAutoFit/>
+          </a:bodyPr>
+          <a:lstStyle/>
+          <a:p>
+            <a:pPr algn="ctr"/>
+            <a:r>
+              <a:rPr sz="1125" b="1" i="0">
+                <a:solidFill>
+                  <a:srgbClr val="0A0E27"/>
+                </a:solidFill>
+                <a:latin typeface="PingFang SC"/>
+              </a:rPr>
+              <a:t>02</a:t>
+            </a:r>
+          </a:p>
+        </p:txBody>
+      </p:sp>
+      <p:sp>
+        <p:nvSpPr>
+          <p:cNvPr id="38" name="TextBox 37"/>
+          <p:cNvSpPr txBox="1"/>
+          <p:nvPr/>
+        </p:nvSpPr>
+        <p:spPr>
+          <a:xfrm>
+            <a:off x="8915176" y="4610100"/>
+            <a:ext cx="2362140" cy="228600"/>
+          </a:xfrm>
+          <a:prstGeom prst="rect">
+            <a:avLst/>
+          </a:prstGeom>
+          <a:noFill/>
+        </p:spPr>
+        <p:txBody>
+          <a:bodyPr wrap="square" lIns="0" rIns="0" tIns="0" bIns="0">
+            <a:spAutoFit/>
+          </a:bodyPr>
+          <a:lstStyle/>
+          <a:p>
+            <a:pPr algn="l"/>
+            <a:r>
+              <a:rPr sz="1350" b="1" i="0">
+                <a:solidFill>
+                  <a:srgbClr val="BCC4D8"/>
+                </a:solidFill>
+                <a:latin typeface="PingFang SC"/>
+              </a:rPr>
+              <a:t>Agent</a:t>
+            </a:r>
+          </a:p>
+        </p:txBody>
+      </p:sp>
+      <p:sp>
+        <p:nvSpPr>
+          <p:cNvPr id="39" name="Rounded Rectangle 38"/>
+          <p:cNvSpPr/>
+          <p:nvPr/>
+        </p:nvSpPr>
+        <p:spPr>
+          <a:xfrm>
+            <a:off x="8457988" y="5029200"/>
+            <a:ext cx="304792" cy="304800"/>
+          </a:xfrm>
+          <a:prstGeom prst="roundRect">
+            <a:avLst>
+              <a:gd name="adj" fmla="val 25000"/>
+            </a:avLst>
+          </a:prstGeom>
+          <a:solidFill>
+            <a:srgbClr val="7C5CFF"/>
+          </a:solidFill>
+          <a:ln>
+            <a:noFill/>
+          </a:ln>
+        </p:spPr>
+        <p:style>
+          <a:lnRef idx="1">
+            <a:schemeClr val="accent1"/>
+          </a:lnRef>
+          <a:fillRef idx="3">
+            <a:schemeClr val="accent1"/>
+          </a:fillRef>
+          <a:effectRef idx="2">
+            <a:schemeClr val="accent1"/>
+          </a:effectRef>
+          <a:fontRef idx="minor">
+            <a:schemeClr val="lt1"/>
+          </a:fontRef>
+        </p:style>
+        <p:txBody>
+          <a:bodyPr rtlCol="0" anchor="ctr"/>
+          <a:lstStyle/>
+          <a:p>
+            <a:pPr algn="ctr"/>
+          </a:p>
+        </p:txBody>
+      </p:sp>
+      <p:sp>
+        <p:nvSpPr>
+          <p:cNvPr id="40" name="TextBox 39"/>
+          <p:cNvSpPr txBox="1"/>
+          <p:nvPr/>
+        </p:nvSpPr>
+        <p:spPr>
+          <a:xfrm>
+            <a:off x="8457988" y="5086350"/>
+            <a:ext cx="304792" cy="209550"/>
+          </a:xfrm>
+          <a:prstGeom prst="rect">
+            <a:avLst/>
+          </a:prstGeom>
+          <a:noFill/>
+        </p:spPr>
+        <p:txBody>
+          <a:bodyPr wrap="square" lIns="0" rIns="0" tIns="0" bIns="0">
+            <a:spAutoFit/>
+          </a:bodyPr>
+          <a:lstStyle/>
+          <a:p>
+            <a:pPr algn="ctr"/>
+            <a:r>
+              <a:rPr sz="1125" b="1" i="0">
+                <a:solidFill>
+                  <a:srgbClr val="0A0E27"/>
+                </a:solidFill>
+                <a:latin typeface="PingFang SC"/>
+              </a:rPr>
+              <a:t>03</a:t>
+            </a:r>
+          </a:p>
+        </p:txBody>
+      </p:sp>
+      <p:sp>
+        <p:nvSpPr>
+          <p:cNvPr id="41" name="TextBox 40"/>
+          <p:cNvSpPr txBox="1"/>
+          <p:nvPr/>
+        </p:nvSpPr>
+        <p:spPr>
+          <a:xfrm>
+            <a:off x="8915176" y="5067300"/>
+            <a:ext cx="2362140" cy="228600"/>
+          </a:xfrm>
+          <a:prstGeom prst="rect">
+            <a:avLst/>
+          </a:prstGeom>
+          <a:noFill/>
+        </p:spPr>
+        <p:txBody>
+          <a:bodyPr wrap="square" lIns="0" rIns="0" tIns="0" bIns="0">
+            <a:spAutoFit/>
+          </a:bodyPr>
+          <a:lstStyle/>
+          <a:p>
+            <a:pPr algn="l"/>
+            <a:r>
+              <a:rPr sz="1350" b="1" i="0">
+                <a:solidFill>
+                  <a:srgbClr val="BCC4D8"/>
+                </a:solidFill>
+                <a:latin typeface="PingFang SC"/>
+              </a:rPr>
+              <a:t>Chat 流</a:t>
+            </a:r>
+          </a:p>
+        </p:txBody>
+      </p:sp>
+      <p:sp>
+        <p:nvSpPr>
+          <p:cNvPr id="42" name="TextBox 41"/>
+          <p:cNvSpPr txBox="1"/>
+          <p:nvPr/>
+        </p:nvSpPr>
+        <p:spPr>
+          <a:xfrm>
+            <a:off x="533386" y="6610350"/>
+            <a:ext cx="5714857" cy="190500"/>
+          </a:xfrm>
+          <a:prstGeom prst="rect">
+            <a:avLst/>
+          </a:prstGeom>
+          <a:noFill/>
+        </p:spPr>
+        <p:txBody>
+          <a:bodyPr wrap="square" lIns="0" rIns="0" tIns="0" bIns="0">
+            <a:spAutoFit/>
+          </a:bodyPr>
+          <a:lstStyle/>
+          <a:p>
+            <a:pPr algn="l"/>
+            <a:r>
+              <a:rPr sz="1050" b="0" i="0">
+                <a:solidFill>
+                  <a:srgbClr val="6B7392"/>
+                </a:solidFill>
+                <a:latin typeface="PingFang SC"/>
+              </a:rPr>
+              <a:t>Dify 企业介绍</a:t>
+            </a:r>
+          </a:p>
+        </p:txBody>
+      </p:sp>
+      <p:sp>
+        <p:nvSpPr>
+          <p:cNvPr id="43" name="TextBox 42"/>
+          <p:cNvSpPr txBox="1"/>
+          <p:nvPr/>
+        </p:nvSpPr>
+        <p:spPr>
+          <a:xfrm>
+            <a:off x="9753356" y="6610350"/>
+            <a:ext cx="1904952" cy="190500"/>
+          </a:xfrm>
+          <a:prstGeom prst="rect">
+            <a:avLst/>
+          </a:prstGeom>
+          <a:noFill/>
+        </p:spPr>
+        <p:txBody>
+          <a:bodyPr wrap="square" lIns="0" rIns="0" tIns="0" bIns="0">
+            <a:spAutoFit/>
+          </a:bodyPr>
+          <a:lstStyle/>
+          <a:p>
+            <a:pPr algn="r"/>
+            <a:r>
+              <a:rPr sz="1050" b="0" i="0">
+                <a:solidFill>
+                  <a:srgbClr val="6B7392"/>
+                </a:solidFill>
+                <a:latin typeface="SF Mono"/>
+              </a:rPr>
+              <a:t>06 / 08</a:t>
+            </a:r>
+          </a:p>
+        </p:txBody>
+      </p:sp>
     </p:spTree>
   </p:cSld>
   <p:clrMapOvr>
@@ -3376,6 +8879,14 @@
 <file path=ppt/slides/slide7.xml><?xml version="1.0" encoding="utf-8"?>
 <p:sld xmlns:a="http://schemas.openxmlformats.org/drawingml/2006/main" xmlns:p="http://schemas.openxmlformats.org/presentationml/2006/main" xmlns:r="http://schemas.openxmlformats.org/officeDocument/2006/relationships">
   <p:cSld>
+    <p:bg>
+      <p:bgPr>
+        <a:solidFill>
+          <a:srgbClr val="0A0E27"/>
+        </a:solidFill>
+        <a:effectLst/>
+      </p:bgPr>
+    </p:bg>
     <p:spTree>
       <p:nvGrpSpPr>
         <p:cNvPr id="1" name=""/>
@@ -3383,36 +8894,1333 @@
         <p:nvPr/>
       </p:nvGrpSpPr>
       <p:grpSpPr/>
+      <p:sp>
+        <p:nvSpPr>
+          <p:cNvPr id="2" name="Rounded Rectangle 1"/>
+          <p:cNvSpPr/>
+          <p:nvPr/>
+        </p:nvSpPr>
+        <p:spPr>
+          <a:xfrm>
+            <a:off x="533386" y="533400"/>
+            <a:ext cx="7391215" cy="2667000"/>
+          </a:xfrm>
+          <a:prstGeom prst="roundRect">
+            <a:avLst>
+              <a:gd name="adj" fmla="val 10000"/>
+            </a:avLst>
+          </a:prstGeom>
+          <a:solidFill>
+            <a:srgbClr val="FFFFFF"/>
+          </a:solidFill>
+          <a:ln w="12700">
+            <a:solidFill>
+              <a:srgbClr val="FFFFFF"/>
+            </a:solidFill>
+          </a:ln>
+        </p:spPr>
+        <p:style>
+          <a:lnRef idx="1">
+            <a:schemeClr val="accent1"/>
+          </a:lnRef>
+          <a:fillRef idx="3">
+            <a:schemeClr val="accent1"/>
+          </a:fillRef>
+          <a:effectRef idx="2">
+            <a:schemeClr val="accent1"/>
+          </a:effectRef>
+          <a:fontRef idx="minor">
+            <a:schemeClr val="lt1"/>
+          </a:fontRef>
+        </p:style>
+        <p:txBody>
+          <a:bodyPr rtlCol="0" anchor="ctr"/>
+          <a:lstStyle/>
+          <a:p>
+            <a:pPr algn="ctr"/>
+          </a:p>
+        </p:txBody>
+      </p:sp>
+      <p:sp>
+        <p:nvSpPr>
+          <p:cNvPr id="3" name="TextBox 2"/>
+          <p:cNvSpPr txBox="1"/>
+          <p:nvPr/>
+        </p:nvSpPr>
+        <p:spPr>
+          <a:xfrm>
+            <a:off x="914377" y="914400"/>
+            <a:ext cx="6629234" cy="209550"/>
+          </a:xfrm>
+          <a:prstGeom prst="rect">
+            <a:avLst/>
+          </a:prstGeom>
+          <a:noFill/>
+        </p:spPr>
+        <p:txBody>
+          <a:bodyPr wrap="square" lIns="0" rIns="0" tIns="0" bIns="0">
+            <a:spAutoFit/>
+          </a:bodyPr>
+          <a:lstStyle/>
+          <a:p>
+            <a:pPr algn="l"/>
+            <a:r>
+              <a:rPr sz="1200" b="1" i="0" spc="300">
+                <a:solidFill>
+                  <a:srgbClr val="00D4FF"/>
+                </a:solidFill>
+                <a:latin typeface="PingFang SC"/>
+              </a:rPr>
+              <a:t>模型调用量月环比</a:t>
+            </a:r>
+          </a:p>
+        </p:txBody>
+      </p:sp>
+      <p:sp>
+        <p:nvSpPr>
+          <p:cNvPr id="4" name="TextBox 3"/>
+          <p:cNvSpPr txBox="1"/>
+          <p:nvPr/>
+        </p:nvSpPr>
+        <p:spPr>
+          <a:xfrm>
+            <a:off x="914377" y="1381125"/>
+            <a:ext cx="1523961" cy="209550"/>
+          </a:xfrm>
+          <a:prstGeom prst="rect">
+            <a:avLst/>
+          </a:prstGeom>
+          <a:noFill/>
+        </p:spPr>
+        <p:txBody>
+          <a:bodyPr wrap="square" lIns="0" rIns="0" tIns="0" bIns="0">
+            <a:spAutoFit/>
+          </a:bodyPr>
+          <a:lstStyle/>
+          <a:p>
+            <a:pPr algn="l"/>
+            <a:r>
+              <a:rPr sz="1350" b="0" i="0">
+                <a:solidFill>
+                  <a:srgbClr val="FFFFFF"/>
+                </a:solidFill>
+                <a:latin typeface="PingFang SC"/>
+              </a:rPr>
+              <a:t>GPT-4</a:t>
+            </a:r>
+          </a:p>
+        </p:txBody>
+      </p:sp>
+      <p:sp>
+        <p:nvSpPr>
+          <p:cNvPr id="5" name="Rounded Rectangle 4"/>
+          <p:cNvSpPr/>
+          <p:nvPr/>
+        </p:nvSpPr>
+        <p:spPr>
+          <a:xfrm>
+            <a:off x="2438339" y="1295400"/>
+            <a:ext cx="3771805" cy="352425"/>
+          </a:xfrm>
+          <a:prstGeom prst="roundRect">
+            <a:avLst>
+              <a:gd name="adj" fmla="val 15000"/>
+            </a:avLst>
+          </a:prstGeom>
+          <a:solidFill>
+            <a:srgbClr val="FFFFFF"/>
+          </a:solidFill>
+          <a:ln>
+            <a:noFill/>
+          </a:ln>
+        </p:spPr>
+        <p:style>
+          <a:lnRef idx="1">
+            <a:schemeClr val="accent1"/>
+          </a:lnRef>
+          <a:fillRef idx="3">
+            <a:schemeClr val="accent1"/>
+          </a:fillRef>
+          <a:effectRef idx="2">
+            <a:schemeClr val="accent1"/>
+          </a:effectRef>
+          <a:fontRef idx="minor">
+            <a:schemeClr val="lt1"/>
+          </a:fontRef>
+        </p:style>
+        <p:txBody>
+          <a:bodyPr rtlCol="0" anchor="ctr"/>
+          <a:lstStyle/>
+          <a:p>
+            <a:pPr algn="ctr"/>
+          </a:p>
+        </p:txBody>
+      </p:sp>
+      <p:sp>
+        <p:nvSpPr>
+          <p:cNvPr id="6" name="Rounded Rectangle 5"/>
+          <p:cNvSpPr/>
+          <p:nvPr/>
+        </p:nvSpPr>
+        <p:spPr>
+          <a:xfrm>
+            <a:off x="2438339" y="1295400"/>
+            <a:ext cx="3771805" cy="352425"/>
+          </a:xfrm>
+          <a:prstGeom prst="roundRect">
+            <a:avLst>
+              <a:gd name="adj" fmla="val 15000"/>
+            </a:avLst>
+          </a:prstGeom>
+          <a:solidFill>
+            <a:srgbClr val="7C5CFF"/>
+          </a:solidFill>
+          <a:ln>
+            <a:noFill/>
+          </a:ln>
+        </p:spPr>
+        <p:style>
+          <a:lnRef idx="1">
+            <a:schemeClr val="accent1"/>
+          </a:lnRef>
+          <a:fillRef idx="3">
+            <a:schemeClr val="accent1"/>
+          </a:fillRef>
+          <a:effectRef idx="2">
+            <a:schemeClr val="accent1"/>
+          </a:effectRef>
+          <a:fontRef idx="minor">
+            <a:schemeClr val="lt1"/>
+          </a:fontRef>
+        </p:style>
+        <p:txBody>
+          <a:bodyPr rtlCol="0" anchor="ctr"/>
+          <a:lstStyle/>
+          <a:p>
+            <a:pPr algn="ctr"/>
+          </a:p>
+        </p:txBody>
+      </p:sp>
+      <p:sp>
+        <p:nvSpPr>
+          <p:cNvPr id="7" name="TextBox 6"/>
+          <p:cNvSpPr txBox="1"/>
+          <p:nvPr/>
+        </p:nvSpPr>
+        <p:spPr>
+          <a:xfrm>
+            <a:off x="6324441" y="1362075"/>
+            <a:ext cx="1142971" cy="247650"/>
+          </a:xfrm>
+          <a:prstGeom prst="rect">
+            <a:avLst/>
+          </a:prstGeom>
+          <a:noFill/>
+        </p:spPr>
+        <p:txBody>
+          <a:bodyPr wrap="square" lIns="0" rIns="0" tIns="0" bIns="0">
+            <a:spAutoFit/>
+          </a:bodyPr>
+          <a:lstStyle/>
+          <a:p>
+            <a:pPr algn="l"/>
+            <a:r>
+              <a:rPr sz="1650" b="1" i="0">
+                <a:solidFill>
+                  <a:srgbClr val="FFFFFF"/>
+                </a:solidFill>
+                <a:latin typeface="PingFang SC"/>
+              </a:rPr>
+              <a:t>42 亿</a:t>
+            </a:r>
+          </a:p>
+        </p:txBody>
+      </p:sp>
+      <p:sp>
+        <p:nvSpPr>
+          <p:cNvPr id="8" name="TextBox 7"/>
+          <p:cNvSpPr txBox="1"/>
+          <p:nvPr/>
+        </p:nvSpPr>
+        <p:spPr>
+          <a:xfrm>
+            <a:off x="914377" y="1866900"/>
+            <a:ext cx="1523961" cy="209550"/>
+          </a:xfrm>
+          <a:prstGeom prst="rect">
+            <a:avLst/>
+          </a:prstGeom>
+          <a:noFill/>
+        </p:spPr>
+        <p:txBody>
+          <a:bodyPr wrap="square" lIns="0" rIns="0" tIns="0" bIns="0">
+            <a:spAutoFit/>
+          </a:bodyPr>
+          <a:lstStyle/>
+          <a:p>
+            <a:pPr algn="l"/>
+            <a:r>
+              <a:rPr sz="1350" b="0" i="0">
+                <a:solidFill>
+                  <a:srgbClr val="FFFFFF"/>
+                </a:solidFill>
+                <a:latin typeface="PingFang SC"/>
+              </a:rPr>
+              <a:t>Claude</a:t>
+            </a:r>
+          </a:p>
+        </p:txBody>
+      </p:sp>
+      <p:sp>
+        <p:nvSpPr>
+          <p:cNvPr id="9" name="Rounded Rectangle 8"/>
+          <p:cNvSpPr/>
+          <p:nvPr/>
+        </p:nvSpPr>
+        <p:spPr>
+          <a:xfrm>
+            <a:off x="2438339" y="1781175"/>
+            <a:ext cx="3771805" cy="352425"/>
+          </a:xfrm>
+          <a:prstGeom prst="roundRect">
+            <a:avLst>
+              <a:gd name="adj" fmla="val 15000"/>
+            </a:avLst>
+          </a:prstGeom>
+          <a:solidFill>
+            <a:srgbClr val="FFFFFF"/>
+          </a:solidFill>
+          <a:ln>
+            <a:noFill/>
+          </a:ln>
+        </p:spPr>
+        <p:style>
+          <a:lnRef idx="1">
+            <a:schemeClr val="accent1"/>
+          </a:lnRef>
+          <a:fillRef idx="3">
+            <a:schemeClr val="accent1"/>
+          </a:fillRef>
+          <a:effectRef idx="2">
+            <a:schemeClr val="accent1"/>
+          </a:effectRef>
+          <a:fontRef idx="minor">
+            <a:schemeClr val="lt1"/>
+          </a:fontRef>
+        </p:style>
+        <p:txBody>
+          <a:bodyPr rtlCol="0" anchor="ctr"/>
+          <a:lstStyle/>
+          <a:p>
+            <a:pPr algn="ctr"/>
+          </a:p>
+        </p:txBody>
+      </p:sp>
+      <p:sp>
+        <p:nvSpPr>
+          <p:cNvPr id="10" name="Rounded Rectangle 9"/>
+          <p:cNvSpPr/>
+          <p:nvPr/>
+        </p:nvSpPr>
+        <p:spPr>
+          <a:xfrm>
+            <a:off x="2438339" y="1781175"/>
+            <a:ext cx="2781230" cy="352425"/>
+          </a:xfrm>
+          <a:prstGeom prst="roundRect">
+            <a:avLst>
+              <a:gd name="adj" fmla="val 15000"/>
+            </a:avLst>
+          </a:prstGeom>
+          <a:solidFill>
+            <a:srgbClr val="7C5CFF"/>
+          </a:solidFill>
+          <a:ln>
+            <a:noFill/>
+          </a:ln>
+        </p:spPr>
+        <p:style>
+          <a:lnRef idx="1">
+            <a:schemeClr val="accent1"/>
+          </a:lnRef>
+          <a:fillRef idx="3">
+            <a:schemeClr val="accent1"/>
+          </a:fillRef>
+          <a:effectRef idx="2">
+            <a:schemeClr val="accent1"/>
+          </a:effectRef>
+          <a:fontRef idx="minor">
+            <a:schemeClr val="lt1"/>
+          </a:fontRef>
+        </p:style>
+        <p:txBody>
+          <a:bodyPr rtlCol="0" anchor="ctr"/>
+          <a:lstStyle/>
+          <a:p>
+            <a:pPr algn="ctr"/>
+          </a:p>
+        </p:txBody>
+      </p:sp>
+      <p:sp>
+        <p:nvSpPr>
+          <p:cNvPr id="11" name="TextBox 10"/>
+          <p:cNvSpPr txBox="1"/>
+          <p:nvPr/>
+        </p:nvSpPr>
+        <p:spPr>
+          <a:xfrm>
+            <a:off x="5333866" y="1847850"/>
+            <a:ext cx="1142971" cy="247650"/>
+          </a:xfrm>
+          <a:prstGeom prst="rect">
+            <a:avLst/>
+          </a:prstGeom>
+          <a:noFill/>
+        </p:spPr>
+        <p:txBody>
+          <a:bodyPr wrap="square" lIns="0" rIns="0" tIns="0" bIns="0">
+            <a:spAutoFit/>
+          </a:bodyPr>
+          <a:lstStyle/>
+          <a:p>
+            <a:pPr algn="l"/>
+            <a:r>
+              <a:rPr sz="1650" b="1" i="0">
+                <a:solidFill>
+                  <a:srgbClr val="FFFFFF"/>
+                </a:solidFill>
+                <a:latin typeface="PingFang SC"/>
+              </a:rPr>
+              <a:t>31 亿</a:t>
+            </a:r>
+          </a:p>
+        </p:txBody>
+      </p:sp>
+      <p:sp>
+        <p:nvSpPr>
+          <p:cNvPr id="12" name="TextBox 11"/>
+          <p:cNvSpPr txBox="1"/>
+          <p:nvPr/>
+        </p:nvSpPr>
+        <p:spPr>
+          <a:xfrm>
+            <a:off x="914377" y="2352675"/>
+            <a:ext cx="1523961" cy="209550"/>
+          </a:xfrm>
+          <a:prstGeom prst="rect">
+            <a:avLst/>
+          </a:prstGeom>
+          <a:noFill/>
+        </p:spPr>
+        <p:txBody>
+          <a:bodyPr wrap="square" lIns="0" rIns="0" tIns="0" bIns="0">
+            <a:spAutoFit/>
+          </a:bodyPr>
+          <a:lstStyle/>
+          <a:p>
+            <a:pPr algn="l"/>
+            <a:r>
+              <a:rPr sz="1350" b="0" i="0">
+                <a:solidFill>
+                  <a:srgbClr val="FFFFFF"/>
+                </a:solidFill>
+                <a:latin typeface="PingFang SC"/>
+              </a:rPr>
+              <a:t>Gemini</a:t>
+            </a:r>
+          </a:p>
+        </p:txBody>
+      </p:sp>
+      <p:sp>
+        <p:nvSpPr>
+          <p:cNvPr id="13" name="Rounded Rectangle 12"/>
+          <p:cNvSpPr/>
+          <p:nvPr/>
+        </p:nvSpPr>
+        <p:spPr>
+          <a:xfrm>
+            <a:off x="2438339" y="2266950"/>
+            <a:ext cx="3771805" cy="352425"/>
+          </a:xfrm>
+          <a:prstGeom prst="roundRect">
+            <a:avLst>
+              <a:gd name="adj" fmla="val 15000"/>
+            </a:avLst>
+          </a:prstGeom>
+          <a:solidFill>
+            <a:srgbClr val="FFFFFF"/>
+          </a:solidFill>
+          <a:ln>
+            <a:noFill/>
+          </a:ln>
+        </p:spPr>
+        <p:style>
+          <a:lnRef idx="1">
+            <a:schemeClr val="accent1"/>
+          </a:lnRef>
+          <a:fillRef idx="3">
+            <a:schemeClr val="accent1"/>
+          </a:fillRef>
+          <a:effectRef idx="2">
+            <a:schemeClr val="accent1"/>
+          </a:effectRef>
+          <a:fontRef idx="minor">
+            <a:schemeClr val="lt1"/>
+          </a:fontRef>
+        </p:style>
+        <p:txBody>
+          <a:bodyPr rtlCol="0" anchor="ctr"/>
+          <a:lstStyle/>
+          <a:p>
+            <a:pPr algn="ctr"/>
+          </a:p>
+        </p:txBody>
+      </p:sp>
+      <p:sp>
+        <p:nvSpPr>
+          <p:cNvPr id="14" name="Rounded Rectangle 13"/>
+          <p:cNvSpPr/>
+          <p:nvPr/>
+        </p:nvSpPr>
+        <p:spPr>
+          <a:xfrm>
+            <a:off x="2438339" y="2266950"/>
+            <a:ext cx="1609684" cy="352425"/>
+          </a:xfrm>
+          <a:prstGeom prst="roundRect">
+            <a:avLst>
+              <a:gd name="adj" fmla="val 15000"/>
+            </a:avLst>
+          </a:prstGeom>
+          <a:solidFill>
+            <a:srgbClr val="7C5CFF"/>
+          </a:solidFill>
+          <a:ln>
+            <a:noFill/>
+          </a:ln>
+        </p:spPr>
+        <p:style>
+          <a:lnRef idx="1">
+            <a:schemeClr val="accent1"/>
+          </a:lnRef>
+          <a:fillRef idx="3">
+            <a:schemeClr val="accent1"/>
+          </a:fillRef>
+          <a:effectRef idx="2">
+            <a:schemeClr val="accent1"/>
+          </a:effectRef>
+          <a:fontRef idx="minor">
+            <a:schemeClr val="lt1"/>
+          </a:fontRef>
+        </p:style>
+        <p:txBody>
+          <a:bodyPr rtlCol="0" anchor="ctr"/>
+          <a:lstStyle/>
+          <a:p>
+            <a:pPr algn="ctr"/>
+          </a:p>
+        </p:txBody>
+      </p:sp>
+      <p:sp>
+        <p:nvSpPr>
+          <p:cNvPr id="15" name="TextBox 14"/>
+          <p:cNvSpPr txBox="1"/>
+          <p:nvPr/>
+        </p:nvSpPr>
+        <p:spPr>
+          <a:xfrm>
+            <a:off x="4162320" y="2333625"/>
+            <a:ext cx="1142971" cy="247650"/>
+          </a:xfrm>
+          <a:prstGeom prst="rect">
+            <a:avLst/>
+          </a:prstGeom>
+          <a:noFill/>
+        </p:spPr>
+        <p:txBody>
+          <a:bodyPr wrap="square" lIns="0" rIns="0" tIns="0" bIns="0">
+            <a:spAutoFit/>
+          </a:bodyPr>
+          <a:lstStyle/>
+          <a:p>
+            <a:pPr algn="l"/>
+            <a:r>
+              <a:rPr sz="1650" b="1" i="0">
+                <a:solidFill>
+                  <a:srgbClr val="FFFFFF"/>
+                </a:solidFill>
+                <a:latin typeface="PingFang SC"/>
+              </a:rPr>
+              <a:t>18 亿</a:t>
+            </a:r>
+          </a:p>
+        </p:txBody>
+      </p:sp>
+      <p:sp>
+        <p:nvSpPr>
+          <p:cNvPr id="16" name="Rounded Rectangle 15"/>
+          <p:cNvSpPr/>
+          <p:nvPr/>
+        </p:nvSpPr>
+        <p:spPr>
+          <a:xfrm>
+            <a:off x="8115096" y="533400"/>
+            <a:ext cx="3543211" cy="2667000"/>
+          </a:xfrm>
+          <a:prstGeom prst="roundRect">
+            <a:avLst>
+              <a:gd name="adj" fmla="val 10000"/>
+            </a:avLst>
+          </a:prstGeom>
+          <a:solidFill>
+            <a:srgbClr val="FFFFFF"/>
+          </a:solidFill>
+          <a:ln w="12700">
+            <a:solidFill>
+              <a:srgbClr val="FFFFFF"/>
+            </a:solidFill>
+          </a:ln>
+        </p:spPr>
+        <p:style>
+          <a:lnRef idx="1">
+            <a:schemeClr val="accent1"/>
+          </a:lnRef>
+          <a:fillRef idx="3">
+            <a:schemeClr val="accent1"/>
+          </a:fillRef>
+          <a:effectRef idx="2">
+            <a:schemeClr val="accent1"/>
+          </a:effectRef>
+          <a:fontRef idx="minor">
+            <a:schemeClr val="lt1"/>
+          </a:fontRef>
+        </p:style>
+        <p:txBody>
+          <a:bodyPr rtlCol="0" anchor="ctr"/>
+          <a:lstStyle/>
+          <a:p>
+            <a:pPr algn="ctr"/>
+          </a:p>
+        </p:txBody>
+      </p:sp>
+      <p:sp>
+        <p:nvSpPr>
+          <p:cNvPr id="17" name="TextBox 16"/>
+          <p:cNvSpPr txBox="1"/>
+          <p:nvPr/>
+        </p:nvSpPr>
+        <p:spPr>
+          <a:xfrm>
+            <a:off x="8496087" y="952500"/>
+            <a:ext cx="2781230" cy="209550"/>
+          </a:xfrm>
+          <a:prstGeom prst="rect">
+            <a:avLst/>
+          </a:prstGeom>
+          <a:noFill/>
+        </p:spPr>
+        <p:txBody>
+          <a:bodyPr wrap="square" lIns="0" rIns="0" tIns="0" bIns="0">
+            <a:spAutoFit/>
+          </a:bodyPr>
+          <a:lstStyle/>
+          <a:p>
+            <a:pPr algn="l"/>
+            <a:r>
+              <a:rPr sz="1200" b="1" i="0" spc="300">
+                <a:solidFill>
+                  <a:srgbClr val="00D4FF"/>
+                </a:solidFill>
+                <a:latin typeface="PingFang SC"/>
+              </a:rPr>
+              <a:t>运行指标</a:t>
+            </a:r>
+          </a:p>
+        </p:txBody>
+      </p:sp>
+      <p:sp>
+        <p:nvSpPr>
+          <p:cNvPr id="18" name="TextBox 17"/>
+          <p:cNvSpPr txBox="1"/>
+          <p:nvPr/>
+        </p:nvSpPr>
+        <p:spPr>
+          <a:xfrm>
+            <a:off x="8496087" y="1266825"/>
+            <a:ext cx="857228" cy="542925"/>
+          </a:xfrm>
+          <a:prstGeom prst="rect">
+            <a:avLst/>
+          </a:prstGeom>
+          <a:noFill/>
+        </p:spPr>
+        <p:txBody>
+          <a:bodyPr wrap="square" lIns="0" rIns="0" tIns="0" bIns="0">
+            <a:spAutoFit/>
+          </a:bodyPr>
+          <a:lstStyle/>
+          <a:p>
+            <a:pPr algn="l"/>
+            <a:r>
+              <a:rPr sz="3600" b="1" i="0">
+                <a:solidFill>
+                  <a:srgbClr val="FFFFFF"/>
+                </a:solidFill>
+                <a:latin typeface="PingFang SC"/>
+              </a:rPr>
+              <a:t>187</a:t>
+            </a:r>
+          </a:p>
+        </p:txBody>
+      </p:sp>
+      <p:sp>
+        <p:nvSpPr>
+          <p:cNvPr id="19" name="TextBox 18"/>
+          <p:cNvSpPr txBox="1"/>
+          <p:nvPr/>
+        </p:nvSpPr>
+        <p:spPr>
+          <a:xfrm>
+            <a:off x="9315216" y="1571625"/>
+            <a:ext cx="371465" cy="180975"/>
+          </a:xfrm>
+          <a:prstGeom prst="rect">
+            <a:avLst/>
+          </a:prstGeom>
+          <a:noFill/>
+        </p:spPr>
+        <p:txBody>
+          <a:bodyPr wrap="square" lIns="0" rIns="0" tIns="0" bIns="0">
+            <a:spAutoFit/>
+          </a:bodyPr>
+          <a:lstStyle/>
+          <a:p>
+            <a:pPr algn="l"/>
+            <a:r>
+              <a:rPr sz="1050" b="1" i="0">
+                <a:solidFill>
+                  <a:srgbClr val="00D4FF"/>
+                </a:solidFill>
+                <a:latin typeface="PingFang SC"/>
+              </a:rPr>
+              <a:t>ms</a:t>
+            </a:r>
+          </a:p>
+        </p:txBody>
+      </p:sp>
+      <p:sp>
+        <p:nvSpPr>
+          <p:cNvPr id="20" name="TextBox 19"/>
+          <p:cNvSpPr txBox="1"/>
+          <p:nvPr/>
+        </p:nvSpPr>
+        <p:spPr>
+          <a:xfrm>
+            <a:off x="9581910" y="1533525"/>
+            <a:ext cx="1600159" cy="238125"/>
+          </a:xfrm>
+          <a:prstGeom prst="rect">
+            <a:avLst/>
+          </a:prstGeom>
+          <a:noFill/>
+        </p:spPr>
+        <p:txBody>
+          <a:bodyPr wrap="square" lIns="0" rIns="0" tIns="0" bIns="0">
+            <a:spAutoFit/>
+          </a:bodyPr>
+          <a:lstStyle/>
+          <a:p>
+            <a:pPr algn="l"/>
+            <a:r>
+              <a:rPr sz="1350" b="0" i="0">
+                <a:solidFill>
+                  <a:srgbClr val="BCC4D8"/>
+                </a:solidFill>
+                <a:latin typeface="PingFang SC"/>
+              </a:rPr>
+              <a:t>API 平均响应</a:t>
+            </a:r>
+          </a:p>
+        </p:txBody>
+      </p:sp>
+      <p:sp>
+        <p:nvSpPr>
+          <p:cNvPr id="21" name="TextBox 20"/>
+          <p:cNvSpPr txBox="1"/>
+          <p:nvPr/>
+        </p:nvSpPr>
+        <p:spPr>
+          <a:xfrm>
+            <a:off x="8496087" y="1762125"/>
+            <a:ext cx="1390615" cy="171450"/>
+          </a:xfrm>
+          <a:prstGeom prst="rect">
+            <a:avLst/>
+          </a:prstGeom>
+          <a:noFill/>
+        </p:spPr>
+        <p:txBody>
+          <a:bodyPr wrap="square" lIns="0" rIns="0" tIns="0" bIns="0">
+            <a:spAutoFit/>
+          </a:bodyPr>
+          <a:lstStyle/>
+          <a:p>
+            <a:pPr algn="l"/>
+            <a:r>
+              <a:rPr sz="900" b="0" i="0" spc="100">
+                <a:solidFill>
+                  <a:srgbClr val="6B7392"/>
+                </a:solidFill>
+                <a:latin typeface="PingFang SC"/>
+              </a:rPr>
+              <a:t>99 分位</a:t>
+            </a:r>
+          </a:p>
+        </p:txBody>
+      </p:sp>
+      <p:sp>
+        <p:nvSpPr>
+          <p:cNvPr id="22" name="TextBox 21"/>
+          <p:cNvSpPr txBox="1"/>
+          <p:nvPr/>
+        </p:nvSpPr>
+        <p:spPr>
+          <a:xfrm>
+            <a:off x="8496087" y="1876425"/>
+            <a:ext cx="1390615" cy="238125"/>
+          </a:xfrm>
+          <a:prstGeom prst="rect">
+            <a:avLst/>
+          </a:prstGeom>
+          <a:noFill/>
+        </p:spPr>
+        <p:txBody>
+          <a:bodyPr wrap="square" lIns="0" rIns="0" tIns="0" bIns="0">
+            <a:spAutoFit/>
+          </a:bodyPr>
+          <a:lstStyle/>
+          <a:p>
+            <a:pPr algn="l"/>
+            <a:r>
+              <a:rPr sz="1350" b="1" i="0">
+                <a:solidFill>
+                  <a:srgbClr val="FFFFFF"/>
+                </a:solidFill>
+                <a:latin typeface="PingFang SC"/>
+              </a:rPr>
+              <a:t>420 ms</a:t>
+            </a:r>
+          </a:p>
+        </p:txBody>
+      </p:sp>
+      <p:sp>
+        <p:nvSpPr>
+          <p:cNvPr id="23" name="TextBox 22"/>
+          <p:cNvSpPr txBox="1"/>
+          <p:nvPr/>
+        </p:nvSpPr>
+        <p:spPr>
+          <a:xfrm>
+            <a:off x="9886702" y="1762125"/>
+            <a:ext cx="1390615" cy="171450"/>
+          </a:xfrm>
+          <a:prstGeom prst="rect">
+            <a:avLst/>
+          </a:prstGeom>
+          <a:noFill/>
+        </p:spPr>
+        <p:txBody>
+          <a:bodyPr wrap="square" lIns="0" rIns="0" tIns="0" bIns="0">
+            <a:spAutoFit/>
+          </a:bodyPr>
+          <a:lstStyle/>
+          <a:p>
+            <a:pPr algn="l"/>
+            <a:r>
+              <a:rPr sz="900" b="0" i="0" spc="100">
+                <a:solidFill>
+                  <a:srgbClr val="6B7392"/>
+                </a:solidFill>
+                <a:latin typeface="PingFang SC"/>
+              </a:rPr>
+              <a:t>错误率</a:t>
+            </a:r>
+          </a:p>
+        </p:txBody>
+      </p:sp>
+      <p:sp>
+        <p:nvSpPr>
+          <p:cNvPr id="24" name="TextBox 23"/>
+          <p:cNvSpPr txBox="1"/>
+          <p:nvPr/>
+        </p:nvSpPr>
+        <p:spPr>
+          <a:xfrm>
+            <a:off x="9886702" y="1876425"/>
+            <a:ext cx="1390615" cy="238125"/>
+          </a:xfrm>
+          <a:prstGeom prst="rect">
+            <a:avLst/>
+          </a:prstGeom>
+          <a:noFill/>
+        </p:spPr>
+        <p:txBody>
+          <a:bodyPr wrap="square" lIns="0" rIns="0" tIns="0" bIns="0">
+            <a:spAutoFit/>
+          </a:bodyPr>
+          <a:lstStyle/>
+          <a:p>
+            <a:pPr algn="l"/>
+            <a:r>
+              <a:rPr sz="1350" b="1" i="0">
+                <a:solidFill>
+                  <a:srgbClr val="FFFFFF"/>
+                </a:solidFill>
+                <a:latin typeface="PingFang SC"/>
+              </a:rPr>
+              <a:t>0.03%</a:t>
+            </a:r>
+          </a:p>
+        </p:txBody>
+      </p:sp>
+      <p:sp>
+        <p:nvSpPr>
+          <p:cNvPr id="25" name="Rounded Rectangle 24"/>
+          <p:cNvSpPr/>
+          <p:nvPr/>
+        </p:nvSpPr>
+        <p:spPr>
+          <a:xfrm>
+            <a:off x="8496087" y="2247900"/>
+            <a:ext cx="2781230" cy="57150"/>
+          </a:xfrm>
+          <a:prstGeom prst="roundRect">
+            <a:avLst>
+              <a:gd name="adj" fmla="val 50000"/>
+            </a:avLst>
+          </a:prstGeom>
+          <a:solidFill>
+            <a:srgbClr val="FFFFFF"/>
+          </a:solidFill>
+          <a:ln>
+            <a:noFill/>
+          </a:ln>
+        </p:spPr>
+        <p:style>
+          <a:lnRef idx="1">
+            <a:schemeClr val="accent1"/>
+          </a:lnRef>
+          <a:fillRef idx="3">
+            <a:schemeClr val="accent1"/>
+          </a:fillRef>
+          <a:effectRef idx="2">
+            <a:schemeClr val="accent1"/>
+          </a:effectRef>
+          <a:fontRef idx="minor">
+            <a:schemeClr val="lt1"/>
+          </a:fontRef>
+        </p:style>
+        <p:txBody>
+          <a:bodyPr rtlCol="0" anchor="ctr"/>
+          <a:lstStyle/>
+          <a:p>
+            <a:pPr algn="ctr"/>
+          </a:p>
+        </p:txBody>
+      </p:sp>
+      <p:sp>
+        <p:nvSpPr>
+          <p:cNvPr id="26" name="Rounded Rectangle 25"/>
+          <p:cNvSpPr/>
+          <p:nvPr/>
+        </p:nvSpPr>
+        <p:spPr>
+          <a:xfrm>
+            <a:off x="8496087" y="2247900"/>
+            <a:ext cx="2752656" cy="57150"/>
+          </a:xfrm>
+          <a:prstGeom prst="roundRect">
+            <a:avLst>
+              <a:gd name="adj" fmla="val 50000"/>
+            </a:avLst>
+          </a:prstGeom>
+          <a:solidFill>
+            <a:srgbClr val="7C5CFF"/>
+          </a:solidFill>
+          <a:ln>
+            <a:noFill/>
+          </a:ln>
+        </p:spPr>
+        <p:style>
+          <a:lnRef idx="1">
+            <a:schemeClr val="accent1"/>
+          </a:lnRef>
+          <a:fillRef idx="3">
+            <a:schemeClr val="accent1"/>
+          </a:fillRef>
+          <a:effectRef idx="2">
+            <a:schemeClr val="accent1"/>
+          </a:effectRef>
+          <a:fontRef idx="minor">
+            <a:schemeClr val="lt1"/>
+          </a:fontRef>
+        </p:style>
+        <p:txBody>
+          <a:bodyPr rtlCol="0" anchor="ctr"/>
+          <a:lstStyle/>
+          <a:p>
+            <a:pPr algn="ctr"/>
+          </a:p>
+        </p:txBody>
+      </p:sp>
+      <p:sp>
+        <p:nvSpPr>
+          <p:cNvPr id="27" name="TextBox 26"/>
+          <p:cNvSpPr txBox="1"/>
+          <p:nvPr/>
+        </p:nvSpPr>
+        <p:spPr>
+          <a:xfrm>
+            <a:off x="8496087" y="2381250"/>
+            <a:ext cx="2781230" cy="190500"/>
+          </a:xfrm>
+          <a:prstGeom prst="rect">
+            <a:avLst/>
+          </a:prstGeom>
+          <a:noFill/>
+        </p:spPr>
+        <p:txBody>
+          <a:bodyPr wrap="square" lIns="0" rIns="0" tIns="0" bIns="0">
+            <a:spAutoFit/>
+          </a:bodyPr>
+          <a:lstStyle/>
+          <a:p>
+            <a:pPr algn="l"/>
+            <a:r>
+              <a:rPr sz="1050" b="0" i="0">
+                <a:solidFill>
+                  <a:srgbClr val="BCC4D8"/>
+                </a:solidFill>
+                <a:latin typeface="PingFang SC"/>
+              </a:rPr>
+              <a:t>SLA 99% 达标</a:t>
+            </a:r>
+          </a:p>
+        </p:txBody>
+      </p:sp>
+      <p:sp>
+        <p:nvSpPr>
+          <p:cNvPr id="28" name="Rounded Rectangle 27"/>
+          <p:cNvSpPr/>
+          <p:nvPr/>
+        </p:nvSpPr>
+        <p:spPr>
+          <a:xfrm>
+            <a:off x="533386" y="3390900"/>
+            <a:ext cx="3543211" cy="2647950"/>
+          </a:xfrm>
+          <a:prstGeom prst="roundRect">
+            <a:avLst>
+              <a:gd name="adj" fmla="val 10071"/>
+            </a:avLst>
+          </a:prstGeom>
+          <a:solidFill>
+            <a:srgbClr val="FFFFFF"/>
+          </a:solidFill>
+          <a:ln w="12700">
+            <a:solidFill>
+              <a:srgbClr val="FFFFFF"/>
+            </a:solidFill>
+          </a:ln>
+        </p:spPr>
+        <p:style>
+          <a:lnRef idx="1">
+            <a:schemeClr val="accent1"/>
+          </a:lnRef>
+          <a:fillRef idx="3">
+            <a:schemeClr val="accent1"/>
+          </a:fillRef>
+          <a:effectRef idx="2">
+            <a:schemeClr val="accent1"/>
+          </a:effectRef>
+          <a:fontRef idx="minor">
+            <a:schemeClr val="lt1"/>
+          </a:fontRef>
+        </p:style>
+        <p:txBody>
+          <a:bodyPr rtlCol="0" anchor="ctr"/>
+          <a:lstStyle/>
+          <a:p>
+            <a:pPr algn="ctr"/>
+          </a:p>
+        </p:txBody>
+      </p:sp>
+      <p:sp>
+        <p:nvSpPr>
+          <p:cNvPr id="29" name="TextBox 28"/>
+          <p:cNvSpPr txBox="1"/>
+          <p:nvPr/>
+        </p:nvSpPr>
+        <p:spPr>
+          <a:xfrm>
+            <a:off x="914377" y="3771900"/>
+            <a:ext cx="2781230" cy="209550"/>
+          </a:xfrm>
+          <a:prstGeom prst="rect">
+            <a:avLst/>
+          </a:prstGeom>
+          <a:noFill/>
+        </p:spPr>
+        <p:txBody>
+          <a:bodyPr wrap="square" lIns="0" rIns="0" tIns="0" bIns="0">
+            <a:spAutoFit/>
+          </a:bodyPr>
+          <a:lstStyle/>
+          <a:p>
+            <a:pPr algn="l"/>
+            <a:r>
+              <a:rPr sz="1200" b="1" i="0" spc="300">
+                <a:solidFill>
+                  <a:srgbClr val="00D4FF"/>
+                </a:solidFill>
+                <a:latin typeface="PingFang SC"/>
+              </a:rPr>
+              <a:t>界面预览</a:t>
+            </a:r>
+          </a:p>
+        </p:txBody>
+      </p:sp>
       <p:pic>
         <p:nvPicPr>
-          <p:cNvPr id="2" name="Picture 1" descr="07-mixed-grid-demo.png"/>
+          <p:cNvPr id="30" name="Picture 29" descr="b0f2e749292c.png"/>
           <p:cNvPicPr>
             <a:picLocks noChangeAspect="1"/>
           </p:cNvPicPr>
           <p:nvPr/>
         </p:nvPicPr>
         <p:blipFill>
-          <a:blip r:embed="rId2">
-            <a:extLst>
-              <a:ext uri="{96DAC541-7B7A-43D3-8B79-37D633B846F1}">
-                <asvg:svgBlip xmlns:asvg="http://schemas.microsoft.com/office/drawing/2016/SVG/main" r:embed="rId3"/>
-              </a:ext>
-            </a:extLst>
-          </a:blip>
+          <a:blip r:embed="rId2"/>
           <a:stretch>
             <a:fillRect/>
           </a:stretch>
         </p:blipFill>
         <p:spPr>
           <a:xfrm>
-            <a:off x="0" y="0"/>
-            <a:ext cx="12191695" cy="6858000"/>
+            <a:off x="914377" y="4114800"/>
+            <a:ext cx="2781230" cy="1466850"/>
           </a:xfrm>
           <a:prstGeom prst="rect">
             <a:avLst/>
           </a:prstGeom>
         </p:spPr>
       </p:pic>
+      <p:sp>
+        <p:nvSpPr>
+          <p:cNvPr id="31" name="Rounded Rectangle 30"/>
+          <p:cNvSpPr/>
+          <p:nvPr/>
+        </p:nvSpPr>
+        <p:spPr>
+          <a:xfrm>
+            <a:off x="4305192" y="3390900"/>
+            <a:ext cx="7353116" cy="2647950"/>
+          </a:xfrm>
+          <a:prstGeom prst="roundRect">
+            <a:avLst>
+              <a:gd name="adj" fmla="val 10071"/>
+            </a:avLst>
+          </a:prstGeom>
+          <a:solidFill>
+            <a:srgbClr val="FFFFFF"/>
+          </a:solidFill>
+          <a:ln w="12700">
+            <a:solidFill>
+              <a:srgbClr val="FFFFFF"/>
+            </a:solidFill>
+          </a:ln>
+        </p:spPr>
+        <p:style>
+          <a:lnRef idx="1">
+            <a:schemeClr val="accent1"/>
+          </a:lnRef>
+          <a:fillRef idx="3">
+            <a:schemeClr val="accent1"/>
+          </a:fillRef>
+          <a:effectRef idx="2">
+            <a:schemeClr val="accent1"/>
+          </a:effectRef>
+          <a:fontRef idx="minor">
+            <a:schemeClr val="lt1"/>
+          </a:fontRef>
+        </p:style>
+        <p:txBody>
+          <a:bodyPr rtlCol="0" anchor="ctr"/>
+          <a:lstStyle/>
+          <a:p>
+            <a:pPr algn="ctr"/>
+          </a:p>
+        </p:txBody>
+      </p:sp>
+      <p:sp>
+        <p:nvSpPr>
+          <p:cNvPr id="32" name="TextBox 31"/>
+          <p:cNvSpPr txBox="1"/>
+          <p:nvPr/>
+        </p:nvSpPr>
+        <p:spPr>
+          <a:xfrm>
+            <a:off x="4686182" y="3848100"/>
+            <a:ext cx="6591135" cy="400050"/>
+          </a:xfrm>
+          <a:prstGeom prst="rect">
+            <a:avLst/>
+          </a:prstGeom>
+          <a:noFill/>
+        </p:spPr>
+        <p:txBody>
+          <a:bodyPr wrap="square" lIns="0" rIns="0" tIns="0" bIns="0">
+            <a:spAutoFit/>
+          </a:bodyPr>
+          <a:lstStyle/>
+          <a:p>
+            <a:pPr algn="l"/>
+            <a:r>
+              <a:rPr sz="2250" b="1" i="0">
+                <a:solidFill>
+                  <a:srgbClr val="FFFFFF"/>
+                </a:solidFill>
+                <a:latin typeface="PingFang SC"/>
+              </a:rPr>
+              <a:t>落地案例</a:t>
+            </a:r>
+          </a:p>
+        </p:txBody>
+      </p:sp>
+      <p:sp>
+        <p:nvSpPr>
+          <p:cNvPr id="33" name="TextBox 32"/>
+          <p:cNvSpPr txBox="1"/>
+          <p:nvPr/>
+        </p:nvSpPr>
+        <p:spPr>
+          <a:xfrm>
+            <a:off x="4686182" y="4286250"/>
+            <a:ext cx="6591135" cy="1295400"/>
+          </a:xfrm>
+          <a:prstGeom prst="rect">
+            <a:avLst/>
+          </a:prstGeom>
+          <a:noFill/>
+        </p:spPr>
+        <p:txBody>
+          <a:bodyPr wrap="square" lIns="0" rIns="0" tIns="0" bIns="0">
+            <a:spAutoFit/>
+          </a:bodyPr>
+          <a:lstStyle/>
+          <a:p>
+            <a:pPr>
+              <a:spcAft>
+                <a:spcPts val="800"/>
+              </a:spcAft>
+            </a:pPr>
+            <a:r>
+              <a:rPr sz="1350">
+                <a:solidFill>
+                  <a:srgbClr val="BCC4D8"/>
+                </a:solidFill>
+                <a:latin typeface="PingFang SC"/>
+              </a:rPr>
+              <a:t>某头部券商：用 Dify 把 17 个内部系统的接口能力封装成 Agent 工具，把客户经理日均处理工单数从 23 提升到 78。</a:t>
+            </a:r>
+          </a:p>
+          <a:p>
+            <a:pPr>
+              <a:spcAft>
+                <a:spcPts val="800"/>
+              </a:spcAft>
+            </a:pPr>
+            <a:r>
+              <a:rPr sz="1350">
+                <a:solidFill>
+                  <a:srgbClr val="BCC4D8"/>
+                </a:solidFill>
+                <a:latin typeface="PingFang SC"/>
+              </a:rPr>
+              <a:t>某省级政务平台：基于 Dify 知识库构建公文助手，问答准确率从 62% 提升到 91%。</a:t>
+            </a:r>
+          </a:p>
+        </p:txBody>
+      </p:sp>
+      <p:sp>
+        <p:nvSpPr>
+          <p:cNvPr id="34" name="TextBox 33"/>
+          <p:cNvSpPr txBox="1"/>
+          <p:nvPr/>
+        </p:nvSpPr>
+        <p:spPr>
+          <a:xfrm>
+            <a:off x="533386" y="6610350"/>
+            <a:ext cx="5714857" cy="190500"/>
+          </a:xfrm>
+          <a:prstGeom prst="rect">
+            <a:avLst/>
+          </a:prstGeom>
+          <a:noFill/>
+        </p:spPr>
+        <p:txBody>
+          <a:bodyPr wrap="square" lIns="0" rIns="0" tIns="0" bIns="0">
+            <a:spAutoFit/>
+          </a:bodyPr>
+          <a:lstStyle/>
+          <a:p>
+            <a:pPr algn="l"/>
+            <a:r>
+              <a:rPr sz="1050" b="0" i="0">
+                <a:solidFill>
+                  <a:srgbClr val="6B7392"/>
+                </a:solidFill>
+                <a:latin typeface="PingFang SC"/>
+              </a:rPr>
+              <a:t>Dify 企业介绍</a:t>
+            </a:r>
+          </a:p>
+        </p:txBody>
+      </p:sp>
+      <p:sp>
+        <p:nvSpPr>
+          <p:cNvPr id="35" name="TextBox 34"/>
+          <p:cNvSpPr txBox="1"/>
+          <p:nvPr/>
+        </p:nvSpPr>
+        <p:spPr>
+          <a:xfrm>
+            <a:off x="9753356" y="6610350"/>
+            <a:ext cx="1904952" cy="190500"/>
+          </a:xfrm>
+          <a:prstGeom prst="rect">
+            <a:avLst/>
+          </a:prstGeom>
+          <a:noFill/>
+        </p:spPr>
+        <p:txBody>
+          <a:bodyPr wrap="square" lIns="0" rIns="0" tIns="0" bIns="0">
+            <a:spAutoFit/>
+          </a:bodyPr>
+          <a:lstStyle/>
+          <a:p>
+            <a:pPr algn="r"/>
+            <a:r>
+              <a:rPr sz="1050" b="0" i="0">
+                <a:solidFill>
+                  <a:srgbClr val="6B7392"/>
+                </a:solidFill>
+                <a:latin typeface="SF Mono"/>
+              </a:rPr>
+              <a:t>07 / 08</a:t>
+            </a:r>
+          </a:p>
+        </p:txBody>
+      </p:sp>
     </p:spTree>
   </p:cSld>
   <p:clrMapOvr>
@@ -3424,6 +10232,14 @@
 <file path=ppt/slides/slide8.xml><?xml version="1.0" encoding="utf-8"?>
 <p:sld xmlns:a="http://schemas.openxmlformats.org/drawingml/2006/main" xmlns:p="http://schemas.openxmlformats.org/presentationml/2006/main" xmlns:r="http://schemas.openxmlformats.org/officeDocument/2006/relationships">
   <p:cSld>
+    <p:bg>
+      <p:bgPr>
+        <a:solidFill>
+          <a:srgbClr val="0A0E27"/>
+        </a:solidFill>
+        <a:effectLst/>
+      </p:bgPr>
+    </p:bg>
     <p:spTree>
       <p:nvGrpSpPr>
         <p:cNvPr id="1" name=""/>
@@ -3431,36 +10247,306 @@
         <p:nvPr/>
       </p:nvGrpSpPr>
       <p:grpSpPr/>
-      <p:pic>
-        <p:nvPicPr>
-          <p:cNvPr id="2" name="Picture 1" descr="08-end.png"/>
-          <p:cNvPicPr>
-            <a:picLocks noChangeAspect="1"/>
-          </p:cNvPicPr>
-          <p:nvPr/>
-        </p:nvPicPr>
-        <p:blipFill>
-          <a:blip r:embed="rId2">
-            <a:extLst>
-              <a:ext uri="{96DAC541-7B7A-43D3-8B79-37D633B846F1}">
-                <asvg:svgBlip xmlns:asvg="http://schemas.microsoft.com/office/drawing/2016/SVG/main" r:embed="rId3"/>
-              </a:ext>
-            </a:extLst>
-          </a:blip>
-          <a:stretch>
-            <a:fillRect/>
-          </a:stretch>
-        </p:blipFill>
-        <p:spPr>
-          <a:xfrm>
-            <a:off x="0" y="0"/>
-            <a:ext cx="12191695" cy="6858000"/>
-          </a:xfrm>
-          <a:prstGeom prst="rect">
-            <a:avLst/>
-          </a:prstGeom>
-        </p:spPr>
-      </p:pic>
+      <p:sp>
+        <p:nvSpPr>
+          <p:cNvPr id="2" name="Rounded Rectangle 1"/>
+          <p:cNvSpPr/>
+          <p:nvPr/>
+        </p:nvSpPr>
+        <p:spPr>
+          <a:xfrm>
+            <a:off x="533386" y="533400"/>
+            <a:ext cx="11124921" cy="5505450"/>
+          </a:xfrm>
+          <a:prstGeom prst="roundRect">
+            <a:avLst>
+              <a:gd name="adj" fmla="val 4844"/>
+            </a:avLst>
+          </a:prstGeom>
+          <a:solidFill>
+            <a:srgbClr val="FFFFFF"/>
+          </a:solidFill>
+          <a:ln w="12700">
+            <a:solidFill>
+              <a:srgbClr val="FFFFFF"/>
+            </a:solidFill>
+          </a:ln>
+        </p:spPr>
+        <p:style>
+          <a:lnRef idx="1">
+            <a:schemeClr val="accent1"/>
+          </a:lnRef>
+          <a:fillRef idx="3">
+            <a:schemeClr val="accent1"/>
+          </a:fillRef>
+          <a:effectRef idx="2">
+            <a:schemeClr val="accent1"/>
+          </a:effectRef>
+          <a:fontRef idx="minor">
+            <a:schemeClr val="lt1"/>
+          </a:fontRef>
+        </p:style>
+        <p:txBody>
+          <a:bodyPr rtlCol="0" anchor="ctr"/>
+          <a:lstStyle/>
+          <a:p>
+            <a:pPr algn="ctr"/>
+          </a:p>
+        </p:txBody>
+      </p:sp>
+      <p:sp>
+        <p:nvSpPr>
+          <p:cNvPr id="3" name="TextBox 2"/>
+          <p:cNvSpPr txBox="1"/>
+          <p:nvPr/>
+        </p:nvSpPr>
+        <p:spPr>
+          <a:xfrm>
+            <a:off x="914377" y="952500"/>
+            <a:ext cx="10362940" cy="209550"/>
+          </a:xfrm>
+          <a:prstGeom prst="rect">
+            <a:avLst/>
+          </a:prstGeom>
+          <a:noFill/>
+        </p:spPr>
+        <p:txBody>
+          <a:bodyPr wrap="square" lIns="0" rIns="0" tIns="0" bIns="0">
+            <a:spAutoFit/>
+          </a:bodyPr>
+          <a:lstStyle/>
+          <a:p>
+            <a:pPr algn="l"/>
+            <a:r>
+              <a:rPr sz="1200" b="1" i="0" spc="300">
+                <a:solidFill>
+                  <a:srgbClr val="00D4FF"/>
+                </a:solidFill>
+                <a:latin typeface="PingFang SC"/>
+              </a:rPr>
+              <a:t>THANK YOU</a:t>
+            </a:r>
+          </a:p>
+        </p:txBody>
+      </p:sp>
+      <p:sp>
+        <p:nvSpPr>
+          <p:cNvPr id="4" name="TextBox 3"/>
+          <p:cNvSpPr txBox="1"/>
+          <p:nvPr/>
+        </p:nvSpPr>
+        <p:spPr>
+          <a:xfrm>
+            <a:off x="914377" y="1276350"/>
+            <a:ext cx="10362940" cy="685800"/>
+          </a:xfrm>
+          <a:prstGeom prst="rect">
+            <a:avLst/>
+          </a:prstGeom>
+          <a:noFill/>
+        </p:spPr>
+        <p:txBody>
+          <a:bodyPr wrap="square" lIns="0" rIns="0" tIns="0" bIns="0">
+            <a:spAutoFit/>
+          </a:bodyPr>
+          <a:lstStyle/>
+          <a:p>
+            <a:pPr algn="l"/>
+            <a:r>
+              <a:rPr sz="4500" b="1" i="0">
+                <a:solidFill>
+                  <a:srgbClr val="FFFFFF"/>
+                </a:solidFill>
+                <a:latin typeface="PingFang SC"/>
+              </a:rPr>
+              <a:t>让我们一起，把 AI 装进每一个业务流程</a:t>
+            </a:r>
+          </a:p>
+        </p:txBody>
+      </p:sp>
+      <p:sp>
+        <p:nvSpPr>
+          <p:cNvPr id="5" name="TextBox 4"/>
+          <p:cNvSpPr txBox="1"/>
+          <p:nvPr/>
+        </p:nvSpPr>
+        <p:spPr>
+          <a:xfrm>
+            <a:off x="914377" y="2133600"/>
+            <a:ext cx="10362940" cy="400050"/>
+          </a:xfrm>
+          <a:prstGeom prst="rect">
+            <a:avLst/>
+          </a:prstGeom>
+          <a:noFill/>
+        </p:spPr>
+        <p:txBody>
+          <a:bodyPr wrap="square" lIns="0" rIns="0" tIns="0" bIns="0">
+            <a:spAutoFit/>
+          </a:bodyPr>
+          <a:lstStyle/>
+          <a:p>
+            <a:pPr algn="l"/>
+            <a:r>
+              <a:rPr sz="2250" b="0" i="0">
+                <a:solidFill>
+                  <a:srgbClr val="BCC4D8"/>
+                </a:solidFill>
+                <a:latin typeface="PingFang SC"/>
+              </a:rPr>
+              <a:t>联系 sales@dify.ai 安排技术演示</a:t>
+            </a:r>
+          </a:p>
+        </p:txBody>
+      </p:sp>
+      <p:sp>
+        <p:nvSpPr>
+          <p:cNvPr id="6" name="Rectangle 5"/>
+          <p:cNvSpPr/>
+          <p:nvPr/>
+        </p:nvSpPr>
+        <p:spPr>
+          <a:xfrm>
+            <a:off x="914377" y="4895850"/>
+            <a:ext cx="1142971" cy="38100"/>
+          </a:xfrm>
+          <a:prstGeom prst="rect">
+            <a:avLst/>
+          </a:prstGeom>
+          <a:solidFill>
+            <a:srgbClr val="7C5CFF"/>
+          </a:solidFill>
+          <a:ln>
+            <a:noFill/>
+          </a:ln>
+        </p:spPr>
+        <p:style>
+          <a:lnRef idx="1">
+            <a:schemeClr val="accent1"/>
+          </a:lnRef>
+          <a:fillRef idx="3">
+            <a:schemeClr val="accent1"/>
+          </a:fillRef>
+          <a:effectRef idx="2">
+            <a:schemeClr val="accent1"/>
+          </a:effectRef>
+          <a:fontRef idx="minor">
+            <a:schemeClr val="lt1"/>
+          </a:fontRef>
+        </p:style>
+        <p:txBody>
+          <a:bodyPr rtlCol="0" anchor="ctr"/>
+          <a:lstStyle/>
+          <a:p>
+            <a:pPr algn="ctr"/>
+          </a:p>
+        </p:txBody>
+      </p:sp>
+      <p:sp>
+        <p:nvSpPr>
+          <p:cNvPr id="7" name="TextBox 6"/>
+          <p:cNvSpPr txBox="1"/>
+          <p:nvPr/>
+        </p:nvSpPr>
+        <p:spPr>
+          <a:xfrm>
+            <a:off x="914377" y="5410200"/>
+            <a:ext cx="10362940" cy="238125"/>
+          </a:xfrm>
+          <a:prstGeom prst="rect">
+            <a:avLst/>
+          </a:prstGeom>
+          <a:noFill/>
+        </p:spPr>
+        <p:txBody>
+          <a:bodyPr wrap="square" lIns="0" rIns="0" tIns="0" bIns="0">
+            <a:spAutoFit/>
+          </a:bodyPr>
+          <a:lstStyle/>
+          <a:p>
+            <a:pPr algn="l"/>
+            <a:r>
+              <a:rPr sz="1350" b="0" i="0">
+                <a:solidFill>
+                  <a:srgbClr val="BCC4D8"/>
+                </a:solidFill>
+                <a:latin typeface="PingFang SC"/>
+              </a:rPr>
+              <a:t>Dify · 2026</a:t>
+            </a:r>
+          </a:p>
+        </p:txBody>
+      </p:sp>
+      <p:sp>
+        <p:nvSpPr>
+          <p:cNvPr id="8" name="TextBox 7"/>
+          <p:cNvSpPr txBox="1"/>
+          <p:nvPr/>
+        </p:nvSpPr>
+        <p:spPr>
+          <a:xfrm>
+            <a:off x="533386" y="6610350"/>
+            <a:ext cx="5714857" cy="190500"/>
+          </a:xfrm>
+          <a:prstGeom prst="rect">
+            <a:avLst/>
+          </a:prstGeom>
+          <a:noFill/>
+        </p:spPr>
+        <p:txBody>
+          <a:bodyPr wrap="square" lIns="0" rIns="0" tIns="0" bIns="0">
+            <a:spAutoFit/>
+          </a:bodyPr>
+          <a:lstStyle/>
+          <a:p>
+            <a:pPr algn="l"/>
+            <a:r>
+              <a:rPr sz="1050" b="0" i="0">
+                <a:solidFill>
+                  <a:srgbClr val="6B7392"/>
+                </a:solidFill>
+                <a:latin typeface="PingFang SC"/>
+              </a:rPr>
+              <a:t>Dify 企业介绍</a:t>
+            </a:r>
+          </a:p>
+        </p:txBody>
+      </p:sp>
+      <p:sp>
+        <p:nvSpPr>
+          <p:cNvPr id="9" name="TextBox 8"/>
+          <p:cNvSpPr txBox="1"/>
+          <p:nvPr/>
+        </p:nvSpPr>
+        <p:spPr>
+          <a:xfrm>
+            <a:off x="9753356" y="6610350"/>
+            <a:ext cx="1904952" cy="190500"/>
+          </a:xfrm>
+          <a:prstGeom prst="rect">
+            <a:avLst/>
+          </a:prstGeom>
+          <a:noFill/>
+        </p:spPr>
+        <p:txBody>
+          <a:bodyPr wrap="square" lIns="0" rIns="0" tIns="0" bIns="0">
+            <a:spAutoFit/>
+          </a:bodyPr>
+          <a:lstStyle/>
+          <a:p>
+            <a:pPr algn="r"/>
+            <a:r>
+              <a:rPr sz="1050" b="0" i="0">
+                <a:solidFill>
+                  <a:srgbClr val="6B7392"/>
+                </a:solidFill>
+                <a:latin typeface="SF Mono"/>
+              </a:rPr>
+              <a:t>08 / 08</a:t>
+            </a:r>
+          </a:p>
+        </p:txBody>
+      </p:sp>
     </p:spTree>
   </p:cSld>
   <p:clrMapOvr>

--- a/examples/dify-intro/deck.pptx
+++ b/examples/dify-intro/deck.pptx
@@ -3155,11 +3155,15 @@
             </a:avLst>
           </a:prstGeom>
           <a:solidFill>
-            <a:srgbClr val="FFFFFF"/>
+            <a:srgbClr val="FFFFFF">
+              <a:alpha val="6000"/>
+            </a:srgbClr>
           </a:solidFill>
           <a:ln w="12700">
             <a:solidFill>
-              <a:srgbClr val="FFFFFF"/>
+              <a:srgbClr val="FFFFFF">
+                <a:alpha val="12000"/>
+              </a:srgbClr>
             </a:solidFill>
           </a:ln>
         </p:spPr>
@@ -3344,11 +3348,15 @@
             </a:avLst>
           </a:prstGeom>
           <a:solidFill>
-            <a:srgbClr val="7C5CFF"/>
+            <a:srgbClr val="7C5CFF">
+              <a:alpha val="22000"/>
+            </a:srgbClr>
           </a:solidFill>
           <a:ln w="6350">
             <a:solidFill>
-              <a:srgbClr val="7C5CFF"/>
+              <a:srgbClr val="7C5CFF">
+                <a:alpha val="55000"/>
+              </a:srgbClr>
             </a:solidFill>
           </a:ln>
         </p:spPr>
@@ -3845,11 +3853,15 @@
             </a:avLst>
           </a:prstGeom>
           <a:solidFill>
-            <a:srgbClr val="FFFFFF"/>
+            <a:srgbClr val="FFFFFF">
+              <a:alpha val="6000"/>
+            </a:srgbClr>
           </a:solidFill>
           <a:ln w="12700">
             <a:solidFill>
-              <a:srgbClr val="FFFFFF"/>
+              <a:srgbClr val="FFFFFF">
+                <a:alpha val="12000"/>
+              </a:srgbClr>
             </a:solidFill>
           </a:ln>
         </p:spPr>
@@ -4110,11 +4122,15 @@
             </a:avLst>
           </a:prstGeom>
           <a:solidFill>
-            <a:srgbClr val="FFFFFF"/>
+            <a:srgbClr val="FFFFFF">
+              <a:alpha val="6000"/>
+            </a:srgbClr>
           </a:solidFill>
           <a:ln w="12700">
             <a:solidFill>
-              <a:srgbClr val="FFFFFF"/>
+              <a:srgbClr val="FFFFFF">
+                <a:alpha val="12000"/>
+              </a:srgbClr>
             </a:solidFill>
           </a:ln>
         </p:spPr>
@@ -4506,11 +4522,15 @@
             </a:avLst>
           </a:prstGeom>
           <a:solidFill>
-            <a:srgbClr val="FFFFFF"/>
+            <a:srgbClr val="FFFFFF">
+              <a:alpha val="6000"/>
+            </a:srgbClr>
           </a:solidFill>
           <a:ln w="12700">
             <a:solidFill>
-              <a:srgbClr val="FFFFFF"/>
+              <a:srgbClr val="FFFFFF">
+                <a:alpha val="12000"/>
+              </a:srgbClr>
             </a:solidFill>
           </a:ln>
         </p:spPr>
@@ -4678,11 +4698,15 @@
             </a:avLst>
           </a:prstGeom>
           <a:solidFill>
-            <a:srgbClr val="FFFFFF"/>
+            <a:srgbClr val="FFFFFF">
+              <a:alpha val="6000"/>
+            </a:srgbClr>
           </a:solidFill>
           <a:ln w="12700">
             <a:solidFill>
-              <a:srgbClr val="FFFFFF"/>
+              <a:srgbClr val="FFFFFF">
+                <a:alpha val="12000"/>
+              </a:srgbClr>
             </a:solidFill>
           </a:ln>
         </p:spPr>
@@ -5491,11 +5515,15 @@
             </a:avLst>
           </a:prstGeom>
           <a:solidFill>
-            <a:srgbClr val="FFFFFF"/>
+            <a:srgbClr val="FFFFFF">
+              <a:alpha val="6000"/>
+            </a:srgbClr>
           </a:solidFill>
           <a:ln w="12700">
             <a:solidFill>
-              <a:srgbClr val="FFFFFF"/>
+              <a:srgbClr val="FFFFFF">
+                <a:alpha val="12000"/>
+              </a:srgbClr>
             </a:solidFill>
           </a:ln>
         </p:spPr>
@@ -5721,11 +5749,15 @@
             </a:avLst>
           </a:prstGeom>
           <a:solidFill>
-            <a:srgbClr val="FFFFFF"/>
+            <a:srgbClr val="FFFFFF">
+              <a:alpha val="6000"/>
+            </a:srgbClr>
           </a:solidFill>
           <a:ln w="12700">
             <a:solidFill>
-              <a:srgbClr val="FFFFFF"/>
+              <a:srgbClr val="FFFFFF">
+                <a:alpha val="12000"/>
+              </a:srgbClr>
             </a:solidFill>
           </a:ln>
         </p:spPr>
@@ -5951,11 +5983,15 @@
             </a:avLst>
           </a:prstGeom>
           <a:solidFill>
-            <a:srgbClr val="FFFFFF"/>
+            <a:srgbClr val="FFFFFF">
+              <a:alpha val="6000"/>
+            </a:srgbClr>
           </a:solidFill>
           <a:ln w="12700">
             <a:solidFill>
-              <a:srgbClr val="FFFFFF"/>
+              <a:srgbClr val="FFFFFF">
+                <a:alpha val="12000"/>
+              </a:srgbClr>
             </a:solidFill>
           </a:ln>
         </p:spPr>
@@ -6312,11 +6348,15 @@
             </a:avLst>
           </a:prstGeom>
           <a:solidFill>
-            <a:srgbClr val="FFFFFF"/>
+            <a:srgbClr val="FFFFFF">
+              <a:alpha val="6000"/>
+            </a:srgbClr>
           </a:solidFill>
           <a:ln w="12700">
             <a:solidFill>
-              <a:srgbClr val="FFFFFF"/>
+              <a:srgbClr val="FFFFFF">
+                <a:alpha val="12000"/>
+              </a:srgbClr>
             </a:solidFill>
           </a:ln>
         </p:spPr>
@@ -6552,11 +6592,15 @@
             </a:avLst>
           </a:prstGeom>
           <a:solidFill>
-            <a:srgbClr val="FFFFFF"/>
+            <a:srgbClr val="FFFFFF">
+              <a:alpha val="6000"/>
+            </a:srgbClr>
           </a:solidFill>
           <a:ln w="12700">
             <a:solidFill>
-              <a:srgbClr val="FFFFFF"/>
+              <a:srgbClr val="FFFFFF">
+                <a:alpha val="12000"/>
+              </a:srgbClr>
             </a:solidFill>
           </a:ln>
         </p:spPr>
@@ -6747,11 +6791,15 @@
             </a:avLst>
           </a:prstGeom>
           <a:solidFill>
-            <a:srgbClr val="FFFFFF"/>
+            <a:srgbClr val="FFFFFF">
+              <a:alpha val="6000"/>
+            </a:srgbClr>
           </a:solidFill>
           <a:ln w="12700">
             <a:solidFill>
-              <a:srgbClr val="FFFFFF"/>
+              <a:srgbClr val="FFFFFF">
+                <a:alpha val="12000"/>
+              </a:srgbClr>
             </a:solidFill>
           </a:ln>
         </p:spPr>
@@ -6942,11 +6990,15 @@
             </a:avLst>
           </a:prstGeom>
           <a:solidFill>
-            <a:srgbClr val="FFFFFF"/>
+            <a:srgbClr val="FFFFFF">
+              <a:alpha val="6000"/>
+            </a:srgbClr>
           </a:solidFill>
           <a:ln w="12700">
             <a:solidFill>
-              <a:srgbClr val="FFFFFF"/>
+              <a:srgbClr val="FFFFFF">
+                <a:alpha val="12000"/>
+              </a:srgbClr>
             </a:solidFill>
           </a:ln>
         </p:spPr>
@@ -7137,11 +7189,15 @@
             </a:avLst>
           </a:prstGeom>
           <a:solidFill>
-            <a:srgbClr val="FFFFFF"/>
+            <a:srgbClr val="FFFFFF">
+              <a:alpha val="6000"/>
+            </a:srgbClr>
           </a:solidFill>
           <a:ln w="12700">
             <a:solidFill>
-              <a:srgbClr val="FFFFFF"/>
+              <a:srgbClr val="FFFFFF">
+                <a:alpha val="12000"/>
+              </a:srgbClr>
             </a:solidFill>
           </a:ln>
         </p:spPr>
@@ -7463,11 +7519,15 @@
             </a:avLst>
           </a:prstGeom>
           <a:solidFill>
-            <a:srgbClr val="FFFFFF"/>
+            <a:srgbClr val="FFFFFF">
+              <a:alpha val="6000"/>
+            </a:srgbClr>
           </a:solidFill>
           <a:ln w="12700">
             <a:solidFill>
-              <a:srgbClr val="FFFFFF"/>
+              <a:srgbClr val="FFFFFF">
+                <a:alpha val="12000"/>
+              </a:srgbClr>
             </a:solidFill>
           </a:ln>
         </p:spPr>
@@ -7615,11 +7675,15 @@
             </a:avLst>
           </a:prstGeom>
           <a:solidFill>
-            <a:srgbClr val="FFFFFF"/>
+            <a:srgbClr val="FFFFFF">
+              <a:alpha val="6000"/>
+            </a:srgbClr>
           </a:solidFill>
           <a:ln w="12700">
             <a:solidFill>
-              <a:srgbClr val="FFFFFF"/>
+              <a:srgbClr val="FFFFFF">
+                <a:alpha val="12000"/>
+              </a:srgbClr>
             </a:solidFill>
           </a:ln>
         </p:spPr>
@@ -8085,11 +8149,15 @@
             </a:avLst>
           </a:prstGeom>
           <a:solidFill>
-            <a:srgbClr val="FFFFFF"/>
+            <a:srgbClr val="FFFFFF">
+              <a:alpha val="6000"/>
+            </a:srgbClr>
           </a:solidFill>
           <a:ln w="12700">
             <a:solidFill>
-              <a:srgbClr val="FFFFFF"/>
+              <a:srgbClr val="FFFFFF">
+                <a:alpha val="12000"/>
+              </a:srgbClr>
             </a:solidFill>
           </a:ln>
         </p:spPr>
@@ -8555,11 +8623,15 @@
             </a:avLst>
           </a:prstGeom>
           <a:solidFill>
-            <a:srgbClr val="FFFFFF"/>
+            <a:srgbClr val="FFFFFF">
+              <a:alpha val="6000"/>
+            </a:srgbClr>
           </a:solidFill>
           <a:ln w="12700">
             <a:solidFill>
-              <a:srgbClr val="FFFFFF"/>
+              <a:srgbClr val="FFFFFF">
+                <a:alpha val="12000"/>
+              </a:srgbClr>
             </a:solidFill>
           </a:ln>
         </p:spPr>
@@ -9156,11 +9228,15 @@
             </a:avLst>
           </a:prstGeom>
           <a:solidFill>
-            <a:srgbClr val="FFFFFF"/>
+            <a:srgbClr val="FFFFFF">
+              <a:alpha val="6000"/>
+            </a:srgbClr>
           </a:solidFill>
           <a:ln w="12700">
             <a:solidFill>
-              <a:srgbClr val="FFFFFF"/>
+              <a:srgbClr val="FFFFFF">
+                <a:alpha val="12000"/>
+              </a:srgbClr>
             </a:solidFill>
           </a:ln>
         </p:spPr>
@@ -9273,7 +9349,9 @@
             </a:avLst>
           </a:prstGeom>
           <a:solidFill>
-            <a:srgbClr val="FFFFFF"/>
+            <a:srgbClr val="FFFFFF">
+              <a:alpha val="8000"/>
+            </a:srgbClr>
           </a:solidFill>
           <a:ln>
             <a:noFill/>
@@ -9433,7 +9511,9 @@
             </a:avLst>
           </a:prstGeom>
           <a:solidFill>
-            <a:srgbClr val="FFFFFF"/>
+            <a:srgbClr val="FFFFFF">
+              <a:alpha val="8000"/>
+            </a:srgbClr>
           </a:solidFill>
           <a:ln>
             <a:noFill/>
@@ -9593,7 +9673,9 @@
             </a:avLst>
           </a:prstGeom>
           <a:solidFill>
-            <a:srgbClr val="FFFFFF"/>
+            <a:srgbClr val="FFFFFF">
+              <a:alpha val="8000"/>
+            </a:srgbClr>
           </a:solidFill>
           <a:ln>
             <a:noFill/>
@@ -9718,11 +9800,15 @@
             </a:avLst>
           </a:prstGeom>
           <a:solidFill>
-            <a:srgbClr val="FFFFFF"/>
+            <a:srgbClr val="FFFFFF">
+              <a:alpha val="6000"/>
+            </a:srgbClr>
           </a:solidFill>
           <a:ln w="12700">
             <a:solidFill>
-              <a:srgbClr val="FFFFFF"/>
+              <a:srgbClr val="FFFFFF">
+                <a:alpha val="12000"/>
+              </a:srgbClr>
             </a:solidFill>
           </a:ln>
         </p:spPr>
@@ -10045,7 +10131,9 @@
             </a:avLst>
           </a:prstGeom>
           <a:solidFill>
-            <a:srgbClr val="FFFFFF"/>
+            <a:srgbClr val="FFFFFF">
+              <a:alpha val="10000"/>
+            </a:srgbClr>
           </a:solidFill>
           <a:ln>
             <a:noFill/>
@@ -10170,11 +10258,15 @@
             </a:avLst>
           </a:prstGeom>
           <a:solidFill>
-            <a:srgbClr val="FFFFFF"/>
+            <a:srgbClr val="FFFFFF">
+              <a:alpha val="6000"/>
+            </a:srgbClr>
           </a:solidFill>
           <a:ln w="12700">
             <a:solidFill>
-              <a:srgbClr val="FFFFFF"/>
+              <a:srgbClr val="FFFFFF">
+                <a:alpha val="12000"/>
+              </a:srgbClr>
             </a:solidFill>
           </a:ln>
         </p:spPr>
@@ -10276,11 +10368,15 @@
             </a:avLst>
           </a:prstGeom>
           <a:solidFill>
-            <a:srgbClr val="FFFFFF"/>
+            <a:srgbClr val="FFFFFF">
+              <a:alpha val="6000"/>
+            </a:srgbClr>
           </a:solidFill>
           <a:ln w="12700">
             <a:solidFill>
-              <a:srgbClr val="FFFFFF"/>
+              <a:srgbClr val="FFFFFF">
+                <a:alpha val="12000"/>
+              </a:srgbClr>
             </a:solidFill>
           </a:ln>
         </p:spPr>
@@ -10544,11 +10640,15 @@
             </a:avLst>
           </a:prstGeom>
           <a:solidFill>
-            <a:srgbClr val="FFFFFF"/>
+            <a:srgbClr val="FFFFFF">
+              <a:alpha val="6000"/>
+            </a:srgbClr>
           </a:solidFill>
           <a:ln w="12700">
             <a:solidFill>
-              <a:srgbClr val="FFFFFF"/>
+              <a:srgbClr val="FFFFFF">
+                <a:alpha val="12000"/>
+              </a:srgbClr>
             </a:solidFill>
           </a:ln>
         </p:spPr>

--- a/examples/dify-intro/deck.pptx
+++ b/examples/dify-intro/deck.pptx
@@ -3931,15 +3931,15 @@
         <p:spPr>
           <a:xfrm>
             <a:off x="914377" y="1371600"/>
-            <a:ext cx="1828754" cy="1257300"/>
-          </a:xfrm>
-          <a:prstGeom prst="rect">
-            <a:avLst/>
-          </a:prstGeom>
-          <a:noFill/>
-        </p:spPr>
-        <p:txBody>
-          <a:bodyPr wrap="square" lIns="0" rIns="0" tIns="0" bIns="0">
+            <a:ext cx="4705232" cy="1257300"/>
+          </a:xfrm>
+          <a:prstGeom prst="rect">
+            <a:avLst/>
+          </a:prstGeom>
+          <a:noFill/>
+        </p:spPr>
+        <p:txBody>
+          <a:bodyPr wrap="none" lIns="0" rIns="0" tIns="0" bIns="0">
             <a:spAutoFit/>
           </a:bodyPr>
           <a:lstStyle/>
@@ -4200,15 +4200,15 @@
         <p:spPr>
           <a:xfrm>
             <a:off x="6572085" y="1371600"/>
-            <a:ext cx="2971725" cy="1257300"/>
-          </a:xfrm>
-          <a:prstGeom prst="rect">
-            <a:avLst/>
-          </a:prstGeom>
-          <a:noFill/>
-        </p:spPr>
-        <p:txBody>
-          <a:bodyPr wrap="square" lIns="0" rIns="0" tIns="0" bIns="0">
+            <a:ext cx="4705232" cy="1257300"/>
+          </a:xfrm>
+          <a:prstGeom prst="rect">
+            <a:avLst/>
+          </a:prstGeom>
+          <a:noFill/>
+        </p:spPr>
+        <p:txBody>
+          <a:bodyPr wrap="none" lIns="0" rIns="0" tIns="0" bIns="0">
             <a:spAutoFit/>
           </a:bodyPr>
           <a:lstStyle/>
@@ -5593,15 +5593,15 @@
         <p:spPr>
           <a:xfrm>
             <a:off x="914377" y="1371600"/>
-            <a:ext cx="571485" cy="1000125"/>
-          </a:xfrm>
-          <a:prstGeom prst="rect">
-            <a:avLst/>
-          </a:prstGeom>
-          <a:noFill/>
-        </p:spPr>
-        <p:txBody>
-          <a:bodyPr wrap="square" lIns="0" rIns="0" tIns="0" bIns="0">
+            <a:ext cx="2819329" cy="1000125"/>
+          </a:xfrm>
+          <a:prstGeom prst="rect">
+            <a:avLst/>
+          </a:prstGeom>
+          <a:noFill/>
+        </p:spPr>
+        <p:txBody>
+          <a:bodyPr wrap="none" lIns="0" rIns="0" tIns="0" bIns="0">
             <a:spAutoFit/>
           </a:bodyPr>
           <a:lstStyle/>
@@ -5827,15 +5827,15 @@
         <p:spPr>
           <a:xfrm>
             <a:off x="4686182" y="1371600"/>
-            <a:ext cx="1485862" cy="1000125"/>
-          </a:xfrm>
-          <a:prstGeom prst="rect">
-            <a:avLst/>
-          </a:prstGeom>
-          <a:noFill/>
-        </p:spPr>
-        <p:txBody>
-          <a:bodyPr wrap="square" lIns="0" rIns="0" tIns="0" bIns="0">
+            <a:ext cx="2819329" cy="1000125"/>
+          </a:xfrm>
+          <a:prstGeom prst="rect">
+            <a:avLst/>
+          </a:prstGeom>
+          <a:noFill/>
+        </p:spPr>
+        <p:txBody>
+          <a:bodyPr wrap="none" lIns="0" rIns="0" tIns="0" bIns="0">
             <a:spAutoFit/>
           </a:bodyPr>
           <a:lstStyle/>
@@ -6061,15 +6061,15 @@
         <p:spPr>
           <a:xfrm>
             <a:off x="8457988" y="1371600"/>
-            <a:ext cx="1485862" cy="1000125"/>
-          </a:xfrm>
-          <a:prstGeom prst="rect">
-            <a:avLst/>
-          </a:prstGeom>
-          <a:noFill/>
-        </p:spPr>
-        <p:txBody>
-          <a:bodyPr wrap="square" lIns="0" rIns="0" tIns="0" bIns="0">
+            <a:ext cx="2819329" cy="1000125"/>
+          </a:xfrm>
+          <a:prstGeom prst="rect">
+            <a:avLst/>
+          </a:prstGeom>
+          <a:noFill/>
+        </p:spPr>
+        <p:txBody>
+          <a:bodyPr wrap="none" lIns="0" rIns="0" tIns="0" bIns="0">
             <a:spAutoFit/>
           </a:bodyPr>
           <a:lstStyle/>
@@ -6678,7 +6678,7 @@
           <a:noFill/>
         </p:spPr>
         <p:txBody>
-          <a:bodyPr wrap="square" lIns="0" rIns="0" tIns="0" bIns="0">
+          <a:bodyPr wrap="none" lIns="0" rIns="0" tIns="0" bIns="0">
             <a:spAutoFit/>
           </a:bodyPr>
           <a:lstStyle/>
@@ -6869,15 +6869,15 @@
         <p:spPr>
           <a:xfrm>
             <a:off x="914377" y="4210050"/>
-            <a:ext cx="781030" cy="723900"/>
-          </a:xfrm>
-          <a:prstGeom prst="rect">
-            <a:avLst/>
-          </a:prstGeom>
-          <a:noFill/>
-        </p:spPr>
-        <p:txBody>
-          <a:bodyPr wrap="square" lIns="0" rIns="0" tIns="0" bIns="0">
+            <a:ext cx="1447763" cy="723900"/>
+          </a:xfrm>
+          <a:prstGeom prst="rect">
+            <a:avLst/>
+          </a:prstGeom>
+          <a:noFill/>
+        </p:spPr>
+        <p:txBody>
+          <a:bodyPr wrap="none" lIns="0" rIns="0" tIns="0" bIns="0">
             <a:spAutoFit/>
           </a:bodyPr>
           <a:lstStyle/>
@@ -7076,7 +7076,7 @@
           <a:noFill/>
         </p:spPr>
         <p:txBody>
-          <a:bodyPr wrap="square" lIns="0" rIns="0" tIns="0" bIns="0">
+          <a:bodyPr wrap="none" lIns="0" rIns="0" tIns="0" bIns="0">
             <a:spAutoFit/>
           </a:bodyPr>
           <a:lstStyle/>
@@ -7267,15 +7267,15 @@
         <p:spPr>
           <a:xfrm>
             <a:off x="9829554" y="4210050"/>
-            <a:ext cx="781030" cy="723900"/>
-          </a:xfrm>
-          <a:prstGeom prst="rect">
-            <a:avLst/>
-          </a:prstGeom>
-          <a:noFill/>
-        </p:spPr>
-        <p:txBody>
-          <a:bodyPr wrap="square" lIns="0" rIns="0" tIns="0" bIns="0">
+            <a:ext cx="1447763" cy="723900"/>
+          </a:xfrm>
+          <a:prstGeom prst="rect">
+            <a:avLst/>
+          </a:prstGeom>
+          <a:noFill/>
+        </p:spPr>
+        <p:txBody>
+          <a:bodyPr wrap="none" lIns="0" rIns="0" tIns="0" bIns="0">
             <a:spAutoFit/>
           </a:bodyPr>
           <a:lstStyle/>
@@ -9878,15 +9878,15 @@
         <p:spPr>
           <a:xfrm>
             <a:off x="8496087" y="1266825"/>
-            <a:ext cx="857228" cy="542925"/>
-          </a:xfrm>
-          <a:prstGeom prst="rect">
-            <a:avLst/>
-          </a:prstGeom>
-          <a:noFill/>
-        </p:spPr>
-        <p:txBody>
-          <a:bodyPr wrap="square" lIns="0" rIns="0" tIns="0" bIns="0">
+            <a:ext cx="2781230" cy="542925"/>
+          </a:xfrm>
+          <a:prstGeom prst="rect">
+            <a:avLst/>
+          </a:prstGeom>
+          <a:noFill/>
+        </p:spPr>
+        <p:txBody>
+          <a:bodyPr wrap="none" lIns="0" rIns="0" tIns="0" bIns="0">
             <a:spAutoFit/>
           </a:bodyPr>
           <a:lstStyle/>
